--- a/content/W04/D4/slides/C2_W04_D04_fallback_STUDENT.pptx
+++ b/content/W04/D4/slides/C2_W04_D04_fallback_STUDENT.pptx
@@ -18,6 +18,7 @@
     <p:sldId id="266" r:id="rId18"/>
     <p:sldId id="267" r:id="rId19"/>
     <p:sldId id="268" r:id="rId20"/>
+    <p:sldId id="269" r:id="rId21"/>
   </p:sldIdLst>
   <p:sldSz cx="12191695" cy="6858000" type="screen4x3"/>
   <p:notesSz cx="6858000" cy="9144000"/>
@@ -514,12 +515,442 @@
           <a:lstStyle/>
           <a:p>
             <a:r>
-              <a:t>LIVE, one minute. Read the opening and say that the hour teaches no survival content; the IITGN</a:t>
-            </a:r>
-          </a:p>
-          <a:p>
-            <a:r>
-              <a:t>block owns that whenever it runs. Four short sections, 35 + 40 + 25 + 20 minutes.</a:t>
+              <a:t>This block runs only if the IITGN faculty session W4-3 (tentative) slips. It teaches no survival</a:t>
+            </a:r>
+          </a:p>
+          <a:p>
+            <a:r>
+              <a:t>curves, censoring or tests between curves, which stay with the block whenever it runs. Four</a:t>
+            </a:r>
+          </a:p>
+          <a:p>
+            <a:r>
+              <a:t>parts: 35, 40, 25 and 20 minutes, 120 in all.</a:t>
+            </a:r>
+          </a:p>
+          <a:p>
+            <a:r>
+              <a:t>LIVE, 35 minutes. Styles: StatQuest (ten members on the board), the case method (Swiggy's own</a:t>
+            </a:r>
+          </a:p>
+          <a:p>
+            <a:r>
+              <a:t>decision). The denominator question closes the part.</a:t>
+            </a:r>
+          </a:p>
+          <a:p>
+            <a:r>
+              <a:t>Transition: Swiggy's numbers.</a:t>
+            </a:r>
+          </a:p>
+        </p:txBody>
+      </p:sp>
+      <p:sp>
+        <p:nvSpPr>
+          <p:cNvPr id="4" name="Slide Number Placeholder 3"/>
+          <p:cNvSpPr>
+            <a:spLocks noGrp="1"/>
+          </p:cNvSpPr>
+          <p:nvPr>
+            <p:ph type="sldNum" idx="5" sz="quarter"/>
+          </p:nvPr>
+        </p:nvSpPr>
+        <p:spPr/>
+      </p:sp>
+    </p:spTree>
+  </p:cSld>
+  <p:clrMapOvr>
+    <a:masterClrMapping/>
+  </p:clrMapOvr>
+</p:notes>
+</file>
+
+<file path=ppt/notesSlides/notesSlide10.xml><?xml version="1.0" encoding="utf-8"?>
+<p:notes xmlns:a="http://schemas.openxmlformats.org/drawingml/2006/main" xmlns:p="http://schemas.openxmlformats.org/presentationml/2006/main" xmlns:r="http://schemas.openxmlformats.org/officeDocument/2006/relationships">
+  <p:cSld>
+    <p:spTree>
+      <p:nvGrpSpPr>
+        <p:cNvPr id="1" name=""/>
+        <p:cNvGrpSpPr/>
+        <p:nvPr/>
+      </p:nvGrpSpPr>
+      <p:grpSpPr>
+        <a:xfrm>
+          <a:off x="0" y="0"/>
+          <a:ext cx="0" cy="0"/>
+          <a:chOff x="0" y="0"/>
+          <a:chExt cx="0" cy="0"/>
+        </a:xfrm>
+      </p:grpSpPr>
+      <p:sp>
+        <p:nvSpPr>
+          <p:cNvPr id="2" name="Slide Image Placeholder 1"/>
+          <p:cNvSpPr>
+            <a:spLocks noGrp="1"/>
+          </p:cNvSpPr>
+          <p:nvPr>
+            <p:ph type="sldImg" idx="2"/>
+          </p:nvPr>
+        </p:nvSpPr>
+        <p:spPr/>
+      </p:sp>
+      <p:sp>
+        <p:nvSpPr>
+          <p:cNvPr id="3" name="Notes Placeholder 2"/>
+          <p:cNvSpPr>
+            <a:spLocks noGrp="1"/>
+          </p:cNvSpPr>
+          <p:nvPr>
+            <p:ph type="body" idx="3" sz="quarter"/>
+          </p:nvPr>
+        </p:nvSpPr>
+        <p:spPr/>
+        <p:txBody>
+          <a:bodyPr/>
+          <a:lstStyle/>
+          <a:p>
+            <a:r>
+              <a:t>Source:</a:t>
+            </a:r>
+          </a:p>
+          <a:p>
+            <a:r>
+              <a:t>https://www.bseindia.com/xml-data/corpfiling/AttachHis/42b3bf3b-1edb-4da7-849a-87ca9da27ff8.pdf (checked 12 October 2026)</a:t>
+            </a:r>
+          </a:p>
+          <a:p>
+            <a:r>
+              <a:t>LIVE, 10 minutes. Members choose to join when they expect to order more, so before and after</a:t>
+            </a:r>
+          </a:p>
+          <a:p>
+            <a:r>
+              <a:t>mixes the choice with the effect. Ask what a fair comparison would be.</a:t>
+            </a:r>
+          </a:p>
+          <a:p>
+            <a:r>
+              <a:t>Transition: the comparisons.</a:t>
+            </a:r>
+          </a:p>
+        </p:txBody>
+      </p:sp>
+      <p:sp>
+        <p:nvSpPr>
+          <p:cNvPr id="4" name="Slide Number Placeholder 3"/>
+          <p:cNvSpPr>
+            <a:spLocks noGrp="1"/>
+          </p:cNvSpPr>
+          <p:nvPr>
+            <p:ph type="sldNum" idx="5" sz="quarter"/>
+          </p:nvPr>
+        </p:nvSpPr>
+        <p:spPr/>
+      </p:sp>
+    </p:spTree>
+  </p:cSld>
+  <p:clrMapOvr>
+    <a:masterClrMapping/>
+  </p:clrMapOvr>
+</p:notes>
+</file>
+
+<file path=ppt/notesSlides/notesSlide11.xml><?xml version="1.0" encoding="utf-8"?>
+<p:notes xmlns:a="http://schemas.openxmlformats.org/drawingml/2006/main" xmlns:p="http://schemas.openxmlformats.org/presentationml/2006/main" xmlns:r="http://schemas.openxmlformats.org/officeDocument/2006/relationships">
+  <p:cSld>
+    <p:spTree>
+      <p:nvGrpSpPr>
+        <p:cNvPr id="1" name=""/>
+        <p:cNvGrpSpPr/>
+        <p:nvPr/>
+      </p:nvGrpSpPr>
+      <p:grpSpPr>
+        <a:xfrm>
+          <a:off x="0" y="0"/>
+          <a:ext cx="0" cy="0"/>
+          <a:chOff x="0" y="0"/>
+          <a:chExt cx="0" cy="0"/>
+        </a:xfrm>
+      </p:grpSpPr>
+      <p:sp>
+        <p:nvSpPr>
+          <p:cNvPr id="2" name="Slide Image Placeholder 1"/>
+          <p:cNvSpPr>
+            <a:spLocks noGrp="1"/>
+          </p:cNvSpPr>
+          <p:nvPr>
+            <p:ph type="sldImg" idx="2"/>
+          </p:nvPr>
+        </p:nvSpPr>
+        <p:spPr/>
+      </p:sp>
+      <p:sp>
+        <p:nvSpPr>
+          <p:cNvPr id="3" name="Notes Placeholder 2"/>
+          <p:cNvSpPr>
+            <a:spLocks noGrp="1"/>
+          </p:cNvSpPr>
+          <p:nvPr>
+            <p:ph type="body" idx="3" sz="quarter"/>
+          </p:nvPr>
+        </p:nvSpPr>
+        <p:spPr/>
+        <p:txBody>
+          <a:bodyPr/>
+          <a:lstStyle/>
+          <a:p>
+            <a:r>
+              <a:t>LIVE, 15 minutes. Groups rank the three for what Zomato could run. Keep it at this depth: how to</a:t>
+            </a:r>
+          </a:p>
+          <a:p>
+            <a:r>
+              <a:t>estimate the effect belongs to later weeks.</a:t>
+            </a:r>
+          </a:p>
+          <a:p>
+            <a:r>
+              <a:t>Transition: the second transcript.</a:t>
+            </a:r>
+          </a:p>
+        </p:txBody>
+      </p:sp>
+      <p:sp>
+        <p:nvSpPr>
+          <p:cNvPr id="4" name="Slide Number Placeholder 3"/>
+          <p:cNvSpPr>
+            <a:spLocks noGrp="1"/>
+          </p:cNvSpPr>
+          <p:nvPr>
+            <p:ph type="sldNum" idx="5" sz="quarter"/>
+          </p:nvPr>
+        </p:nvSpPr>
+        <p:spPr/>
+      </p:sp>
+    </p:spTree>
+  </p:cSld>
+  <p:clrMapOvr>
+    <a:masterClrMapping/>
+  </p:clrMapOvr>
+</p:notes>
+</file>
+
+<file path=ppt/notesSlides/notesSlide12.xml><?xml version="1.0" encoding="utf-8"?>
+<p:notes xmlns:a="http://schemas.openxmlformats.org/drawingml/2006/main" xmlns:p="http://schemas.openxmlformats.org/presentationml/2006/main" xmlns:r="http://schemas.openxmlformats.org/officeDocument/2006/relationships">
+  <p:cSld>
+    <p:spTree>
+      <p:nvGrpSpPr>
+        <p:cNvPr id="1" name=""/>
+        <p:cNvGrpSpPr/>
+        <p:nvPr/>
+      </p:nvGrpSpPr>
+      <p:grpSpPr>
+        <a:xfrm>
+          <a:off x="0" y="0"/>
+          <a:ext cx="0" cy="0"/>
+          <a:chOff x="0" y="0"/>
+          <a:chExt cx="0" cy="0"/>
+        </a:xfrm>
+      </p:grpSpPr>
+      <p:sp>
+        <p:nvSpPr>
+          <p:cNvPr id="2" name="Slide Image Placeholder 1"/>
+          <p:cNvSpPr>
+            <a:spLocks noGrp="1"/>
+          </p:cNvSpPr>
+          <p:nvPr>
+            <p:ph type="sldImg" idx="2"/>
+          </p:nvPr>
+        </p:nvSpPr>
+        <p:spPr/>
+      </p:sp>
+      <p:sp>
+        <p:nvSpPr>
+          <p:cNvPr id="3" name="Notes Placeholder 2"/>
+          <p:cNvSpPr>
+            <a:spLocks noGrp="1"/>
+          </p:cNvSpPr>
+          <p:nvPr>
+            <p:ph type="body" idx="3" sz="quarter"/>
+          </p:nvPr>
+        </p:nvSpPr>
+        <p:spPr/>
+        <p:txBody>
+          <a:bodyPr/>
+          <a:lstStyle/>
+          <a:p>
+            <a:r>
+              <a:t>LIVE, 20 minutes. The row's [D] anchor: the app team says the funnel stage you blamed is fine;</a:t>
+            </a:r>
+          </a:p>
+          <a:p>
+            <a:r>
+              <a:t>what evidence do you bring to the meeting? Pairs read and score it.</a:t>
+            </a:r>
+          </a:p>
+          <a:p>
+            <a:r>
+              <a:t>Transition: the transcript.</a:t>
+            </a:r>
+          </a:p>
+        </p:txBody>
+      </p:sp>
+      <p:sp>
+        <p:nvSpPr>
+          <p:cNvPr id="4" name="Slide Number Placeholder 3"/>
+          <p:cNvSpPr>
+            <a:spLocks noGrp="1"/>
+          </p:cNvSpPr>
+          <p:nvPr>
+            <p:ph type="sldNum" idx="5" sz="quarter"/>
+          </p:nvPr>
+        </p:nvSpPr>
+        <p:spPr/>
+      </p:sp>
+    </p:spTree>
+  </p:cSld>
+  <p:clrMapOvr>
+    <a:masterClrMapping/>
+  </p:clrMapOvr>
+</p:notes>
+</file>
+
+<file path=ppt/notesSlides/notesSlide13.xml><?xml version="1.0" encoding="utf-8"?>
+<p:notes xmlns:a="http://schemas.openxmlformats.org/drawingml/2006/main" xmlns:p="http://schemas.openxmlformats.org/presentationml/2006/main" xmlns:r="http://schemas.openxmlformats.org/officeDocument/2006/relationships">
+  <p:cSld>
+    <p:spTree>
+      <p:nvGrpSpPr>
+        <p:cNvPr id="1" name=""/>
+        <p:cNvGrpSpPr/>
+        <p:nvPr/>
+      </p:nvGrpSpPr>
+      <p:grpSpPr>
+        <a:xfrm>
+          <a:off x="0" y="0"/>
+          <a:ext cx="0" cy="0"/>
+          <a:chOff x="0" y="0"/>
+          <a:chExt cx="0" cy="0"/>
+        </a:xfrm>
+      </p:grpSpPr>
+      <p:sp>
+        <p:nvSpPr>
+          <p:cNvPr id="2" name="Slide Image Placeholder 1"/>
+          <p:cNvSpPr>
+            <a:spLocks noGrp="1"/>
+          </p:cNvSpPr>
+          <p:nvPr>
+            <p:ph type="sldImg" idx="2"/>
+          </p:nvPr>
+        </p:nvSpPr>
+        <p:spPr/>
+      </p:sp>
+      <p:sp>
+        <p:nvSpPr>
+          <p:cNvPr id="3" name="Notes Placeholder 2"/>
+          <p:cNvSpPr>
+            <a:spLocks noGrp="1"/>
+          </p:cNvSpPr>
+          <p:nvPr>
+            <p:ph type="body" idx="3" sz="quarter"/>
+          </p:nvPr>
+        </p:nvSpPr>
+        <p:spPr/>
+        <p:txBody>
+          <a:bodyPr/>
+          <a:lstStyle/>
+          <a:p>
+            <a:r>
+              <a:t>LIVE, 15 minutes. Pairs score the hire-grade side on the scorecard. The move is Tuesday's: restate,</a:t>
+            </a:r>
+          </a:p>
+          <a:p>
+            <a:r>
+              <a:t>answer from the evidence, concede what is true, say what would change your mind.</a:t>
+            </a:r>
+          </a:p>
+          <a:p>
+            <a:r>
+              <a:t>Transition: the close.</a:t>
+            </a:r>
+          </a:p>
+        </p:txBody>
+      </p:sp>
+      <p:sp>
+        <p:nvSpPr>
+          <p:cNvPr id="4" name="Slide Number Placeholder 3"/>
+          <p:cNvSpPr>
+            <a:spLocks noGrp="1"/>
+          </p:cNvSpPr>
+          <p:nvPr>
+            <p:ph type="sldNum" idx="5" sz="quarter"/>
+          </p:nvPr>
+        </p:nvSpPr>
+        <p:spPr/>
+      </p:sp>
+    </p:spTree>
+  </p:cSld>
+  <p:clrMapOvr>
+    <a:masterClrMapping/>
+  </p:clrMapOvr>
+</p:notes>
+</file>
+
+<file path=ppt/notesSlides/notesSlide14.xml><?xml version="1.0" encoding="utf-8"?>
+<p:notes xmlns:a="http://schemas.openxmlformats.org/drawingml/2006/main" xmlns:p="http://schemas.openxmlformats.org/presentationml/2006/main" xmlns:r="http://schemas.openxmlformats.org/officeDocument/2006/relationships">
+  <p:cSld>
+    <p:spTree>
+      <p:nvGrpSpPr>
+        <p:cNvPr id="1" name=""/>
+        <p:cNvGrpSpPr/>
+        <p:nvPr/>
+      </p:nvGrpSpPr>
+      <p:grpSpPr>
+        <a:xfrm>
+          <a:off x="0" y="0"/>
+          <a:ext cx="0" cy="0"/>
+          <a:chOff x="0" y="0"/>
+          <a:chExt cx="0" cy="0"/>
+        </a:xfrm>
+      </p:grpSpPr>
+      <p:sp>
+        <p:nvSpPr>
+          <p:cNvPr id="2" name="Slide Image Placeholder 1"/>
+          <p:cNvSpPr>
+            <a:spLocks noGrp="1"/>
+          </p:cNvSpPr>
+          <p:nvPr>
+            <p:ph type="sldImg" idx="2"/>
+          </p:nvPr>
+        </p:nvSpPr>
+        <p:spPr/>
+      </p:sp>
+      <p:sp>
+        <p:nvSpPr>
+          <p:cNvPr id="3" name="Notes Placeholder 2"/>
+          <p:cNvSpPr>
+            <a:spLocks noGrp="1"/>
+          </p:cNvSpPr>
+          <p:nvPr>
+            <p:ph type="body" idx="3" sz="quarter"/>
+          </p:nvPr>
+        </p:nvSpPr>
+        <p:spPr/>
+        <p:txBody>
+          <a:bodyPr/>
+          <a:lstStyle/>
+          <a:p>
+            <a:r>
+              <a:t>LIVE, 2 minutes. Nothing here touched survival curves, censoring or tests between curves; the</a:t>
+            </a:r>
+          </a:p>
+          <a:p>
+            <a:r>
+              <a:t>faculty block (tentative) takes them whenever it runs. Then return to the Kahoot if it has not run.</a:t>
+            </a:r>
+          </a:p>
+          <a:p>
+            <a:r>
+              <a:t>Transition: end of the block.</a:t>
             </a:r>
           </a:p>
         </p:txBody>
@@ -589,17 +1020,32 @@
           <a:lstStyle/>
           <a:p>
             <a:r>
-              <a:t>LIVE, 8 minutes. Walk the four lines aloud. The question for the room: which of these three</a:t>
-            </a:r>
-          </a:p>
-          <a:p>
-            <a:r>
-              <a:t>explanations could show up with no change in anyone's behaviour at all? Expect "removing weak</a:t>
-            </a:r>
-          </a:p>
-          <a:p>
-            <a:r>
-              <a:t>users" and reinforce it.</a:t>
+              <a:t>Sources:</a:t>
+            </a:r>
+          </a:p>
+          <a:p>
+            <a:r>
+              <a:t>https://nsearchives.nseindia.com/corporate/SWIGGY_30072026154100_Covering_Letter_Letter_to_Shareholders_-_signed.pdf (checked 12 October 2026)</a:t>
+            </a:r>
+          </a:p>
+          <a:p>
+            <a:r>
+              <a:t>https://www.swiggy.com/corporate/wp-content/uploads/2025/10/Q2-FY2026-Shareholder-letter.pdf (checked 12 October 2026)</a:t>
+            </a:r>
+          </a:p>
+          <a:p>
+            <a:r>
+              <a:t>LIVE, 8 minutes. Read the three numbers and the decision. Ask: which of these could rise with no</a:t>
+            </a:r>
+          </a:p>
+          <a:p>
+            <a:r>
+              <a:t>user ordering a single extra time? Expect "the retention rate"; the next slide shows how.</a:t>
+            </a:r>
+          </a:p>
+          <a:p>
+            <a:r>
+              <a:t>Transition: ten members on the board.</a:t>
             </a:r>
           </a:p>
         </p:txBody>
@@ -669,17 +1115,22 @@
           <a:lstStyle/>
           <a:p>
             <a:r>
-              <a:t>LIVE, 12 minutes. Build the table on the board with the room. The teaching move is StatQuest's:</a:t>
-            </a:r>
-          </a:p>
-          <a:p>
-            <a:r>
-              <a:t>tiny numbers aloud, each step named. The point is that a weaning policy and a product improvement</a:t>
-            </a:r>
-          </a:p>
-          <a:p>
-            <a:r>
-              <a:t>cannot be told apart from a blended number alone.</a:t>
+              <a:t>LIVE, 12 minutes. Build the table on the board with the room, column by column (invented</a:t>
+            </a:r>
+          </a:p>
+          <a:p>
+            <a:r>
+              <a:t>numbers). Then ask: from the blended number alone, could you tell a weaning from a better product?</a:t>
+            </a:r>
+          </a:p>
+          <a:p>
+            <a:r>
+              <a:t>No; the cohort table with its denominator can.</a:t>
+            </a:r>
+          </a:p>
+          <a:p>
+            <a:r>
+              <a:t>Transition: the denominator question.</a:t>
             </a:r>
           </a:p>
         </p:txBody>
@@ -749,12 +1200,17 @@
           <a:lstStyle/>
           <a:p>
             <a:r>
-              <a:t>LIVE, 15 minutes. The room writes the three denominator choices and names what each would say</a:t>
-            </a:r>
-          </a:p>
-          <a:p>
-            <a:r>
-              <a:t>about the lift. The hire-grade candidate asks for the denominator before trusting the number.</a:t>
+              <a:t>LIVE, 15 minutes. Groups write what each denominator would show after a weaning. Per retained</a:t>
+            </a:r>
+          </a:p>
+          <a:p>
+            <a:r>
+              <a:t>user rises most; per acquired user shows the removals as a fall; the total moves least.</a:t>
+            </a:r>
+          </a:p>
+          <a:p>
+            <a:r>
+              <a:t>Transition: the rerun, by week.</a:t>
             </a:r>
           </a:p>
         </p:txBody>
@@ -824,17 +1280,17 @@
           <a:lstStyle/>
           <a:p>
             <a:r>
-              <a:t>LIVE, 20 minutes. The pair exercise: redraw the Chennai triangle at the week axis, from the</a:t>
-            </a:r>
-          </a:p>
-          <a:p>
-            <a:r>
-              <a:t>member_months file (the finishing session owns the exercise's final form). Ask: which teaching</a:t>
-            </a:r>
-          </a:p>
-          <a:p>
-            <a:r>
-              <a:t>sentence survives, and which has to be rephrased.</a:t>
+              <a:t>LIVE, 40 minutes. The row's after-class task done in class, in pairs, on the event log. Styles:</a:t>
+            </a:r>
+          </a:p>
+          <a:p>
+            <a:r>
+              <a:t>Krish Naik (a table built line by line), Veritasium (predict the sale week's row first).</a:t>
+            </a:r>
+          </a:p>
+          <a:p>
+            <a:r>
+              <a:t>Transition: the task.</a:t>
             </a:r>
           </a:p>
         </p:txBody>
@@ -904,12 +1360,12 @@
           <a:lstStyle/>
           <a:p>
             <a:r>
-              <a:t>LIVE, 20 minutes. This is the mathematical close. The formula is the shorthand for what the hand</a:t>
-            </a:r>
-          </a:p>
-          <a:p>
-            <a:r>
-              <a:t>table and the triangle already showed. Then the self-selection story on Zomato.</a:t>
+              <a:t>LIVE, 20 minutes in pairs. Ask each pair to predict the sale week's row before computing it.</a:t>
+            </a:r>
+          </a:p>
+          <a:p>
+            <a:r>
+              <a:t>Transition: the table.</a:t>
             </a:r>
           </a:p>
         </p:txBody>
@@ -979,17 +1435,17 @@
           <a:lstStyle/>
           <a:p>
             <a:r>
-              <a:t>LIVE, 15 minutes. Walk the two columns side by side. The hire-grade candidate names the matched</a:t>
-            </a:r>
-          </a:p>
-          <a:p>
-            <a:r>
-              <a:t>comparison as the step that would move the number from a description to a claim. No causal</a:t>
-            </a:r>
-          </a:p>
-          <a:p>
-            <a:r>
-              <a:t>inference content past this slide; the IITGN block owns it when it runs.</a:t>
+              <a:t>LIVE, 10 minutes. Point at the sale week's two cells. The monthly table hid this inside the</a:t>
+            </a:r>
+          </a:p>
+          <a:p>
+            <a:r>
+              <a:t>signup month, which is month zero and never counted.</a:t>
+            </a:r>
+          </a:p>
+          <a:p>
+            <a:r>
+              <a:t>Transition: which story survives.</a:t>
             </a:r>
           </a:p>
         </p:txBody>
@@ -1059,12 +1515,17 @@
           <a:lstStyle/>
           <a:p>
             <a:r>
-              <a:t>LIVE, 10 minutes. This is the row's [D] anchor. The teaching move is the case method's: argue</a:t>
-            </a:r>
-          </a:p>
-          <a:p>
-            <a:r>
-              <a:t>from the evidence, concede what is true, bring the chart that answers the question asked.</a:t>
+              <a:t>LIVE, 10 minutes. The lesson: a cohort table's grain changes the numbers and keeps the method.</a:t>
+            </a:r>
+          </a:p>
+          <a:p>
+            <a:r>
+              <a:t>Name the grain on every chart, as the unit is named on every funnel.</a:t>
+            </a:r>
+          </a:p>
+          <a:p>
+            <a:r>
+              <a:t>Transition: Zomato's own number.</a:t>
             </a:r>
           </a:p>
         </p:txBody>
@@ -1134,12 +1595,17 @@
           <a:lstStyle/>
           <a:p>
             <a:r>
-              <a:t>LIVE, 2 minutes. Say the sentence. Return control to the main afternoon slot if the block is not</a:t>
-            </a:r>
-          </a:p>
-          <a:p>
-            <a:r>
-              <a:t>coming. If the block arrives late, close here and start W4-3 cleanly.</a:t>
+              <a:t>LIVE, 25 minutes. Kept descriptive: no causal method is taught. Styles: Veritasium (the</a:t>
+            </a:r>
+          </a:p>
+          <a:p>
+            <a:r>
+              <a:t>misconception first), the case method.</a:t>
+            </a:r>
+          </a:p>
+          <a:p>
+            <a:r>
+              <a:t>Transition: the number.</a:t>
             </a:r>
           </a:p>
         </p:txBody>
@@ -4185,8 +4651,8 @@
         </p:blipFill>
         <p:spPr>
           <a:xfrm>
-            <a:off x="621792" y="566928"/>
-            <a:ext cx="1051560" cy="1051560"/>
+            <a:off x="530352" y="201168"/>
+            <a:ext cx="420624" cy="420624"/>
           </a:xfrm>
           <a:prstGeom prst="rect">
             <a:avLst/>
@@ -4201,8 +4667,8 @@
         </p:nvSpPr>
         <p:spPr>
           <a:xfrm>
-            <a:off x="1901952" y="804672"/>
-            <a:ext cx="6858000" cy="300735"/>
+            <a:off x="1042416" y="228600"/>
+            <a:ext cx="5120640" cy="185166"/>
           </a:xfrm>
           <a:prstGeom prst="rect">
             <a:avLst/>
@@ -4217,7 +4683,7 @@
           <a:p>
             <a:pPr algn="l"/>
             <a:r>
-              <a:rPr sz="1600" b="1" i="0">
+              <a:rPr sz="900" b="1" i="0">
                 <a:solidFill>
                   <a:srgbClr val="FFFFFF"/>
                 </a:solidFill>
@@ -4236,8 +4702,8 @@
         </p:nvSpPr>
         <p:spPr>
           <a:xfrm>
-            <a:off x="1901952" y="1133856"/>
-            <a:ext cx="7772400" cy="152146"/>
+            <a:off x="1042416" y="420623"/>
+            <a:ext cx="5852160" cy="127381"/>
           </a:xfrm>
           <a:prstGeom prst="rect">
             <a:avLst/>
@@ -4252,33 +4718,175 @@
           <a:p>
             <a:pPr algn="l"/>
             <a:r>
-              <a:rPr sz="700" b="1" i="0" spc="300">
+              <a:rPr sz="550" b="1" i="0" spc="300">
+                <a:solidFill>
+                  <a:srgbClr val="CFC9EE"/>
+                </a:solidFill>
+                <a:latin typeface="Calibri"/>
+              </a:rPr>
+              <a:t>ADMINISTERED THROUGH THE COMPETENCY ADVANCEMENT ACADEMY</a:t>
+            </a:r>
+          </a:p>
+        </p:txBody>
+      </p:sp>
+      <p:sp>
+        <p:nvSpPr>
+          <p:cNvPr id="6" name="TextBox 5"/>
+          <p:cNvSpPr txBox="1"/>
+          <p:nvPr/>
+        </p:nvSpPr>
+        <p:spPr>
+          <a:xfrm>
+            <a:off x="5992063" y="310896"/>
+            <a:ext cx="5669280" cy="127381"/>
+          </a:xfrm>
+          <a:prstGeom prst="rect">
+            <a:avLst/>
+          </a:prstGeom>
+          <a:noFill/>
+        </p:spPr>
+        <p:txBody>
+          <a:bodyPr wrap="square" anchor="t" lIns="0" rIns="0" tIns="0" bIns="0">
+            <a:spAutoFit/>
+          </a:bodyPr>
+          <a:lstStyle/>
+          <a:p>
+            <a:pPr algn="r"/>
+            <a:r>
+              <a:rPr sz="550" b="1" i="0" spc="300">
+                <a:solidFill>
+                  <a:srgbClr val="CFC9EE"/>
+                </a:solidFill>
+                <a:latin typeface="Calibri"/>
+              </a:rPr>
+              <a:t>PG DIPLOMA IN AI-ML AND AGENTIC AI ENGINEERING  ·  COHORT 2</a:t>
+            </a:r>
+          </a:p>
+        </p:txBody>
+      </p:sp>
+      <p:sp>
+        <p:nvSpPr>
+          <p:cNvPr id="7" name="TextBox 6"/>
+          <p:cNvSpPr txBox="1"/>
+          <p:nvPr/>
+        </p:nvSpPr>
+        <p:spPr>
+          <a:xfrm>
+            <a:off x="731519" y="1143000"/>
+            <a:ext cx="3657600" cy="1371600"/>
+          </a:xfrm>
+          <a:prstGeom prst="rect">
+            <a:avLst/>
+          </a:prstGeom>
+          <a:noFill/>
+        </p:spPr>
+        <p:txBody>
+          <a:bodyPr wrap="square" anchor="t" lIns="0" rIns="0" tIns="0" bIns="0">
+            <a:spAutoFit/>
+          </a:bodyPr>
+          <a:lstStyle/>
+          <a:p>
+            <a:pPr algn="l"/>
+            <a:r>
+              <a:rPr sz="9600" b="0" i="0">
                 <a:solidFill>
                   <a:srgbClr val="D9A7FF"/>
                 </a:solidFill>
+                <a:latin typeface="Georgia"/>
+              </a:rPr>
+              <a:t>07</a:t>
+            </a:r>
+          </a:p>
+        </p:txBody>
+      </p:sp>
+      <p:sp>
+        <p:nvSpPr>
+          <p:cNvPr id="8" name="TextBox 7"/>
+          <p:cNvSpPr txBox="1"/>
+          <p:nvPr/>
+        </p:nvSpPr>
+        <p:spPr>
+          <a:xfrm>
+            <a:off x="731519" y="2606040"/>
+            <a:ext cx="10673791" cy="731520"/>
+          </a:xfrm>
+          <a:prstGeom prst="rect">
+            <a:avLst/>
+          </a:prstGeom>
+          <a:noFill/>
+        </p:spPr>
+        <p:txBody>
+          <a:bodyPr wrap="square" anchor="t" lIns="0" rIns="0" tIns="0" bIns="0">
+            <a:spAutoFit/>
+          </a:bodyPr>
+          <a:lstStyle/>
+          <a:p>
+            <a:pPr algn="l"/>
+            <a:r>
+              <a:rPr sz="4000" b="0" i="0">
+                <a:solidFill>
+                  <a:srgbClr val="FFFFFF"/>
+                </a:solidFill>
+                <a:latin typeface="Georgia"/>
+              </a:rPr>
+              <a:t>Can weaning lift retention?</a:t>
+            </a:r>
+          </a:p>
+        </p:txBody>
+      </p:sp>
+      <p:sp>
+        <p:nvSpPr>
+          <p:cNvPr id="9" name="TextBox 8"/>
+          <p:cNvSpPr txBox="1"/>
+          <p:nvPr/>
+        </p:nvSpPr>
+        <p:spPr>
+          <a:xfrm>
+            <a:off x="731519" y="3520440"/>
+            <a:ext cx="9509760" cy="531876"/>
+          </a:xfrm>
+          <a:prstGeom prst="rect">
+            <a:avLst/>
+          </a:prstGeom>
+          <a:noFill/>
+        </p:spPr>
+        <p:txBody>
+          <a:bodyPr wrap="square" anchor="t" lIns="0" rIns="0" tIns="0" bIns="0">
+            <a:spAutoFit/>
+          </a:bodyPr>
+          <a:lstStyle/>
+          <a:p>
+            <a:pPr algn="l"/>
+            <a:r>
+              <a:rPr sz="1500" b="0" i="0">
+                <a:solidFill>
+                  <a:srgbClr val="E4E1F1"/>
+                </a:solidFill>
                 <a:latin typeface="Calibri"/>
               </a:rPr>
-              <a:t>ADMINISTERED THROUGH THE COMPETENCY ADVANCEMENT ACADEMY</a:t>
-            </a:r>
-          </a:p>
-        </p:txBody>
-      </p:sp>
-      <p:sp>
-        <p:nvSpPr>
-          <p:cNvPr id="6" name="Rectangle 5"/>
+              <a:t>Zomato Gold, Chennai, continued, beside Swiggy's own published cohorts: Swiggy removed users with low expected value, so how much of a retention rise can that alone produce?</a:t>
+            </a:r>
+          </a:p>
+        </p:txBody>
+      </p:sp>
+      <p:sp>
+        <p:nvSpPr>
+          <p:cNvPr id="10" name="Rounded Rectangle 9"/>
           <p:cNvSpPr/>
           <p:nvPr/>
         </p:nvSpPr>
         <p:spPr>
           <a:xfrm>
-            <a:off x="621792" y="1938528"/>
-            <a:ext cx="10948111" cy="10972"/>
-          </a:xfrm>
-          <a:prstGeom prst="rect">
-            <a:avLst/>
+            <a:off x="731519" y="5074920"/>
+            <a:ext cx="1964591" cy="310896"/>
+          </a:xfrm>
+          <a:prstGeom prst="roundRect">
+            <a:avLst>
+              <a:gd name="adj" fmla="val 50000"/>
+            </a:avLst>
           </a:prstGeom>
           <a:solidFill>
-            <a:srgbClr val="A9A3D2"/>
+            <a:srgbClr val="D9A7FF"/>
           </a:solidFill>
           <a:ln>
             <a:noFill/>
@@ -4300,23 +4908,32 @@
           </a:fontRef>
         </p:style>
         <p:txBody>
-          <a:bodyPr rtlCol="0" anchor="ctr" wrap="square"/>
+          <a:bodyPr rtlCol="0" anchor="ctr" wrap="none" lIns="25400" rIns="25400" tIns="0" bIns="0"/>
           <a:lstStyle/>
           <a:p>
             <a:pPr algn="ctr"/>
-          </a:p>
-        </p:txBody>
-      </p:sp>
-      <p:sp>
-        <p:nvSpPr>
-          <p:cNvPr id="7" name="Rounded Rectangle 6"/>
+            <a:r>
+              <a:rPr sz="850" b="1">
+                <a:solidFill>
+                  <a:srgbClr val="1A0F5C"/>
+                </a:solidFill>
+                <a:latin typeface="Calibri"/>
+              </a:rPr>
+              <a:t>Can weaning lift retention?</a:t>
+            </a:r>
+          </a:p>
+        </p:txBody>
+      </p:sp>
+      <p:sp>
+        <p:nvSpPr>
+          <p:cNvPr id="11" name="Rounded Rectangle 10"/>
           <p:cNvSpPr/>
           <p:nvPr/>
         </p:nvSpPr>
         <p:spPr>
           <a:xfrm>
-            <a:off x="621792" y="2240280"/>
-            <a:ext cx="3479576" cy="329184"/>
+            <a:off x="2805839" y="5074920"/>
+            <a:ext cx="1905375" cy="310896"/>
           </a:xfrm>
           <a:prstGeom prst="roundRect">
             <a:avLst>
@@ -4351,27 +4968,137 @@
           <a:p>
             <a:pPr algn="ctr"/>
             <a:r>
-              <a:rPr sz="900" b="1" spc="250">
-                <a:solidFill>
-                  <a:srgbClr val="FFFFFF"/>
+              <a:rPr sz="850" b="0">
+                <a:solidFill>
+                  <a:srgbClr val="CFC9EE"/>
                 </a:solidFill>
                 <a:latin typeface="Calibri"/>
               </a:rPr>
-              <a:t>WEEK 4  ·  THURSDAY  ·  FALLBACK</a:t>
-            </a:r>
-          </a:p>
-        </p:txBody>
-      </p:sp>
-      <p:sp>
-        <p:nvSpPr>
-          <p:cNvPr id="8" name="TextBox 7"/>
+              <a:t>Does a weekly table agree?</a:t>
+            </a:r>
+          </a:p>
+        </p:txBody>
+      </p:sp>
+      <p:sp>
+        <p:nvSpPr>
+          <p:cNvPr id="12" name="Rounded Rectangle 11"/>
+          <p:cNvSpPr/>
+          <p:nvPr/>
+        </p:nvSpPr>
+        <p:spPr>
+          <a:xfrm>
+            <a:off x="4820942" y="5074920"/>
+            <a:ext cx="1905375" cy="310896"/>
+          </a:xfrm>
+          <a:prstGeom prst="roundRect">
+            <a:avLst>
+              <a:gd name="adj" fmla="val 50000"/>
+            </a:avLst>
+          </a:prstGeom>
+          <a:noFill/>
+          <a:ln w="9525">
+            <a:solidFill>
+              <a:srgbClr val="CFC9EE"/>
+            </a:solidFill>
+          </a:ln>
+          <a:effectLst/>
+        </p:spPr>
+        <p:style>
+          <a:lnRef idx="1">
+            <a:schemeClr val="accent1"/>
+          </a:lnRef>
+          <a:fillRef idx="3">
+            <a:schemeClr val="accent1"/>
+          </a:fillRef>
+          <a:effectRef idx="2">
+            <a:schemeClr val="accent1"/>
+          </a:effectRef>
+          <a:fontRef idx="minor">
+            <a:schemeClr val="lt1"/>
+          </a:fontRef>
+        </p:style>
+        <p:txBody>
+          <a:bodyPr rtlCol="0" anchor="ctr" wrap="none" lIns="25400" rIns="25400" tIns="0" bIns="0"/>
+          <a:lstStyle/>
+          <a:p>
+            <a:pPr algn="ctr"/>
+            <a:r>
+              <a:rPr sz="850" b="0">
+                <a:solidFill>
+                  <a:srgbClr val="CFC9EE"/>
+                </a:solidFill>
+                <a:latin typeface="Calibri"/>
+              </a:rPr>
+              <a:t>Did Gold cause the orders?</a:t>
+            </a:r>
+          </a:p>
+        </p:txBody>
+      </p:sp>
+      <p:sp>
+        <p:nvSpPr>
+          <p:cNvPr id="13" name="Rounded Rectangle 12"/>
+          <p:cNvSpPr/>
+          <p:nvPr/>
+        </p:nvSpPr>
+        <p:spPr>
+          <a:xfrm>
+            <a:off x="6836045" y="5074920"/>
+            <a:ext cx="2083023" cy="310896"/>
+          </a:xfrm>
+          <a:prstGeom prst="roundRect">
+            <a:avLst>
+              <a:gd name="adj" fmla="val 50000"/>
+            </a:avLst>
+          </a:prstGeom>
+          <a:noFill/>
+          <a:ln w="9525">
+            <a:solidFill>
+              <a:srgbClr val="CFC9EE"/>
+            </a:solidFill>
+          </a:ln>
+          <a:effectLst/>
+        </p:spPr>
+        <p:style>
+          <a:lnRef idx="1">
+            <a:schemeClr val="accent1"/>
+          </a:lnRef>
+          <a:fillRef idx="3">
+            <a:schemeClr val="accent1"/>
+          </a:fillRef>
+          <a:effectRef idx="2">
+            <a:schemeClr val="accent1"/>
+          </a:effectRef>
+          <a:fontRef idx="minor">
+            <a:schemeClr val="lt1"/>
+          </a:fontRef>
+        </p:style>
+        <p:txBody>
+          <a:bodyPr rtlCol="0" anchor="ctr" wrap="none" lIns="25400" rIns="25400" tIns="0" bIns="0"/>
+          <a:lstStyle/>
+          <a:p>
+            <a:pPr algn="ctr"/>
+            <a:r>
+              <a:rPr sz="850" b="0">
+                <a:solidFill>
+                  <a:srgbClr val="CFC9EE"/>
+                </a:solidFill>
+                <a:latin typeface="Calibri"/>
+              </a:rPr>
+              <a:t>Is the app team's stage fine?</a:t>
+            </a:r>
+          </a:p>
+        </p:txBody>
+      </p:sp>
+      <p:sp>
+        <p:nvSpPr>
+          <p:cNvPr id="14" name="TextBox 13"/>
           <p:cNvSpPr txBox="1"/>
           <p:nvPr/>
         </p:nvSpPr>
         <p:spPr>
           <a:xfrm>
-            <a:off x="621792" y="2807208"/>
-            <a:ext cx="10582351" cy="1291336"/>
+            <a:off x="530352" y="6437376"/>
+            <a:ext cx="9667951" cy="160401"/>
           </a:xfrm>
           <a:prstGeom prst="rect">
             <a:avLst/>
@@ -4386,27 +5113,27 @@
           <a:p>
             <a:pPr algn="l"/>
             <a:r>
-              <a:rPr sz="3800" b="0" i="0">
-                <a:solidFill>
-                  <a:srgbClr val="FFFFFF"/>
-                </a:solidFill>
-                <a:latin typeface="Georgia"/>
-              </a:rPr>
-              <a:t>The weaned-users hour: when a decline hides inside a lift</a:t>
-            </a:r>
-          </a:p>
-        </p:txBody>
-      </p:sp>
-      <p:sp>
-        <p:nvSpPr>
-          <p:cNvPr id="9" name="TextBox 8"/>
+              <a:rPr sz="750" b="0" i="0">
+                <a:solidFill>
+                  <a:srgbClr val="CFC9EE"/>
+                </a:solidFill>
+                <a:latin typeface="Calibri"/>
+              </a:rPr>
+              <a:t>Week 4 Day 4: the fallback block</a:t>
+            </a:r>
+          </a:p>
+        </p:txBody>
+      </p:sp>
+      <p:sp>
+        <p:nvSpPr>
+          <p:cNvPr id="15" name="TextBox 14"/>
           <p:cNvSpPr txBox="1"/>
           <p:nvPr/>
         </p:nvSpPr>
         <p:spPr>
           <a:xfrm>
-            <a:off x="621792" y="4263136"/>
-            <a:ext cx="10033711" cy="977645"/>
+            <a:off x="10198303" y="6437376"/>
+            <a:ext cx="1463040" cy="160401"/>
           </a:xfrm>
           <a:prstGeom prst="rect">
             <a:avLst/>
@@ -4419,400 +5146,15 @@
           </a:bodyPr>
           <a:lstStyle/>
           <a:p>
-            <a:pPr algn="l"/>
-            <a:r>
-              <a:rPr sz="1900" b="0" i="1">
-                <a:solidFill>
-                  <a:srgbClr val="D9A7FF"/>
-                </a:solidFill>
-                <a:latin typeface="Georgia"/>
-              </a:rPr>
-              <a:t>“Swiggy weaned over four million unprofitable users away and one-month retention rose from 55 to 61 percent. Part of that rise is the mix changing. Which part?”</a:t>
-            </a:r>
-          </a:p>
-        </p:txBody>
-      </p:sp>
-      <p:sp>
-        <p:nvSpPr>
-          <p:cNvPr id="10" name="TextBox 9"/>
-          <p:cNvSpPr txBox="1"/>
-          <p:nvPr/>
-        </p:nvSpPr>
-        <p:spPr>
-          <a:xfrm>
-            <a:off x="621792" y="5295646"/>
-            <a:ext cx="10033711" cy="399796"/>
-          </a:xfrm>
-          <a:prstGeom prst="rect">
-            <a:avLst/>
-          </a:prstGeom>
-          <a:noFill/>
-        </p:spPr>
-        <p:txBody>
-          <a:bodyPr wrap="square" anchor="t" lIns="0" rIns="0" tIns="0" bIns="0">
-            <a:spAutoFit/>
-          </a:bodyPr>
-          <a:lstStyle/>
-          <a:p>
-            <a:pPr algn="l"/>
-            <a:r>
-              <a:rPr sz="1100" b="0" i="0">
+            <a:pPr algn="r"/>
+            <a:r>
+              <a:rPr sz="750" b="0" i="0">
                 <a:solidFill>
                   <a:srgbClr val="CFC9EE"/>
                 </a:solidFill>
                 <a:latin typeface="Calibri"/>
               </a:rPr>
-              <a:t>The analyst reading Swiggy's Q1 FY27 letter. Illustrative use: the published numbers are Swiggy's, verified 12 October 2026; the dissection is the programme's.</a:t>
-            </a:r>
-          </a:p>
-        </p:txBody>
-      </p:sp>
-      <p:sp>
-        <p:nvSpPr>
-          <p:cNvPr id="11" name="TextBox 10"/>
-          <p:cNvSpPr txBox="1"/>
-          <p:nvPr/>
-        </p:nvSpPr>
-        <p:spPr>
-          <a:xfrm>
-            <a:off x="621792" y="6015482"/>
-            <a:ext cx="365760" cy="251205"/>
-          </a:xfrm>
-          <a:prstGeom prst="rect">
-            <a:avLst/>
-          </a:prstGeom>
-          <a:noFill/>
-        </p:spPr>
-        <p:txBody>
-          <a:bodyPr wrap="square" anchor="t" lIns="0" rIns="0" tIns="0" bIns="0">
-            <a:spAutoFit/>
-          </a:bodyPr>
-          <a:lstStyle/>
-          <a:p>
-            <a:pPr algn="l"/>
-            <a:r>
-              <a:rPr sz="1300" b="0" i="0">
-                <a:solidFill>
-                  <a:srgbClr val="D9A7FF"/>
-                </a:solidFill>
-                <a:latin typeface="Georgia"/>
-              </a:rPr>
-              <a:t>01</a:t>
-            </a:r>
-          </a:p>
-        </p:txBody>
-      </p:sp>
-      <p:sp>
-        <p:nvSpPr>
-          <p:cNvPr id="12" name="TextBox 11"/>
-          <p:cNvSpPr txBox="1"/>
-          <p:nvPr/>
-        </p:nvSpPr>
-        <p:spPr>
-          <a:xfrm>
-            <a:off x="1005839" y="6052058"/>
-            <a:ext cx="1898237" cy="185166"/>
-          </a:xfrm>
-          <a:prstGeom prst="rect">
-            <a:avLst/>
-          </a:prstGeom>
-          <a:noFill/>
-        </p:spPr>
-        <p:txBody>
-          <a:bodyPr wrap="square" anchor="t" lIns="0" rIns="0" tIns="0" bIns="0">
-            <a:spAutoFit/>
-          </a:bodyPr>
-          <a:lstStyle/>
-          <a:p>
-            <a:pPr algn="l"/>
-            <a:r>
-              <a:rPr sz="900" b="0" i="0">
-                <a:solidFill>
-                  <a:srgbClr val="FFFFFF"/>
-                </a:solidFill>
-                <a:latin typeface="Calibri"/>
-              </a:rPr>
-              <a:t>Weaned users and the mix move</a:t>
-            </a:r>
-          </a:p>
-        </p:txBody>
-      </p:sp>
-      <p:sp>
-        <p:nvSpPr>
-          <p:cNvPr id="13" name="TextBox 12"/>
-          <p:cNvSpPr txBox="1"/>
-          <p:nvPr/>
-        </p:nvSpPr>
-        <p:spPr>
-          <a:xfrm>
-            <a:off x="3086957" y="6015482"/>
-            <a:ext cx="365760" cy="251205"/>
-          </a:xfrm>
-          <a:prstGeom prst="rect">
-            <a:avLst/>
-          </a:prstGeom>
-          <a:noFill/>
-        </p:spPr>
-        <p:txBody>
-          <a:bodyPr wrap="square" anchor="t" lIns="0" rIns="0" tIns="0" bIns="0">
-            <a:spAutoFit/>
-          </a:bodyPr>
-          <a:lstStyle/>
-          <a:p>
-            <a:pPr algn="l"/>
-            <a:r>
-              <a:rPr sz="1300" b="0" i="0">
-                <a:solidFill>
-                  <a:srgbClr val="D9A7FF"/>
-                </a:solidFill>
-                <a:latin typeface="Georgia"/>
-              </a:rPr>
-              <a:t>02</a:t>
-            </a:r>
-          </a:p>
-        </p:txBody>
-      </p:sp>
-      <p:sp>
-        <p:nvSpPr>
-          <p:cNvPr id="14" name="TextBox 13"/>
-          <p:cNvSpPr txBox="1"/>
-          <p:nvPr/>
-        </p:nvSpPr>
-        <p:spPr>
-          <a:xfrm>
-            <a:off x="3471005" y="6052058"/>
-            <a:ext cx="1993392" cy="333756"/>
-          </a:xfrm>
-          <a:prstGeom prst="rect">
-            <a:avLst/>
-          </a:prstGeom>
-          <a:noFill/>
-        </p:spPr>
-        <p:txBody>
-          <a:bodyPr wrap="square" anchor="t" lIns="0" rIns="0" tIns="0" bIns="0">
-            <a:spAutoFit/>
-          </a:bodyPr>
-          <a:lstStyle/>
-          <a:p>
-            <a:pPr algn="l"/>
-            <a:r>
-              <a:rPr sz="900" b="0" i="0">
-                <a:solidFill>
-                  <a:srgbClr val="FFFFFF"/>
-                </a:solidFill>
-                <a:latin typeface="Calibri"/>
-              </a:rPr>
-              <a:t>Monthly against weekly on today's data</a:t>
-            </a:r>
-          </a:p>
-        </p:txBody>
-      </p:sp>
-      <p:sp>
-        <p:nvSpPr>
-          <p:cNvPr id="15" name="TextBox 14"/>
-          <p:cNvSpPr txBox="1"/>
-          <p:nvPr/>
-        </p:nvSpPr>
-        <p:spPr>
-          <a:xfrm>
-            <a:off x="5647277" y="6015482"/>
-            <a:ext cx="365760" cy="251205"/>
-          </a:xfrm>
-          <a:prstGeom prst="rect">
-            <a:avLst/>
-          </a:prstGeom>
-          <a:noFill/>
-        </p:spPr>
-        <p:txBody>
-          <a:bodyPr wrap="square" anchor="t" lIns="0" rIns="0" tIns="0" bIns="0">
-            <a:spAutoFit/>
-          </a:bodyPr>
-          <a:lstStyle/>
-          <a:p>
-            <a:pPr algn="l"/>
-            <a:r>
-              <a:rPr sz="1300" b="0" i="0">
-                <a:solidFill>
-                  <a:srgbClr val="D9A7FF"/>
-                </a:solidFill>
-                <a:latin typeface="Georgia"/>
-              </a:rPr>
-              <a:t>03</a:t>
-            </a:r>
-          </a:p>
-        </p:txBody>
-      </p:sp>
-      <p:sp>
-        <p:nvSpPr>
-          <p:cNvPr id="16" name="TextBox 15"/>
-          <p:cNvSpPr txBox="1"/>
-          <p:nvPr/>
-        </p:nvSpPr>
-        <p:spPr>
-          <a:xfrm>
-            <a:off x="6031325" y="6052058"/>
-            <a:ext cx="1993392" cy="333756"/>
-          </a:xfrm>
-          <a:prstGeom prst="rect">
-            <a:avLst/>
-          </a:prstGeom>
-          <a:noFill/>
-        </p:spPr>
-        <p:txBody>
-          <a:bodyPr wrap="square" anchor="t" lIns="0" rIns="0" tIns="0" bIns="0">
-            <a:spAutoFit/>
-          </a:bodyPr>
-          <a:lstStyle/>
-          <a:p>
-            <a:pPr algn="l"/>
-            <a:r>
-              <a:rPr sz="900" b="0" i="0">
-                <a:solidFill>
-                  <a:srgbClr val="FFFFFF"/>
-                </a:solidFill>
-                <a:latin typeface="Calibri"/>
-              </a:rPr>
-              <a:t>Zomato's 60 percent rise, kept descriptive</a:t>
-            </a:r>
-          </a:p>
-        </p:txBody>
-      </p:sp>
-      <p:sp>
-        <p:nvSpPr>
-          <p:cNvPr id="17" name="TextBox 16"/>
-          <p:cNvSpPr txBox="1"/>
-          <p:nvPr/>
-        </p:nvSpPr>
-        <p:spPr>
-          <a:xfrm>
-            <a:off x="8207597" y="6015482"/>
-            <a:ext cx="365760" cy="251205"/>
-          </a:xfrm>
-          <a:prstGeom prst="rect">
-            <a:avLst/>
-          </a:prstGeom>
-          <a:noFill/>
-        </p:spPr>
-        <p:txBody>
-          <a:bodyPr wrap="square" anchor="t" lIns="0" rIns="0" tIns="0" bIns="0">
-            <a:spAutoFit/>
-          </a:bodyPr>
-          <a:lstStyle/>
-          <a:p>
-            <a:pPr algn="l"/>
-            <a:r>
-              <a:rPr sz="1300" b="0" i="0">
-                <a:solidFill>
-                  <a:srgbClr val="D9A7FF"/>
-                </a:solidFill>
-                <a:latin typeface="Georgia"/>
-              </a:rPr>
-              <a:t>04</a:t>
-            </a:r>
-          </a:p>
-        </p:txBody>
-      </p:sp>
-      <p:sp>
-        <p:nvSpPr>
-          <p:cNvPr id="18" name="TextBox 17"/>
-          <p:cNvSpPr txBox="1"/>
-          <p:nvPr/>
-        </p:nvSpPr>
-        <p:spPr>
-          <a:xfrm>
-            <a:off x="8591645" y="6052058"/>
-            <a:ext cx="478631" cy="185166"/>
-          </a:xfrm>
-          <a:prstGeom prst="rect">
-            <a:avLst/>
-          </a:prstGeom>
-          <a:noFill/>
-        </p:spPr>
-        <p:txBody>
-          <a:bodyPr wrap="square" anchor="t" lIns="0" rIns="0" tIns="0" bIns="0">
-            <a:spAutoFit/>
-          </a:bodyPr>
-          <a:lstStyle/>
-          <a:p>
-            <a:pPr algn="l"/>
-            <a:r>
-              <a:rPr sz="900" b="0" i="0">
-                <a:solidFill>
-                  <a:srgbClr val="FFFFFF"/>
-                </a:solidFill>
-                <a:latin typeface="Calibri"/>
-              </a:rPr>
-              <a:t>Close</a:t>
-            </a:r>
-          </a:p>
-        </p:txBody>
-      </p:sp>
-      <p:sp>
-        <p:nvSpPr>
-          <p:cNvPr id="19" name="TextBox 18"/>
-          <p:cNvSpPr txBox="1"/>
-          <p:nvPr/>
-        </p:nvSpPr>
-        <p:spPr>
-          <a:xfrm>
-            <a:off x="530352" y="6437376"/>
-            <a:ext cx="9667951" cy="160401"/>
-          </a:xfrm>
-          <a:prstGeom prst="rect">
-            <a:avLst/>
-          </a:prstGeom>
-          <a:noFill/>
-        </p:spPr>
-        <p:txBody>
-          <a:bodyPr wrap="square" anchor="t" lIns="0" rIns="0" tIns="0" bIns="0">
-            <a:spAutoFit/>
-          </a:bodyPr>
-          <a:lstStyle/>
-          <a:p>
-            <a:pPr algn="l"/>
-            <a:r>
-              <a:rPr sz="750" b="0" i="0">
-                <a:solidFill>
-                  <a:srgbClr val="CFC9EE"/>
-                </a:solidFill>
-                <a:latin typeface="Calibri"/>
-              </a:rPr>
-              <a:t>Week 4, Day 4. The weaned-users hour: when a decline hides inside a lift</a:t>
-            </a:r>
-          </a:p>
-        </p:txBody>
-      </p:sp>
-      <p:sp>
-        <p:nvSpPr>
-          <p:cNvPr id="20" name="TextBox 19"/>
-          <p:cNvSpPr txBox="1"/>
-          <p:nvPr/>
-        </p:nvSpPr>
-        <p:spPr>
-          <a:xfrm>
-            <a:off x="10198303" y="6437376"/>
-            <a:ext cx="1463040" cy="160401"/>
-          </a:xfrm>
-          <a:prstGeom prst="rect">
-            <a:avLst/>
-          </a:prstGeom>
-          <a:noFill/>
-        </p:spPr>
-        <p:txBody>
-          <a:bodyPr wrap="square" anchor="t" lIns="0" rIns="0" tIns="0" bIns="0">
-            <a:spAutoFit/>
-          </a:bodyPr>
-          <a:lstStyle/>
-          <a:p>
-            <a:pPr algn="r"/>
-            <a:r>
-              <a:rPr sz="750" b="0" i="0">
-                <a:solidFill>
-                  <a:srgbClr val="CFC9EE"/>
-                </a:solidFill>
-                <a:latin typeface="Calibri"/>
-              </a:rPr>
-              <a:t>1 / 13</a:t>
+              <a:t>1 / 14</a:t>
             </a:r>
           </a:p>
         </p:txBody>
@@ -4983,7 +5325,7 @@
                 </a:solidFill>
                 <a:latin typeface="Calibri"/>
               </a:rPr>
-              <a:t>WEEK 4  ·  DAY 4  ·  KALPA GLOBAL CAPABILITY CENTRE</a:t>
+              <a:t>WEEK 4  ·  DAY 4  ·  THE FALLBACK, IF THE TENTATIVE FACULTY BLOCK SLIPS</a:t>
             </a:r>
           </a:p>
         </p:txBody>
@@ -5018,7 +5360,7 @@
                 </a:solidFill>
                 <a:latin typeface="Georgia"/>
               </a:rPr>
-              <a:t>Gold's 60 percent frequency rise, carefully read.</a:t>
+              <a:t>Gold members order about 60 percent more after joining</a:t>
             </a:r>
           </a:p>
         </p:txBody>
@@ -5053,21 +5395,45 @@
                 </a:solidFill>
                 <a:latin typeface="Calibri"/>
               </a:rPr>
-              <a:t>What self-selection question would the row ask here?</a:t>
-            </a:r>
-          </a:p>
-        </p:txBody>
-      </p:sp>
-      <p:sp>
-        <p:nvSpPr>
-          <p:cNvPr id="9" name="TextBox 8"/>
+              <a:t>What does Zomato's own number say, and what does it leave out?</a:t>
+            </a:r>
+          </a:p>
+        </p:txBody>
+      </p:sp>
+      <p:pic>
+        <p:nvPicPr>
+          <p:cNvPr id="9" name="mermaid diagram" descr="29d30e77a001c4e4.png"/>
+          <p:cNvPicPr>
+            <a:picLocks noChangeAspect="1"/>
+          </p:cNvPicPr>
+          <p:nvPr/>
+        </p:nvPicPr>
+        <p:blipFill>
+          <a:blip r:embed="rId5"/>
+          <a:stretch>
+            <a:fillRect/>
+          </a:stretch>
+        </p:blipFill>
+        <p:spPr>
+          <a:xfrm>
+            <a:off x="2924022" y="1956816"/>
+            <a:ext cx="6343650" cy="2300287"/>
+          </a:xfrm>
+          <a:prstGeom prst="rect">
+            <a:avLst/>
+          </a:prstGeom>
+        </p:spPr>
+      </p:pic>
+      <p:sp>
+        <p:nvSpPr>
+          <p:cNvPr id="10" name="TextBox 9"/>
           <p:cNvSpPr txBox="1"/>
           <p:nvPr/>
         </p:nvSpPr>
         <p:spPr>
           <a:xfrm>
-            <a:off x="530352" y="1956816"/>
-            <a:ext cx="11130991" cy="1048512"/>
+            <a:off x="530352" y="4403407"/>
+            <a:ext cx="11130991" cy="1324864"/>
           </a:xfrm>
           <a:prstGeom prst="rect">
             <a:avLst/>
@@ -5092,221 +5458,11 @@
                 </a:solidFill>
                 <a:latin typeface="Calibri"/>
               </a:rPr>
-              <a:t>The published Zomato letter says order frequency rose about 60 percent on average after a user joined Gold (Th4, verified 12 October 2026). The teaching read is kept descriptive: the number is real and it does not say Gold caused the rise.</a:t>
-            </a:r>
-          </a:p>
-        </p:txBody>
-      </p:sp>
-      <p:graphicFrame>
-        <p:nvGraphicFramePr>
-          <p:cNvPr id="10" name="Table 9"/>
-          <p:cNvGraphicFramePr>
-            <a:graphicFrameLocks noGrp="1"/>
-          </p:cNvGraphicFramePr>
-          <p:nvPr/>
-        </p:nvGraphicFramePr>
-        <p:xfrm>
-          <a:off x="530352" y="3133344"/>
-          <a:ext cx="11130990" cy="1479296"/>
-        </p:xfrm>
-        <a:graphic>
-          <a:graphicData uri="http://schemas.openxmlformats.org/drawingml/2006/table">
-            <a:tbl>
-              <a:tblPr firstRow="0" bandRow="0">
-                <a:tableStyleId>{2D5ABB26-0587-4C30-8999-92F81FD0307C}</a:tableStyleId>
-              </a:tblPr>
-              <a:tblGrid>
-                <a:gridCol w="5614414"/>
-                <a:gridCol w="5516576"/>
-              </a:tblGrid>
-              <a:tr h="369824">
-                <a:tc>
-                  <a:txBody>
-                    <a:bodyPr/>
-                    <a:lstStyle/>
-                    <a:p>
-                      <a:r>
-                        <a:rPr sz="1450" b="1" i="0">
-                          <a:solidFill>
-                            <a:srgbClr val="FFFFFF"/>
-                          </a:solidFill>
-                          <a:latin typeface="Calibri"/>
-                        </a:rPr>
-                        <a:t>What the number says</a:t>
-                      </a:r>
-                    </a:p>
-                  </a:txBody>
-                  <a:tcPr marL="101600" marR="101600" marT="38100" marB="38100" anchor="ctr">
-                    <a:solidFill>
-                      <a:srgbClr val="1A0F5C"/>
-                    </a:solidFill>
-                  </a:tcPr>
-                </a:tc>
-                <a:tc>
-                  <a:txBody>
-                    <a:bodyPr/>
-                    <a:lstStyle/>
-                    <a:p>
-                      <a:r>
-                        <a:rPr sz="1450" b="1" i="0">
-                          <a:solidFill>
-                            <a:srgbClr val="FFFFFF"/>
-                          </a:solidFill>
-                          <a:latin typeface="Calibri"/>
-                        </a:rPr>
-                        <a:t>What it does not say</a:t>
-                      </a:r>
-                    </a:p>
-                  </a:txBody>
-                  <a:tcPr marL="101600" marR="101600" marT="38100" marB="38100" anchor="ctr">
-                    <a:solidFill>
-                      <a:srgbClr val="1A0F5C"/>
-                    </a:solidFill>
-                  </a:tcPr>
-                </a:tc>
-              </a:tr>
-              <a:tr h="369824">
-                <a:tc>
-                  <a:txBody>
-                    <a:bodyPr/>
-                    <a:lstStyle/>
-                    <a:p>
-                      <a:r>
-                        <a:rPr sz="1400" b="0" i="0">
-                          <a:solidFill>
-                            <a:srgbClr val="1A1440"/>
-                          </a:solidFill>
-                          <a:latin typeface="Calibri"/>
-                        </a:rPr>
-                        <a:t>Frequency after joining is higher than frequency before</a:t>
-                      </a:r>
-                    </a:p>
-                  </a:txBody>
-                  <a:tcPr marL="101600" marR="101600" marT="38100" marB="38100" anchor="ctr">
-                    <a:solidFill>
-                      <a:srgbClr val="FFFFFF"/>
-                    </a:solidFill>
-                  </a:tcPr>
-                </a:tc>
-                <a:tc>
-                  <a:txBody>
-                    <a:bodyPr/>
-                    <a:lstStyle/>
-                    <a:p>
-                      <a:r>
-                        <a:rPr sz="1400" b="0" i="0">
-                          <a:solidFill>
-                            <a:srgbClr val="1A1440"/>
-                          </a:solidFill>
-                          <a:latin typeface="Calibri"/>
-                        </a:rPr>
-                        <a:t>The joining caused the rise</a:t>
-                      </a:r>
-                    </a:p>
-                  </a:txBody>
-                  <a:tcPr marL="101600" marR="101600" marT="38100" marB="38100" anchor="ctr">
-                    <a:solidFill>
-                      <a:srgbClr val="FFFFFF"/>
-                    </a:solidFill>
-                  </a:tcPr>
-                </a:tc>
-              </a:tr>
-              <a:tr h="369824">
-                <a:tc>
-                  <a:txBody>
-                    <a:bodyPr/>
-                    <a:lstStyle/>
-                    <a:p>
-                      <a:r>
-                        <a:rPr sz="1400" b="0" i="0">
-                          <a:solidFill>
-                            <a:srgbClr val="1A1440"/>
-                          </a:solidFill>
-                          <a:latin typeface="Calibri"/>
-                        </a:rPr>
-                        <a:t>The joined cohort is self-selected on expected ordering</a:t>
-                      </a:r>
-                    </a:p>
-                  </a:txBody>
-                  <a:tcPr marL="101600" marR="101600" marT="38100" marB="38100" anchor="ctr">
-                    <a:solidFill>
-                      <a:srgbClr val="F4F2FA"/>
-                    </a:solidFill>
-                  </a:tcPr>
-                </a:tc>
-                <a:tc>
-                  <a:txBody>
-                    <a:bodyPr/>
-                    <a:lstStyle/>
-                    <a:p>
-                      <a:r>
-                        <a:rPr sz="1400" b="0" i="0">
-                          <a:solidFill>
-                            <a:srgbClr val="1A1440"/>
-                          </a:solidFill>
-                          <a:latin typeface="Calibri"/>
-                        </a:rPr>
-                        <a:t>The marginal joiner behaves like the inframarginal one</a:t>
-                      </a:r>
-                    </a:p>
-                  </a:txBody>
-                  <a:tcPr marL="101600" marR="101600" marT="38100" marB="38100" anchor="ctr">
-                    <a:solidFill>
-                      <a:srgbClr val="F4F2FA"/>
-                    </a:solidFill>
-                  </a:tcPr>
-                </a:tc>
-              </a:tr>
-              <a:tr h="369824">
-                <a:tc>
-                  <a:txBody>
-                    <a:bodyPr/>
-                    <a:lstStyle/>
-                    <a:p>
-                      <a:r>
-                        <a:rPr sz="1400" b="0" i="0">
-                          <a:solidFill>
-                            <a:srgbClr val="1A1440"/>
-                          </a:solidFill>
-                          <a:latin typeface="Calibri"/>
-                        </a:rPr>
-                        <a:t>A matched non-joiner comparison would say more</a:t>
-                      </a:r>
-                    </a:p>
-                  </a:txBody>
-                  <a:tcPr marL="101600" marR="101600" marT="38100" marB="38100" anchor="ctr">
-                    <a:solidFill>
-                      <a:srgbClr val="FFFFFF"/>
-                    </a:solidFill>
-                  </a:tcPr>
-                </a:tc>
-                <a:tc>
-                  <a:txBody>
-                    <a:bodyPr/>
-                    <a:lstStyle/>
-                    <a:p>
-                      <a:r>
-                        <a:rPr sz="1400" b="0" i="0">
-                          <a:solidFill>
-                            <a:srgbClr val="1A1440"/>
-                          </a:solidFill>
-                          <a:latin typeface="Calibri"/>
-                        </a:rPr>
-                        <a:t>Nothing is said about non-joiners' trajectories</a:t>
-                      </a:r>
-                    </a:p>
-                  </a:txBody>
-                  <a:tcPr marL="101600" marR="101600" marT="38100" marB="38100" anchor="ctr">
-                    <a:solidFill>
-                      <a:srgbClr val="FFFFFF"/>
-                    </a:solidFill>
-                  </a:tcPr>
-                </a:tc>
-              </a:tr>
-            </a:tbl>
-          </a:graphicData>
-        </a:graphic>
-      </p:graphicFrame>
+              <a:t>Zomato's shareholder letter of 19 May 2023 (checked 12 October 2026) says Gold reached 1.8 million members in Q4 FY23, its members' orders were about 30 percent of food delivery GOV in March 2023, and their order frequency rose about 60 percent after joining. The number describes members; it does not show what Gold caused.</a:t>
+            </a:r>
+          </a:p>
+        </p:txBody>
+      </p:sp>
       <p:sp>
         <p:nvSpPr>
           <p:cNvPr id="11" name="Oval 10"/>
@@ -5360,7 +5516,7 @@
         <p:spPr>
           <a:xfrm>
             <a:off x="640080" y="6437376"/>
-            <a:ext cx="1608486" cy="152146"/>
+            <a:ext cx="1516475" cy="152146"/>
           </a:xfrm>
           <a:prstGeom prst="rect">
             <a:avLst/>
@@ -5381,7 +5537,7 @@
                 </a:solidFill>
                 <a:latin typeface="Calibri"/>
               </a:rPr>
-              <a:t>Weaned users and the mix move</a:t>
+              <a:t>Can weaning lift retention?</a:t>
             </a:r>
           </a:p>
         </p:txBody>
@@ -5394,7 +5550,7 @@
         </p:nvSpPr>
         <p:spPr>
           <a:xfrm>
-            <a:off x="2340006" y="6492240"/>
+            <a:off x="2247995" y="6492240"/>
             <a:ext cx="64008" cy="64008"/>
           </a:xfrm>
           <a:prstGeom prst="ellipse">
@@ -5438,8 +5594,8 @@
         </p:nvSpPr>
         <p:spPr>
           <a:xfrm>
-            <a:off x="2449734" y="6437376"/>
-            <a:ext cx="2022538" cy="152146"/>
+            <a:off x="2357723" y="6437376"/>
+            <a:ext cx="1470469" cy="152146"/>
           </a:xfrm>
           <a:prstGeom prst="rect">
             <a:avLst/>
@@ -5460,7 +5616,7 @@
                 </a:solidFill>
                 <a:latin typeface="Calibri"/>
               </a:rPr>
-              <a:t>Monthly against weekly on today's data</a:t>
+              <a:t>Does a weekly table agree?</a:t>
             </a:r>
           </a:p>
         </p:txBody>
@@ -5473,7 +5629,7 @@
         </p:nvSpPr>
         <p:spPr>
           <a:xfrm>
-            <a:off x="4563713" y="6492240"/>
+            <a:off x="3919632" y="6492240"/>
             <a:ext cx="64008" cy="64008"/>
           </a:xfrm>
           <a:prstGeom prst="ellipse">
@@ -5517,8 +5673,8 @@
         </p:nvSpPr>
         <p:spPr>
           <a:xfrm>
-            <a:off x="4673441" y="6437376"/>
-            <a:ext cx="2194560" cy="152146"/>
+            <a:off x="4029360" y="6437376"/>
+            <a:ext cx="1470469" cy="152146"/>
           </a:xfrm>
           <a:prstGeom prst="rect">
             <a:avLst/>
@@ -5539,7 +5695,7 @@
                 </a:solidFill>
                 <a:latin typeface="Calibri"/>
               </a:rPr>
-              <a:t>Zomato's 60 percent rise, kept descriptive</a:t>
+              <a:t>Did Gold cause the orders?</a:t>
             </a:r>
           </a:p>
         </p:txBody>
@@ -5552,7 +5708,7 @@
         </p:nvSpPr>
         <p:spPr>
           <a:xfrm>
-            <a:off x="6959441" y="6492240"/>
+            <a:off x="5591270" y="6492240"/>
             <a:ext cx="64008" cy="64008"/>
           </a:xfrm>
           <a:prstGeom prst="ellipse">
@@ -5596,8 +5752,8 @@
         </p:nvSpPr>
         <p:spPr>
           <a:xfrm>
-            <a:off x="7069169" y="6437376"/>
-            <a:ext cx="504348" cy="152146"/>
+            <a:off x="5700998" y="6437376"/>
+            <a:ext cx="1608486" cy="152146"/>
           </a:xfrm>
           <a:prstGeom prst="rect">
             <a:avLst/>
@@ -5618,7 +5774,7 @@
                 </a:solidFill>
                 <a:latin typeface="Calibri"/>
               </a:rPr>
-              <a:t>Close</a:t>
+              <a:t>Is the app team's stage fine?</a:t>
             </a:r>
           </a:p>
         </p:txBody>
@@ -5653,7 +5809,7 @@
                 </a:solidFill>
                 <a:latin typeface="Calibri"/>
               </a:rPr>
-              <a:t>S6  ·  10 / 13</a:t>
+              <a:t>S7  ·  10 / 14</a:t>
             </a:r>
           </a:p>
         </p:txBody>
@@ -5824,7 +5980,7 @@
                 </a:solidFill>
                 <a:latin typeface="Calibri"/>
               </a:rPr>
-              <a:t>WEEK 4  ·  DAY 4  ·  KALPA GLOBAL CAPABILITY CENTRE</a:t>
+              <a:t>WEEK 4  ·  DAY 4  ·  THE FALLBACK, IF THE TENTATIVE FACULTY BLOCK SLIPS</a:t>
             </a:r>
           </a:p>
         </p:txBody>
@@ -5859,7 +6015,7 @@
                 </a:solidFill>
                 <a:latin typeface="Georgia"/>
               </a:rPr>
-              <a:t>The second transcript: the app team disputes</a:t>
+              <a:t>Three comparisons that would say more</a:t>
             </a:r>
           </a:p>
         </p:txBody>
@@ -5894,7 +6050,7 @@
                 </a:solidFill>
                 <a:latin typeface="Calibri"/>
               </a:rPr>
-              <a:t>How does a hire-grade response answer a dispute that is partly right?</a:t>
+              <a:t>Which comparison would separate what Gold did from who chose Gold?</a:t>
             </a:r>
           </a:p>
         </p:txBody>
@@ -5909,7 +6065,7 @@
         </p:nvGraphicFramePr>
         <p:xfrm>
           <a:off x="530352" y="1956816"/>
-          <a:ext cx="11130990" cy="2574544"/>
+          <a:ext cx="11130990" cy="2204720"/>
         </p:xfrm>
         <a:graphic>
           <a:graphicData uri="http://schemas.openxmlformats.org/drawingml/2006/table">
@@ -5918,8 +6074,1465 @@
                 <a:tableStyleId>{2D5ABB26-0587-4C30-8999-92F81FD0307C}</a:tableStyleId>
               </a:tblPr>
               <a:tblGrid>
-                <a:gridCol w="1544928"/>
-                <a:gridCol w="4210882"/>
+                <a:gridCol w="4494839"/>
+                <a:gridCol w="3520966"/>
+                <a:gridCol w="3115185"/>
+              </a:tblGrid>
+              <a:tr h="369824">
+                <a:tc>
+                  <a:txBody>
+                    <a:bodyPr/>
+                    <a:lstStyle/>
+                    <a:p>
+                      <a:r>
+                        <a:rPr sz="1450" b="1" i="0">
+                          <a:solidFill>
+                            <a:srgbClr val="FFFFFF"/>
+                          </a:solidFill>
+                          <a:latin typeface="Calibri"/>
+                        </a:rPr>
+                        <a:t>Comparison</a:t>
+                      </a:r>
+                    </a:p>
+                  </a:txBody>
+                  <a:tcPr marL="101600" marR="101600" marT="38100" marB="38100" anchor="ctr">
+                    <a:solidFill>
+                      <a:srgbClr val="1A0F5C"/>
+                    </a:solidFill>
+                  </a:tcPr>
+                </a:tc>
+                <a:tc>
+                  <a:txBody>
+                    <a:bodyPr/>
+                    <a:lstStyle/>
+                    <a:p>
+                      <a:r>
+                        <a:rPr sz="1450" b="1" i="0">
+                          <a:solidFill>
+                            <a:srgbClr val="FFFFFF"/>
+                          </a:solidFill>
+                          <a:latin typeface="Calibri"/>
+                        </a:rPr>
+                        <a:t>What it controls for</a:t>
+                      </a:r>
+                    </a:p>
+                  </a:txBody>
+                  <a:tcPr marL="101600" marR="101600" marT="38100" marB="38100" anchor="ctr">
+                    <a:solidFill>
+                      <a:srgbClr val="1A0F5C"/>
+                    </a:solidFill>
+                  </a:tcPr>
+                </a:tc>
+                <a:tc>
+                  <a:txBody>
+                    <a:bodyPr/>
+                    <a:lstStyle/>
+                    <a:p>
+                      <a:r>
+                        <a:rPr sz="1450" b="1" i="0">
+                          <a:solidFill>
+                            <a:srgbClr val="FFFFFF"/>
+                          </a:solidFill>
+                          <a:latin typeface="Calibri"/>
+                        </a:rPr>
+                        <a:t>What it still misses</a:t>
+                      </a:r>
+                    </a:p>
+                  </a:txBody>
+                  <a:tcPr marL="101600" marR="101600" marT="38100" marB="38100" anchor="ctr">
+                    <a:solidFill>
+                      <a:srgbClr val="1A0F5C"/>
+                    </a:solidFill>
+                  </a:tcPr>
+                </a:tc>
+              </a:tr>
+              <a:tr h="611632">
+                <a:tc>
+                  <a:txBody>
+                    <a:bodyPr/>
+                    <a:lstStyle/>
+                    <a:p>
+                      <a:r>
+                        <a:rPr sz="1400" b="0" i="0">
+                          <a:solidFill>
+                            <a:srgbClr val="1A1440"/>
+                          </a:solidFill>
+                          <a:latin typeface="Calibri"/>
+                        </a:rPr>
+                        <a:t>Matched customers who did not join</a:t>
+                      </a:r>
+                    </a:p>
+                  </a:txBody>
+                  <a:tcPr marL="101600" marR="101600" marT="38100" marB="38100" anchor="ctr">
+                    <a:solidFill>
+                      <a:srgbClr val="FFFFFF"/>
+                    </a:solidFill>
+                  </a:tcPr>
+                </a:tc>
+                <a:tc>
+                  <a:txBody>
+                    <a:bodyPr/>
+                    <a:lstStyle/>
+                    <a:p>
+                      <a:r>
+                        <a:rPr sz="1400" b="0" i="0">
+                          <a:solidFill>
+                            <a:srgbClr val="1A1440"/>
+                          </a:solidFill>
+                          <a:latin typeface="Calibri"/>
+                        </a:rPr>
+                        <a:t>Customers who ordered alike before</a:t>
+                      </a:r>
+                    </a:p>
+                  </a:txBody>
+                  <a:tcPr marL="101600" marR="101600" marT="38100" marB="38100" anchor="ctr">
+                    <a:solidFill>
+                      <a:srgbClr val="FFFFFF"/>
+                    </a:solidFill>
+                  </a:tcPr>
+                </a:tc>
+                <a:tc>
+                  <a:txBody>
+                    <a:bodyPr/>
+                    <a:lstStyle/>
+                    <a:p>
+                      <a:r>
+                        <a:rPr sz="1400" b="0" i="0">
+                          <a:solidFill>
+                            <a:srgbClr val="1A1440"/>
+                          </a:solidFill>
+                          <a:latin typeface="Calibri"/>
+                        </a:rPr>
+                        <a:t>Why one joined and the other did not</a:t>
+                      </a:r>
+                    </a:p>
+                  </a:txBody>
+                  <a:tcPr marL="101600" marR="101600" marT="38100" marB="38100" anchor="ctr">
+                    <a:solidFill>
+                      <a:srgbClr val="FFFFFF"/>
+                    </a:solidFill>
+                  </a:tcPr>
+                </a:tc>
+              </a:tr>
+              <a:tr h="611632">
+                <a:tc>
+                  <a:txBody>
+                    <a:bodyPr/>
+                    <a:lstStyle/>
+                    <a:p>
+                      <a:r>
+                        <a:rPr sz="1400" b="0" i="0">
+                          <a:solidFill>
+                            <a:srgbClr val="1A1440"/>
+                          </a:solidFill>
+                          <a:latin typeface="Calibri"/>
+                        </a:rPr>
+                        <a:t>The trend before joining</a:t>
+                      </a:r>
+                    </a:p>
+                  </a:txBody>
+                  <a:tcPr marL="101600" marR="101600" marT="38100" marB="38100" anchor="ctr">
+                    <a:solidFill>
+                      <a:srgbClr val="F4F2FA"/>
+                    </a:solidFill>
+                  </a:tcPr>
+                </a:tc>
+                <a:tc>
+                  <a:txBody>
+                    <a:bodyPr/>
+                    <a:lstStyle/>
+                    <a:p>
+                      <a:r>
+                        <a:rPr sz="1400" b="0" i="0">
+                          <a:solidFill>
+                            <a:srgbClr val="1A1440"/>
+                          </a:solidFill>
+                          <a:latin typeface="Calibri"/>
+                        </a:rPr>
+                        <a:t>A member already ordering more each month</a:t>
+                      </a:r>
+                    </a:p>
+                  </a:txBody>
+                  <a:tcPr marL="101600" marR="101600" marT="38100" marB="38100" anchor="ctr">
+                    <a:solidFill>
+                      <a:srgbClr val="F4F2FA"/>
+                    </a:solidFill>
+                  </a:tcPr>
+                </a:tc>
+                <a:tc>
+                  <a:txBody>
+                    <a:bodyPr/>
+                    <a:lstStyle/>
+                    <a:p>
+                      <a:r>
+                        <a:rPr sz="1400" b="0" i="0">
+                          <a:solidFill>
+                            <a:srgbClr val="1A1440"/>
+                          </a:solidFill>
+                          <a:latin typeface="Calibri"/>
+                        </a:rPr>
+                        <a:t>A planned change (a move, a new job)</a:t>
+                      </a:r>
+                    </a:p>
+                  </a:txBody>
+                  <a:tcPr marL="101600" marR="101600" marT="38100" marB="38100" anchor="ctr">
+                    <a:solidFill>
+                      <a:srgbClr val="F4F2FA"/>
+                    </a:solidFill>
+                  </a:tcPr>
+                </a:tc>
+              </a:tr>
+              <a:tr h="611632">
+                <a:tc>
+                  <a:txBody>
+                    <a:bodyPr/>
+                    <a:lstStyle/>
+                    <a:p>
+                      <a:r>
+                        <a:rPr sz="1400" b="0" i="0">
+                          <a:solidFill>
+                            <a:srgbClr val="1A1440"/>
+                          </a:solidFill>
+                          <a:latin typeface="Calibri"/>
+                        </a:rPr>
+                        <a:t>A holdout: Gold offered to some, withheld from others</a:t>
+                      </a:r>
+                    </a:p>
+                  </a:txBody>
+                  <a:tcPr marL="101600" marR="101600" marT="38100" marB="38100" anchor="ctr">
+                    <a:solidFill>
+                      <a:srgbClr val="FFFFFF"/>
+                    </a:solidFill>
+                  </a:tcPr>
+                </a:tc>
+                <a:tc>
+                  <a:txBody>
+                    <a:bodyPr/>
+                    <a:lstStyle/>
+                    <a:p>
+                      <a:r>
+                        <a:rPr sz="1400" b="0" i="0">
+                          <a:solidFill>
+                            <a:srgbClr val="1A1440"/>
+                          </a:solidFill>
+                          <a:latin typeface="Calibri"/>
+                        </a:rPr>
+                        <a:t>Who chose to join</a:t>
+                      </a:r>
+                    </a:p>
+                  </a:txBody>
+                  <a:tcPr marL="101600" marR="101600" marT="38100" marB="38100" anchor="ctr">
+                    <a:solidFill>
+                      <a:srgbClr val="FFFFFF"/>
+                    </a:solidFill>
+                  </a:tcPr>
+                </a:tc>
+                <a:tc>
+                  <a:txBody>
+                    <a:bodyPr/>
+                    <a:lstStyle/>
+                    <a:p>
+                      <a:r>
+                        <a:rPr sz="1400" b="0" i="0">
+                          <a:solidFill>
+                            <a:srgbClr val="1A1440"/>
+                          </a:solidFill>
+                          <a:latin typeface="Calibri"/>
+                        </a:rPr>
+                        <a:t>The cost of withholding the offer</a:t>
+                      </a:r>
+                    </a:p>
+                  </a:txBody>
+                  <a:tcPr marL="101600" marR="101600" marT="38100" marB="38100" anchor="ctr">
+                    <a:solidFill>
+                      <a:srgbClr val="FFFFFF"/>
+                    </a:solidFill>
+                  </a:tcPr>
+                </a:tc>
+              </a:tr>
+            </a:tbl>
+          </a:graphicData>
+        </a:graphic>
+      </p:graphicFrame>
+      <p:sp>
+        <p:nvSpPr>
+          <p:cNvPr id="10" name="Oval 9"/>
+          <p:cNvSpPr/>
+          <p:nvPr/>
+        </p:nvSpPr>
+        <p:spPr>
+          <a:xfrm>
+            <a:off x="530352" y="6492240"/>
+            <a:ext cx="64008" cy="64008"/>
+          </a:xfrm>
+          <a:prstGeom prst="ellipse">
+            <a:avLst/>
+          </a:prstGeom>
+          <a:solidFill>
+            <a:srgbClr val="CFC9EE"/>
+          </a:solidFill>
+          <a:ln>
+            <a:noFill/>
+          </a:ln>
+          <a:effectLst/>
+        </p:spPr>
+        <p:style>
+          <a:lnRef idx="1">
+            <a:schemeClr val="accent1"/>
+          </a:lnRef>
+          <a:fillRef idx="3">
+            <a:schemeClr val="accent1"/>
+          </a:fillRef>
+          <a:effectRef idx="2">
+            <a:schemeClr val="accent1"/>
+          </a:effectRef>
+          <a:fontRef idx="minor">
+            <a:schemeClr val="lt1"/>
+          </a:fontRef>
+        </p:style>
+        <p:txBody>
+          <a:bodyPr rtlCol="0" anchor="ctr" wrap="square"/>
+          <a:lstStyle/>
+          <a:p>
+            <a:pPr algn="ctr"/>
+          </a:p>
+        </p:txBody>
+      </p:sp>
+      <p:sp>
+        <p:nvSpPr>
+          <p:cNvPr id="11" name="TextBox 10"/>
+          <p:cNvSpPr txBox="1"/>
+          <p:nvPr/>
+        </p:nvSpPr>
+        <p:spPr>
+          <a:xfrm>
+            <a:off x="640080" y="6437376"/>
+            <a:ext cx="1516475" cy="152146"/>
+          </a:xfrm>
+          <a:prstGeom prst="rect">
+            <a:avLst/>
+          </a:prstGeom>
+          <a:noFill/>
+        </p:spPr>
+        <p:txBody>
+          <a:bodyPr wrap="square" anchor="t" lIns="0" rIns="0" tIns="0" bIns="0">
+            <a:spAutoFit/>
+          </a:bodyPr>
+          <a:lstStyle/>
+          <a:p>
+            <a:pPr algn="l"/>
+            <a:r>
+              <a:rPr sz="700" b="0" i="0">
+                <a:solidFill>
+                  <a:srgbClr val="6B6690"/>
+                </a:solidFill>
+                <a:latin typeface="Calibri"/>
+              </a:rPr>
+              <a:t>Can weaning lift retention?</a:t>
+            </a:r>
+          </a:p>
+        </p:txBody>
+      </p:sp>
+      <p:sp>
+        <p:nvSpPr>
+          <p:cNvPr id="12" name="Oval 11"/>
+          <p:cNvSpPr/>
+          <p:nvPr/>
+        </p:nvSpPr>
+        <p:spPr>
+          <a:xfrm>
+            <a:off x="2247995" y="6492240"/>
+            <a:ext cx="64008" cy="64008"/>
+          </a:xfrm>
+          <a:prstGeom prst="ellipse">
+            <a:avLst/>
+          </a:prstGeom>
+          <a:solidFill>
+            <a:srgbClr val="CFC9EE"/>
+          </a:solidFill>
+          <a:ln>
+            <a:noFill/>
+          </a:ln>
+          <a:effectLst/>
+        </p:spPr>
+        <p:style>
+          <a:lnRef idx="1">
+            <a:schemeClr val="accent1"/>
+          </a:lnRef>
+          <a:fillRef idx="3">
+            <a:schemeClr val="accent1"/>
+          </a:fillRef>
+          <a:effectRef idx="2">
+            <a:schemeClr val="accent1"/>
+          </a:effectRef>
+          <a:fontRef idx="minor">
+            <a:schemeClr val="lt1"/>
+          </a:fontRef>
+        </p:style>
+        <p:txBody>
+          <a:bodyPr rtlCol="0" anchor="ctr" wrap="square"/>
+          <a:lstStyle/>
+          <a:p>
+            <a:pPr algn="ctr"/>
+          </a:p>
+        </p:txBody>
+      </p:sp>
+      <p:sp>
+        <p:nvSpPr>
+          <p:cNvPr id="13" name="TextBox 12"/>
+          <p:cNvSpPr txBox="1"/>
+          <p:nvPr/>
+        </p:nvSpPr>
+        <p:spPr>
+          <a:xfrm>
+            <a:off x="2357723" y="6437376"/>
+            <a:ext cx="1470469" cy="152146"/>
+          </a:xfrm>
+          <a:prstGeom prst="rect">
+            <a:avLst/>
+          </a:prstGeom>
+          <a:noFill/>
+        </p:spPr>
+        <p:txBody>
+          <a:bodyPr wrap="square" anchor="t" lIns="0" rIns="0" tIns="0" bIns="0">
+            <a:spAutoFit/>
+          </a:bodyPr>
+          <a:lstStyle/>
+          <a:p>
+            <a:pPr algn="l"/>
+            <a:r>
+              <a:rPr sz="700" b="0" i="0">
+                <a:solidFill>
+                  <a:srgbClr val="6B6690"/>
+                </a:solidFill>
+                <a:latin typeface="Calibri"/>
+              </a:rPr>
+              <a:t>Does a weekly table agree?</a:t>
+            </a:r>
+          </a:p>
+        </p:txBody>
+      </p:sp>
+      <p:sp>
+        <p:nvSpPr>
+          <p:cNvPr id="14" name="Oval 13"/>
+          <p:cNvSpPr/>
+          <p:nvPr/>
+        </p:nvSpPr>
+        <p:spPr>
+          <a:xfrm>
+            <a:off x="3919632" y="6492240"/>
+            <a:ext cx="64008" cy="64008"/>
+          </a:xfrm>
+          <a:prstGeom prst="ellipse">
+            <a:avLst/>
+          </a:prstGeom>
+          <a:solidFill>
+            <a:srgbClr val="5B3FD6"/>
+          </a:solidFill>
+          <a:ln>
+            <a:noFill/>
+          </a:ln>
+          <a:effectLst/>
+        </p:spPr>
+        <p:style>
+          <a:lnRef idx="1">
+            <a:schemeClr val="accent1"/>
+          </a:lnRef>
+          <a:fillRef idx="3">
+            <a:schemeClr val="accent1"/>
+          </a:fillRef>
+          <a:effectRef idx="2">
+            <a:schemeClr val="accent1"/>
+          </a:effectRef>
+          <a:fontRef idx="minor">
+            <a:schemeClr val="lt1"/>
+          </a:fontRef>
+        </p:style>
+        <p:txBody>
+          <a:bodyPr rtlCol="0" anchor="ctr" wrap="square"/>
+          <a:lstStyle/>
+          <a:p>
+            <a:pPr algn="ctr"/>
+          </a:p>
+        </p:txBody>
+      </p:sp>
+      <p:sp>
+        <p:nvSpPr>
+          <p:cNvPr id="15" name="TextBox 14"/>
+          <p:cNvSpPr txBox="1"/>
+          <p:nvPr/>
+        </p:nvSpPr>
+        <p:spPr>
+          <a:xfrm>
+            <a:off x="4029360" y="6437376"/>
+            <a:ext cx="1470469" cy="152146"/>
+          </a:xfrm>
+          <a:prstGeom prst="rect">
+            <a:avLst/>
+          </a:prstGeom>
+          <a:noFill/>
+        </p:spPr>
+        <p:txBody>
+          <a:bodyPr wrap="square" anchor="t" lIns="0" rIns="0" tIns="0" bIns="0">
+            <a:spAutoFit/>
+          </a:bodyPr>
+          <a:lstStyle/>
+          <a:p>
+            <a:pPr algn="l"/>
+            <a:r>
+              <a:rPr sz="700" b="1" i="0">
+                <a:solidFill>
+                  <a:srgbClr val="5B3FD6"/>
+                </a:solidFill>
+                <a:latin typeface="Calibri"/>
+              </a:rPr>
+              <a:t>Did Gold cause the orders?</a:t>
+            </a:r>
+          </a:p>
+        </p:txBody>
+      </p:sp>
+      <p:sp>
+        <p:nvSpPr>
+          <p:cNvPr id="16" name="Oval 15"/>
+          <p:cNvSpPr/>
+          <p:nvPr/>
+        </p:nvSpPr>
+        <p:spPr>
+          <a:xfrm>
+            <a:off x="5591270" y="6492240"/>
+            <a:ext cx="64008" cy="64008"/>
+          </a:xfrm>
+          <a:prstGeom prst="ellipse">
+            <a:avLst/>
+          </a:prstGeom>
+          <a:solidFill>
+            <a:srgbClr val="CFC9EE"/>
+          </a:solidFill>
+          <a:ln>
+            <a:noFill/>
+          </a:ln>
+          <a:effectLst/>
+        </p:spPr>
+        <p:style>
+          <a:lnRef idx="1">
+            <a:schemeClr val="accent1"/>
+          </a:lnRef>
+          <a:fillRef idx="3">
+            <a:schemeClr val="accent1"/>
+          </a:fillRef>
+          <a:effectRef idx="2">
+            <a:schemeClr val="accent1"/>
+          </a:effectRef>
+          <a:fontRef idx="minor">
+            <a:schemeClr val="lt1"/>
+          </a:fontRef>
+        </p:style>
+        <p:txBody>
+          <a:bodyPr rtlCol="0" anchor="ctr" wrap="square"/>
+          <a:lstStyle/>
+          <a:p>
+            <a:pPr algn="ctr"/>
+          </a:p>
+        </p:txBody>
+      </p:sp>
+      <p:sp>
+        <p:nvSpPr>
+          <p:cNvPr id="17" name="TextBox 16"/>
+          <p:cNvSpPr txBox="1"/>
+          <p:nvPr/>
+        </p:nvSpPr>
+        <p:spPr>
+          <a:xfrm>
+            <a:off x="5700998" y="6437376"/>
+            <a:ext cx="1608486" cy="152146"/>
+          </a:xfrm>
+          <a:prstGeom prst="rect">
+            <a:avLst/>
+          </a:prstGeom>
+          <a:noFill/>
+        </p:spPr>
+        <p:txBody>
+          <a:bodyPr wrap="square" anchor="t" lIns="0" rIns="0" tIns="0" bIns="0">
+            <a:spAutoFit/>
+          </a:bodyPr>
+          <a:lstStyle/>
+          <a:p>
+            <a:pPr algn="l"/>
+            <a:r>
+              <a:rPr sz="700" b="0" i="0">
+                <a:solidFill>
+                  <a:srgbClr val="6B6690"/>
+                </a:solidFill>
+                <a:latin typeface="Calibri"/>
+              </a:rPr>
+              <a:t>Is the app team's stage fine?</a:t>
+            </a:r>
+          </a:p>
+        </p:txBody>
+      </p:sp>
+      <p:sp>
+        <p:nvSpPr>
+          <p:cNvPr id="18" name="TextBox 17"/>
+          <p:cNvSpPr txBox="1"/>
+          <p:nvPr/>
+        </p:nvSpPr>
+        <p:spPr>
+          <a:xfrm>
+            <a:off x="10198303" y="6437376"/>
+            <a:ext cx="1463040" cy="160401"/>
+          </a:xfrm>
+          <a:prstGeom prst="rect">
+            <a:avLst/>
+          </a:prstGeom>
+          <a:noFill/>
+        </p:spPr>
+        <p:txBody>
+          <a:bodyPr wrap="square" anchor="t" lIns="0" rIns="0" tIns="0" bIns="0">
+            <a:spAutoFit/>
+          </a:bodyPr>
+          <a:lstStyle/>
+          <a:p>
+            <a:pPr algn="r"/>
+            <a:r>
+              <a:rPr sz="750" b="0" i="0">
+                <a:solidFill>
+                  <a:srgbClr val="6B6690"/>
+                </a:solidFill>
+                <a:latin typeface="Calibri"/>
+              </a:rPr>
+              <a:t>S8  ·  11 / 14</a:t>
+            </a:r>
+          </a:p>
+        </p:txBody>
+      </p:sp>
+    </p:spTree>
+  </p:cSld>
+  <p:clrMapOvr>
+    <a:masterClrMapping/>
+  </p:clrMapOvr>
+</p:sld>
+</file>
+
+<file path=ppt/slides/slide12.xml><?xml version="1.0" encoding="utf-8"?>
+<p:sld xmlns:a="http://schemas.openxmlformats.org/drawingml/2006/main" xmlns:p="http://schemas.openxmlformats.org/presentationml/2006/main" xmlns:r="http://schemas.openxmlformats.org/officeDocument/2006/relationships">
+  <p:cSld>
+    <p:spTree>
+      <p:nvGrpSpPr>
+        <p:cNvPr id="1" name=""/>
+        <p:cNvGrpSpPr/>
+        <p:nvPr/>
+      </p:nvGrpSpPr>
+      <p:grpSpPr/>
+      <p:pic>
+        <p:nvPicPr>
+          <p:cNvPr id="2" name="Picture 1" descr="bg_dark.jpg"/>
+          <p:cNvPicPr>
+            <a:picLocks noChangeAspect="1"/>
+          </p:cNvPicPr>
+          <p:nvPr/>
+        </p:nvPicPr>
+        <p:blipFill>
+          <a:blip r:embed="rId2"/>
+          <a:stretch>
+            <a:fillRect/>
+          </a:stretch>
+        </p:blipFill>
+        <p:spPr>
+          <a:xfrm>
+            <a:off x="0" y="0"/>
+            <a:ext cx="12191695" cy="6858000"/>
+          </a:xfrm>
+          <a:prstGeom prst="rect">
+            <a:avLst/>
+          </a:prstGeom>
+        </p:spPr>
+      </p:pic>
+      <p:pic>
+        <p:nvPicPr>
+          <p:cNvPr id="3" name="Picture 2" descr="iitgn_logo.png"/>
+          <p:cNvPicPr>
+            <a:picLocks noChangeAspect="1"/>
+          </p:cNvPicPr>
+          <p:nvPr/>
+        </p:nvPicPr>
+        <p:blipFill>
+          <a:blip r:embed="rId3"/>
+          <a:stretch>
+            <a:fillRect/>
+          </a:stretch>
+        </p:blipFill>
+        <p:spPr>
+          <a:xfrm>
+            <a:off x="530352" y="201168"/>
+            <a:ext cx="420624" cy="420624"/>
+          </a:xfrm>
+          <a:prstGeom prst="rect">
+            <a:avLst/>
+          </a:prstGeom>
+        </p:spPr>
+      </p:pic>
+      <p:sp>
+        <p:nvSpPr>
+          <p:cNvPr id="4" name="TextBox 3"/>
+          <p:cNvSpPr txBox="1"/>
+          <p:nvPr/>
+        </p:nvSpPr>
+        <p:spPr>
+          <a:xfrm>
+            <a:off x="1042416" y="228600"/>
+            <a:ext cx="5120640" cy="185166"/>
+          </a:xfrm>
+          <a:prstGeom prst="rect">
+            <a:avLst/>
+          </a:prstGeom>
+          <a:noFill/>
+        </p:spPr>
+        <p:txBody>
+          <a:bodyPr wrap="square" anchor="t" lIns="0" rIns="0" tIns="0" bIns="0">
+            <a:spAutoFit/>
+          </a:bodyPr>
+          <a:lstStyle/>
+          <a:p>
+            <a:pPr algn="l"/>
+            <a:r>
+              <a:rPr sz="900" b="1" i="0">
+                <a:solidFill>
+                  <a:srgbClr val="FFFFFF"/>
+                </a:solidFill>
+                <a:latin typeface="Calibri"/>
+              </a:rPr>
+              <a:t>Indian Institute of Technology Gandhinagar</a:t>
+            </a:r>
+          </a:p>
+        </p:txBody>
+      </p:sp>
+      <p:sp>
+        <p:nvSpPr>
+          <p:cNvPr id="5" name="TextBox 4"/>
+          <p:cNvSpPr txBox="1"/>
+          <p:nvPr/>
+        </p:nvSpPr>
+        <p:spPr>
+          <a:xfrm>
+            <a:off x="1042416" y="420623"/>
+            <a:ext cx="5852160" cy="127381"/>
+          </a:xfrm>
+          <a:prstGeom prst="rect">
+            <a:avLst/>
+          </a:prstGeom>
+          <a:noFill/>
+        </p:spPr>
+        <p:txBody>
+          <a:bodyPr wrap="square" anchor="t" lIns="0" rIns="0" tIns="0" bIns="0">
+            <a:spAutoFit/>
+          </a:bodyPr>
+          <a:lstStyle/>
+          <a:p>
+            <a:pPr algn="l"/>
+            <a:r>
+              <a:rPr sz="550" b="1" i="0" spc="300">
+                <a:solidFill>
+                  <a:srgbClr val="CFC9EE"/>
+                </a:solidFill>
+                <a:latin typeface="Calibri"/>
+              </a:rPr>
+              <a:t>ADMINISTERED THROUGH THE COMPETENCY ADVANCEMENT ACADEMY</a:t>
+            </a:r>
+          </a:p>
+        </p:txBody>
+      </p:sp>
+      <p:sp>
+        <p:nvSpPr>
+          <p:cNvPr id="6" name="TextBox 5"/>
+          <p:cNvSpPr txBox="1"/>
+          <p:nvPr/>
+        </p:nvSpPr>
+        <p:spPr>
+          <a:xfrm>
+            <a:off x="5992063" y="310896"/>
+            <a:ext cx="5669280" cy="127381"/>
+          </a:xfrm>
+          <a:prstGeom prst="rect">
+            <a:avLst/>
+          </a:prstGeom>
+          <a:noFill/>
+        </p:spPr>
+        <p:txBody>
+          <a:bodyPr wrap="square" anchor="t" lIns="0" rIns="0" tIns="0" bIns="0">
+            <a:spAutoFit/>
+          </a:bodyPr>
+          <a:lstStyle/>
+          <a:p>
+            <a:pPr algn="r"/>
+            <a:r>
+              <a:rPr sz="550" b="1" i="0" spc="300">
+                <a:solidFill>
+                  <a:srgbClr val="CFC9EE"/>
+                </a:solidFill>
+                <a:latin typeface="Calibri"/>
+              </a:rPr>
+              <a:t>PG DIPLOMA IN AI-ML AND AGENTIC AI ENGINEERING  ·  COHORT 2</a:t>
+            </a:r>
+          </a:p>
+        </p:txBody>
+      </p:sp>
+      <p:sp>
+        <p:nvSpPr>
+          <p:cNvPr id="7" name="TextBox 6"/>
+          <p:cNvSpPr txBox="1"/>
+          <p:nvPr/>
+        </p:nvSpPr>
+        <p:spPr>
+          <a:xfrm>
+            <a:off x="731519" y="1143000"/>
+            <a:ext cx="3657600" cy="1371600"/>
+          </a:xfrm>
+          <a:prstGeom prst="rect">
+            <a:avLst/>
+          </a:prstGeom>
+          <a:noFill/>
+        </p:spPr>
+        <p:txBody>
+          <a:bodyPr wrap="square" anchor="t" lIns="0" rIns="0" tIns="0" bIns="0">
+            <a:spAutoFit/>
+          </a:bodyPr>
+          <a:lstStyle/>
+          <a:p>
+            <a:pPr algn="l"/>
+            <a:r>
+              <a:rPr sz="9600" b="0" i="0">
+                <a:solidFill>
+                  <a:srgbClr val="D9A7FF"/>
+                </a:solidFill>
+                <a:latin typeface="Georgia"/>
+              </a:rPr>
+              <a:t>10</a:t>
+            </a:r>
+          </a:p>
+        </p:txBody>
+      </p:sp>
+      <p:sp>
+        <p:nvSpPr>
+          <p:cNvPr id="8" name="TextBox 7"/>
+          <p:cNvSpPr txBox="1"/>
+          <p:nvPr/>
+        </p:nvSpPr>
+        <p:spPr>
+          <a:xfrm>
+            <a:off x="731519" y="2606040"/>
+            <a:ext cx="10673791" cy="731520"/>
+          </a:xfrm>
+          <a:prstGeom prst="rect">
+            <a:avLst/>
+          </a:prstGeom>
+          <a:noFill/>
+        </p:spPr>
+        <p:txBody>
+          <a:bodyPr wrap="square" anchor="t" lIns="0" rIns="0" tIns="0" bIns="0">
+            <a:spAutoFit/>
+          </a:bodyPr>
+          <a:lstStyle/>
+          <a:p>
+            <a:pPr algn="l"/>
+            <a:r>
+              <a:rPr sz="4000" b="0" i="0">
+                <a:solidFill>
+                  <a:srgbClr val="FFFFFF"/>
+                </a:solidFill>
+                <a:latin typeface="Georgia"/>
+              </a:rPr>
+              <a:t>Is the app team's stage fine?</a:t>
+            </a:r>
+          </a:p>
+        </p:txBody>
+      </p:sp>
+      <p:sp>
+        <p:nvSpPr>
+          <p:cNvPr id="9" name="TextBox 8"/>
+          <p:cNvSpPr txBox="1"/>
+          <p:nvPr/>
+        </p:nvSpPr>
+        <p:spPr>
+          <a:xfrm>
+            <a:off x="731519" y="3520440"/>
+            <a:ext cx="9509760" cy="531876"/>
+          </a:xfrm>
+          <a:prstGeom prst="rect">
+            <a:avLst/>
+          </a:prstGeom>
+          <a:noFill/>
+        </p:spPr>
+        <p:txBody>
+          <a:bodyPr wrap="square" anchor="t" lIns="0" rIns="0" tIns="0" bIns="0">
+            <a:spAutoFit/>
+          </a:bodyPr>
+          <a:lstStyle/>
+          <a:p>
+            <a:pPr algn="l"/>
+            <a:r>
+              <a:rPr sz="1500" b="0" i="0">
+                <a:solidFill>
+                  <a:srgbClr val="E4E1F1"/>
+                </a:solidFill>
+                <a:latin typeface="Calibri"/>
+              </a:rPr>
+              <a:t>The app team says the funnel stage the room blamed is fine: how does a strong candidate answer a dispute that is partly right?</a:t>
+            </a:r>
+          </a:p>
+        </p:txBody>
+      </p:sp>
+      <p:sp>
+        <p:nvSpPr>
+          <p:cNvPr id="10" name="Rounded Rectangle 9"/>
+          <p:cNvSpPr/>
+          <p:nvPr/>
+        </p:nvSpPr>
+        <p:spPr>
+          <a:xfrm>
+            <a:off x="731519" y="5074920"/>
+            <a:ext cx="1964591" cy="310896"/>
+          </a:xfrm>
+          <a:prstGeom prst="roundRect">
+            <a:avLst>
+              <a:gd name="adj" fmla="val 50000"/>
+            </a:avLst>
+          </a:prstGeom>
+          <a:noFill/>
+          <a:ln w="9525">
+            <a:solidFill>
+              <a:srgbClr val="CFC9EE"/>
+            </a:solidFill>
+          </a:ln>
+          <a:effectLst/>
+        </p:spPr>
+        <p:style>
+          <a:lnRef idx="1">
+            <a:schemeClr val="accent1"/>
+          </a:lnRef>
+          <a:fillRef idx="3">
+            <a:schemeClr val="accent1"/>
+          </a:fillRef>
+          <a:effectRef idx="2">
+            <a:schemeClr val="accent1"/>
+          </a:effectRef>
+          <a:fontRef idx="minor">
+            <a:schemeClr val="lt1"/>
+          </a:fontRef>
+        </p:style>
+        <p:txBody>
+          <a:bodyPr rtlCol="0" anchor="ctr" wrap="none" lIns="25400" rIns="25400" tIns="0" bIns="0"/>
+          <a:lstStyle/>
+          <a:p>
+            <a:pPr algn="ctr"/>
+            <a:r>
+              <a:rPr sz="850" b="0">
+                <a:solidFill>
+                  <a:srgbClr val="CFC9EE"/>
+                </a:solidFill>
+                <a:latin typeface="Calibri"/>
+              </a:rPr>
+              <a:t>Can weaning lift retention?</a:t>
+            </a:r>
+          </a:p>
+        </p:txBody>
+      </p:sp>
+      <p:sp>
+        <p:nvSpPr>
+          <p:cNvPr id="11" name="Rounded Rectangle 10"/>
+          <p:cNvSpPr/>
+          <p:nvPr/>
+        </p:nvSpPr>
+        <p:spPr>
+          <a:xfrm>
+            <a:off x="2805839" y="5074920"/>
+            <a:ext cx="1905375" cy="310896"/>
+          </a:xfrm>
+          <a:prstGeom prst="roundRect">
+            <a:avLst>
+              <a:gd name="adj" fmla="val 50000"/>
+            </a:avLst>
+          </a:prstGeom>
+          <a:noFill/>
+          <a:ln w="9525">
+            <a:solidFill>
+              <a:srgbClr val="CFC9EE"/>
+            </a:solidFill>
+          </a:ln>
+          <a:effectLst/>
+        </p:spPr>
+        <p:style>
+          <a:lnRef idx="1">
+            <a:schemeClr val="accent1"/>
+          </a:lnRef>
+          <a:fillRef idx="3">
+            <a:schemeClr val="accent1"/>
+          </a:fillRef>
+          <a:effectRef idx="2">
+            <a:schemeClr val="accent1"/>
+          </a:effectRef>
+          <a:fontRef idx="minor">
+            <a:schemeClr val="lt1"/>
+          </a:fontRef>
+        </p:style>
+        <p:txBody>
+          <a:bodyPr rtlCol="0" anchor="ctr" wrap="none" lIns="25400" rIns="25400" tIns="0" bIns="0"/>
+          <a:lstStyle/>
+          <a:p>
+            <a:pPr algn="ctr"/>
+            <a:r>
+              <a:rPr sz="850" b="0">
+                <a:solidFill>
+                  <a:srgbClr val="CFC9EE"/>
+                </a:solidFill>
+                <a:latin typeface="Calibri"/>
+              </a:rPr>
+              <a:t>Does a weekly table agree?</a:t>
+            </a:r>
+          </a:p>
+        </p:txBody>
+      </p:sp>
+      <p:sp>
+        <p:nvSpPr>
+          <p:cNvPr id="12" name="Rounded Rectangle 11"/>
+          <p:cNvSpPr/>
+          <p:nvPr/>
+        </p:nvSpPr>
+        <p:spPr>
+          <a:xfrm>
+            <a:off x="4820942" y="5074920"/>
+            <a:ext cx="1905375" cy="310896"/>
+          </a:xfrm>
+          <a:prstGeom prst="roundRect">
+            <a:avLst>
+              <a:gd name="adj" fmla="val 50000"/>
+            </a:avLst>
+          </a:prstGeom>
+          <a:noFill/>
+          <a:ln w="9525">
+            <a:solidFill>
+              <a:srgbClr val="CFC9EE"/>
+            </a:solidFill>
+          </a:ln>
+          <a:effectLst/>
+        </p:spPr>
+        <p:style>
+          <a:lnRef idx="1">
+            <a:schemeClr val="accent1"/>
+          </a:lnRef>
+          <a:fillRef idx="3">
+            <a:schemeClr val="accent1"/>
+          </a:fillRef>
+          <a:effectRef idx="2">
+            <a:schemeClr val="accent1"/>
+          </a:effectRef>
+          <a:fontRef idx="minor">
+            <a:schemeClr val="lt1"/>
+          </a:fontRef>
+        </p:style>
+        <p:txBody>
+          <a:bodyPr rtlCol="0" anchor="ctr" wrap="none" lIns="25400" rIns="25400" tIns="0" bIns="0"/>
+          <a:lstStyle/>
+          <a:p>
+            <a:pPr algn="ctr"/>
+            <a:r>
+              <a:rPr sz="850" b="0">
+                <a:solidFill>
+                  <a:srgbClr val="CFC9EE"/>
+                </a:solidFill>
+                <a:latin typeface="Calibri"/>
+              </a:rPr>
+              <a:t>Did Gold cause the orders?</a:t>
+            </a:r>
+          </a:p>
+        </p:txBody>
+      </p:sp>
+      <p:sp>
+        <p:nvSpPr>
+          <p:cNvPr id="13" name="Rounded Rectangle 12"/>
+          <p:cNvSpPr/>
+          <p:nvPr/>
+        </p:nvSpPr>
+        <p:spPr>
+          <a:xfrm>
+            <a:off x="6836045" y="5074920"/>
+            <a:ext cx="2083023" cy="310896"/>
+          </a:xfrm>
+          <a:prstGeom prst="roundRect">
+            <a:avLst>
+              <a:gd name="adj" fmla="val 50000"/>
+            </a:avLst>
+          </a:prstGeom>
+          <a:solidFill>
+            <a:srgbClr val="D9A7FF"/>
+          </a:solidFill>
+          <a:ln>
+            <a:noFill/>
+          </a:ln>
+          <a:effectLst/>
+        </p:spPr>
+        <p:style>
+          <a:lnRef idx="1">
+            <a:schemeClr val="accent1"/>
+          </a:lnRef>
+          <a:fillRef idx="3">
+            <a:schemeClr val="accent1"/>
+          </a:fillRef>
+          <a:effectRef idx="2">
+            <a:schemeClr val="accent1"/>
+          </a:effectRef>
+          <a:fontRef idx="minor">
+            <a:schemeClr val="lt1"/>
+          </a:fontRef>
+        </p:style>
+        <p:txBody>
+          <a:bodyPr rtlCol="0" anchor="ctr" wrap="none" lIns="25400" rIns="25400" tIns="0" bIns="0"/>
+          <a:lstStyle/>
+          <a:p>
+            <a:pPr algn="ctr"/>
+            <a:r>
+              <a:rPr sz="850" b="1">
+                <a:solidFill>
+                  <a:srgbClr val="1A0F5C"/>
+                </a:solidFill>
+                <a:latin typeface="Calibri"/>
+              </a:rPr>
+              <a:t>Is the app team's stage fine?</a:t>
+            </a:r>
+          </a:p>
+        </p:txBody>
+      </p:sp>
+      <p:sp>
+        <p:nvSpPr>
+          <p:cNvPr id="14" name="TextBox 13"/>
+          <p:cNvSpPr txBox="1"/>
+          <p:nvPr/>
+        </p:nvSpPr>
+        <p:spPr>
+          <a:xfrm>
+            <a:off x="530352" y="6437376"/>
+            <a:ext cx="9667951" cy="160401"/>
+          </a:xfrm>
+          <a:prstGeom prst="rect">
+            <a:avLst/>
+          </a:prstGeom>
+          <a:noFill/>
+        </p:spPr>
+        <p:txBody>
+          <a:bodyPr wrap="square" anchor="t" lIns="0" rIns="0" tIns="0" bIns="0">
+            <a:spAutoFit/>
+          </a:bodyPr>
+          <a:lstStyle/>
+          <a:p>
+            <a:pPr algn="l"/>
+            <a:r>
+              <a:rPr sz="750" b="0" i="0">
+                <a:solidFill>
+                  <a:srgbClr val="CFC9EE"/>
+                </a:solidFill>
+                <a:latin typeface="Calibri"/>
+              </a:rPr>
+              <a:t>Week 4 Day 4: the fallback block</a:t>
+            </a:r>
+          </a:p>
+        </p:txBody>
+      </p:sp>
+      <p:sp>
+        <p:nvSpPr>
+          <p:cNvPr id="15" name="TextBox 14"/>
+          <p:cNvSpPr txBox="1"/>
+          <p:nvPr/>
+        </p:nvSpPr>
+        <p:spPr>
+          <a:xfrm>
+            <a:off x="10198303" y="6437376"/>
+            <a:ext cx="1463040" cy="160401"/>
+          </a:xfrm>
+          <a:prstGeom prst="rect">
+            <a:avLst/>
+          </a:prstGeom>
+          <a:noFill/>
+        </p:spPr>
+        <p:txBody>
+          <a:bodyPr wrap="square" anchor="t" lIns="0" rIns="0" tIns="0" bIns="0">
+            <a:spAutoFit/>
+          </a:bodyPr>
+          <a:lstStyle/>
+          <a:p>
+            <a:pPr algn="r"/>
+            <a:r>
+              <a:rPr sz="750" b="0" i="0">
+                <a:solidFill>
+                  <a:srgbClr val="CFC9EE"/>
+                </a:solidFill>
+                <a:latin typeface="Calibri"/>
+              </a:rPr>
+              <a:t>12 / 14</a:t>
+            </a:r>
+          </a:p>
+        </p:txBody>
+      </p:sp>
+    </p:spTree>
+  </p:cSld>
+  <p:clrMapOvr>
+    <a:masterClrMapping/>
+  </p:clrMapOvr>
+</p:sld>
+</file>
+
+<file path=ppt/slides/slide13.xml><?xml version="1.0" encoding="utf-8"?>
+<p:sld xmlns:a="http://schemas.openxmlformats.org/drawingml/2006/main" xmlns:p="http://schemas.openxmlformats.org/presentationml/2006/main" xmlns:r="http://schemas.openxmlformats.org/officeDocument/2006/relationships">
+  <p:cSld>
+    <p:spTree>
+      <p:nvGrpSpPr>
+        <p:cNvPr id="1" name=""/>
+        <p:cNvGrpSpPr/>
+        <p:nvPr/>
+      </p:nvGrpSpPr>
+      <p:grpSpPr/>
+      <p:pic>
+        <p:nvPicPr>
+          <p:cNvPr id="2" name="Picture 1" descr="bg_light.jpg"/>
+          <p:cNvPicPr>
+            <a:picLocks noChangeAspect="1"/>
+          </p:cNvPicPr>
+          <p:nvPr/>
+        </p:nvPicPr>
+        <p:blipFill>
+          <a:blip r:embed="rId2"/>
+          <a:stretch>
+            <a:fillRect/>
+          </a:stretch>
+        </p:blipFill>
+        <p:spPr>
+          <a:xfrm>
+            <a:off x="0" y="0"/>
+            <a:ext cx="12191695" cy="6858000"/>
+          </a:xfrm>
+          <a:prstGeom prst="rect">
+            <a:avLst/>
+          </a:prstGeom>
+        </p:spPr>
+      </p:pic>
+      <p:pic>
+        <p:nvPicPr>
+          <p:cNvPr id="3" name="Picture 2" descr="iitgn_logo.png"/>
+          <p:cNvPicPr>
+            <a:picLocks noChangeAspect="1"/>
+          </p:cNvPicPr>
+          <p:nvPr/>
+        </p:nvPicPr>
+        <p:blipFill>
+          <a:blip r:embed="rId3"/>
+          <a:stretch>
+            <a:fillRect/>
+          </a:stretch>
+        </p:blipFill>
+        <p:spPr>
+          <a:xfrm>
+            <a:off x="530352" y="201168"/>
+            <a:ext cx="420624" cy="420624"/>
+          </a:xfrm>
+          <a:prstGeom prst="rect">
+            <a:avLst/>
+          </a:prstGeom>
+        </p:spPr>
+      </p:pic>
+      <p:sp>
+        <p:nvSpPr>
+          <p:cNvPr id="4" name="TextBox 3"/>
+          <p:cNvSpPr txBox="1"/>
+          <p:nvPr/>
+        </p:nvSpPr>
+        <p:spPr>
+          <a:xfrm>
+            <a:off x="1042416" y="228600"/>
+            <a:ext cx="5120640" cy="185166"/>
+          </a:xfrm>
+          <a:prstGeom prst="rect">
+            <a:avLst/>
+          </a:prstGeom>
+          <a:noFill/>
+        </p:spPr>
+        <p:txBody>
+          <a:bodyPr wrap="square" anchor="t" lIns="0" rIns="0" tIns="0" bIns="0">
+            <a:spAutoFit/>
+          </a:bodyPr>
+          <a:lstStyle/>
+          <a:p>
+            <a:pPr algn="l"/>
+            <a:r>
+              <a:rPr sz="900" b="1" i="0">
+                <a:solidFill>
+                  <a:srgbClr val="1A0F5C"/>
+                </a:solidFill>
+                <a:latin typeface="Calibri"/>
+              </a:rPr>
+              <a:t>Indian Institute of Technology Gandhinagar</a:t>
+            </a:r>
+          </a:p>
+        </p:txBody>
+      </p:sp>
+      <p:sp>
+        <p:nvSpPr>
+          <p:cNvPr id="5" name="TextBox 4"/>
+          <p:cNvSpPr txBox="1"/>
+          <p:nvPr/>
+        </p:nvSpPr>
+        <p:spPr>
+          <a:xfrm>
+            <a:off x="1042416" y="420623"/>
+            <a:ext cx="5852160" cy="127381"/>
+          </a:xfrm>
+          <a:prstGeom prst="rect">
+            <a:avLst/>
+          </a:prstGeom>
+          <a:noFill/>
+        </p:spPr>
+        <p:txBody>
+          <a:bodyPr wrap="square" anchor="t" lIns="0" rIns="0" tIns="0" bIns="0">
+            <a:spAutoFit/>
+          </a:bodyPr>
+          <a:lstStyle/>
+          <a:p>
+            <a:pPr algn="l"/>
+            <a:r>
+              <a:rPr sz="550" b="1" i="0" spc="300">
+                <a:solidFill>
+                  <a:srgbClr val="6B6690"/>
+                </a:solidFill>
+                <a:latin typeface="Calibri"/>
+              </a:rPr>
+              <a:t>ADMINISTERED THROUGH THE COMPETENCY ADVANCEMENT ACADEMY</a:t>
+            </a:r>
+          </a:p>
+        </p:txBody>
+      </p:sp>
+      <p:sp>
+        <p:nvSpPr>
+          <p:cNvPr id="6" name="TextBox 5"/>
+          <p:cNvSpPr txBox="1"/>
+          <p:nvPr/>
+        </p:nvSpPr>
+        <p:spPr>
+          <a:xfrm>
+            <a:off x="5992063" y="310896"/>
+            <a:ext cx="5669280" cy="127381"/>
+          </a:xfrm>
+          <a:prstGeom prst="rect">
+            <a:avLst/>
+          </a:prstGeom>
+          <a:noFill/>
+        </p:spPr>
+        <p:txBody>
+          <a:bodyPr wrap="square" anchor="t" lIns="0" rIns="0" tIns="0" bIns="0">
+            <a:spAutoFit/>
+          </a:bodyPr>
+          <a:lstStyle/>
+          <a:p>
+            <a:pPr algn="r"/>
+            <a:r>
+              <a:rPr sz="550" b="1" i="0" spc="300">
+                <a:solidFill>
+                  <a:srgbClr val="6B6690"/>
+                </a:solidFill>
+                <a:latin typeface="Calibri"/>
+              </a:rPr>
+              <a:t>WEEK 4  ·  DAY 4  ·  THE FALLBACK, IF THE TENTATIVE FACULTY BLOCK SLIPS</a:t>
+            </a:r>
+          </a:p>
+        </p:txBody>
+      </p:sp>
+      <p:sp>
+        <p:nvSpPr>
+          <p:cNvPr id="7" name="TextBox 6"/>
+          <p:cNvSpPr txBox="1"/>
+          <p:nvPr/>
+        </p:nvSpPr>
+        <p:spPr>
+          <a:xfrm>
+            <a:off x="530352" y="676656"/>
+            <a:ext cx="11130991" cy="512064"/>
+          </a:xfrm>
+          <a:prstGeom prst="rect">
+            <a:avLst/>
+          </a:prstGeom>
+          <a:noFill/>
+        </p:spPr>
+        <p:txBody>
+          <a:bodyPr wrap="square" anchor="b" lIns="0" rIns="0" tIns="0" bIns="0">
+            <a:spAutoFit/>
+          </a:bodyPr>
+          <a:lstStyle/>
+          <a:p>
+            <a:pPr algn="l"/>
+            <a:r>
+              <a:rPr sz="2600" b="0" i="0">
+                <a:solidFill>
+                  <a:srgbClr val="1A0F5C"/>
+                </a:solidFill>
+                <a:latin typeface="Georgia"/>
+              </a:rPr>
+              <a:t>The dispute, answered with the split</a:t>
+            </a:r>
+          </a:p>
+        </p:txBody>
+      </p:sp>
+      <p:sp>
+        <p:nvSpPr>
+          <p:cNvPr id="8" name="TextBox 7"/>
+          <p:cNvSpPr txBox="1"/>
+          <p:nvPr/>
+        </p:nvSpPr>
+        <p:spPr>
+          <a:xfrm>
+            <a:off x="530352" y="1243584"/>
+            <a:ext cx="11130991" cy="234696"/>
+          </a:xfrm>
+          <a:prstGeom prst="rect">
+            <a:avLst/>
+          </a:prstGeom>
+          <a:noFill/>
+        </p:spPr>
+        <p:txBody>
+          <a:bodyPr wrap="square" anchor="t" lIns="0" rIns="0" tIns="0" bIns="0">
+            <a:spAutoFit/>
+          </a:bodyPr>
+          <a:lstStyle/>
+          <a:p>
+            <a:pPr algn="l"/>
+            <a:r>
+              <a:rPr sz="1200" b="0" i="0">
+                <a:solidFill>
+                  <a:srgbClr val="6B6690"/>
+                </a:solidFill>
+                <a:latin typeface="Calibri"/>
+              </a:rPr>
+              <a:t>What does a weak answer bring to the meeting, and what does a hire-grade one bring?</a:t>
+            </a:r>
+          </a:p>
+        </p:txBody>
+      </p:sp>
+      <p:graphicFrame>
+        <p:nvGraphicFramePr>
+          <p:cNvPr id="9" name="Table 8"/>
+          <p:cNvGraphicFramePr>
+            <a:graphicFrameLocks noGrp="1"/>
+          </p:cNvGraphicFramePr>
+          <p:nvPr/>
+        </p:nvGraphicFramePr>
+        <p:xfrm>
+          <a:off x="530352" y="1956816"/>
+          <a:ext cx="11130989" cy="2574544"/>
+        </p:xfrm>
+        <a:graphic>
+          <a:graphicData uri="http://schemas.openxmlformats.org/drawingml/2006/table">
+            <a:tbl>
+              <a:tblPr firstRow="0" bandRow="0">
+                <a:tableStyleId>{2D5ABB26-0587-4C30-8999-92F81FD0307C}</a:tableStyleId>
+              </a:tblPr>
+              <a:tblGrid>
+                <a:gridCol w="2433579"/>
+                <a:gridCol w="3322230"/>
                 <a:gridCol w="5375180"/>
               </a:tblGrid>
               <a:tr h="369824">
@@ -5957,7 +7570,7 @@
                           </a:solidFill>
                           <a:latin typeface="Calibri"/>
                         </a:rPr>
-                        <a:t>What the app team says</a:t>
+                        <a:t>A weak answer</a:t>
                       </a:r>
                     </a:p>
                   </a:txBody>
@@ -5979,7 +7592,7 @@
                           </a:solidFill>
                           <a:latin typeface="Calibri"/>
                         </a:rPr>
-                        <a:t>What a hire-grade response does</a:t>
+                        <a:t>A hire-grade answer</a:t>
                       </a:r>
                     </a:p>
                   </a:txBody>
@@ -6025,7 +7638,7 @@
                           </a:solidFill>
                           <a:latin typeface="Calibri"/>
                         </a:rPr>
-                        <a:t>Overall conversion is flat; the stage is fine</a:t>
+                        <a:t>"Your release broke checkout."</a:t>
                       </a:r>
                     </a:p>
                   </a:txBody>
@@ -6047,143 +7660,7 @@
                           </a:solidFill>
                           <a:latin typeface="Calibri"/>
                         </a:rPr>
-                        <a:t>Concede that overall is flat; name the three axes it averages over</a:t>
-                      </a:r>
-                    </a:p>
-                  </a:txBody>
-                  <a:tcPr marL="101600" marR="101600" marT="38100" marB="38100" anchor="ctr">
-                    <a:solidFill>
-                      <a:srgbClr val="FFFFFF"/>
-                    </a:solidFill>
-                  </a:tcPr>
-                </a:tc>
-              </a:tr>
-              <a:tr h="369824">
-                <a:tc>
-                  <a:txBody>
-                    <a:bodyPr/>
-                    <a:lstStyle/>
-                    <a:p>
-                      <a:r>
-                        <a:rPr sz="1400" b="0" i="0">
-                          <a:solidFill>
-                            <a:srgbClr val="1A1440"/>
-                          </a:solidFill>
-                          <a:latin typeface="Calibri"/>
-                        </a:rPr>
-                        <a:t>First evidence</a:t>
-                      </a:r>
-                    </a:p>
-                  </a:txBody>
-                  <a:tcPr marL="101600" marR="101600" marT="38100" marB="38100" anchor="ctr">
-                    <a:solidFill>
-                      <a:srgbClr val="F4F2FA"/>
-                    </a:solidFill>
-                  </a:tcPr>
-                </a:tc>
-                <a:tc>
-                  <a:txBody>
-                    <a:bodyPr/>
-                    <a:lstStyle/>
-                    <a:p>
-                      <a:r>
-                        <a:rPr sz="1400" b="0" i="0">
-                          <a:solidFill>
-                            <a:srgbClr val="1A1440"/>
-                          </a:solidFill>
-                          <a:latin typeface="Calibri"/>
-                        </a:rPr>
-                        <a:t>A single chart of overall conversion</a:t>
-                      </a:r>
-                    </a:p>
-                  </a:txBody>
-                  <a:tcPr marL="101600" marR="101600" marT="38100" marB="38100" anchor="ctr">
-                    <a:solidFill>
-                      <a:srgbClr val="F4F2FA"/>
-                    </a:solidFill>
-                  </a:tcPr>
-                </a:tc>
-                <a:tc>
-                  <a:txBody>
-                    <a:bodyPr/>
-                    <a:lstStyle/>
-                    <a:p>
-                      <a:r>
-                        <a:rPr sz="1400" b="0" i="0">
-                          <a:solidFill>
-                            <a:srgbClr val="1A1440"/>
-                          </a:solidFill>
-                          <a:latin typeface="Calibri"/>
-                        </a:rPr>
-                        <a:t>Bring the split by platform, membership and date</a:t>
-                      </a:r>
-                    </a:p>
-                  </a:txBody>
-                  <a:tcPr marL="101600" marR="101600" marT="38100" marB="38100" anchor="ctr">
-                    <a:solidFill>
-                      <a:srgbClr val="F4F2FA"/>
-                    </a:solidFill>
-                  </a:tcPr>
-                </a:tc>
-              </a:tr>
-              <a:tr h="611632">
-                <a:tc>
-                  <a:txBody>
-                    <a:bodyPr/>
-                    <a:lstStyle/>
-                    <a:p>
-                      <a:r>
-                        <a:rPr sz="1400" b="0" i="0">
-                          <a:solidFill>
-                            <a:srgbClr val="1A1440"/>
-                          </a:solidFill>
-                          <a:latin typeface="Calibri"/>
-                        </a:rPr>
-                        <a:t>Second evidence</a:t>
-                      </a:r>
-                    </a:p>
-                  </a:txBody>
-                  <a:tcPr marL="101600" marR="101600" marT="38100" marB="38100" anchor="ctr">
-                    <a:solidFill>
-                      <a:srgbClr val="FFFFFF"/>
-                    </a:solidFill>
-                  </a:tcPr>
-                </a:tc>
-                <a:tc>
-                  <a:txBody>
-                    <a:bodyPr/>
-                    <a:lstStyle/>
-                    <a:p>
-                      <a:r>
-                        <a:rPr sz="1400" b="0" i="0">
-                          <a:solidFill>
-                            <a:srgbClr val="1A1440"/>
-                          </a:solidFill>
-                          <a:latin typeface="Calibri"/>
-                        </a:rPr>
-                        <a:t>The stage worked before and works now</a:t>
-                      </a:r>
-                    </a:p>
-                  </a:txBody>
-                  <a:tcPr marL="101600" marR="101600" marT="38100" marB="38100" anchor="ctr">
-                    <a:solidFill>
-                      <a:srgbClr val="FFFFFF"/>
-                    </a:solidFill>
-                  </a:tcPr>
-                </a:tc>
-                <a:tc>
-                  <a:txBody>
-                    <a:bodyPr/>
-                    <a:lstStyle/>
-                    <a:p>
-                      <a:r>
-                        <a:rPr sz="1400" b="0" i="0">
-                          <a:solidFill>
-                            <a:srgbClr val="1A1440"/>
-                          </a:solidFill>
-                          <a:latin typeface="Calibri"/>
-                        </a:rPr>
-                        <a:t>Compare pre-release and post-release on Android alone</a:t>
+                        <a:t>"You're right that checkout starts held at 80 percent; I'd like to show the next step."</a:t>
                       </a:r>
                     </a:p>
                   </a:txBody>
@@ -6207,7 +7684,7 @@
                           </a:solidFill>
                           <a:latin typeface="Calibri"/>
                         </a:rPr>
-                        <a:t>Close</a:t>
+                        <a:t>Evidence</a:t>
                       </a:r>
                     </a:p>
                   </a:txBody>
@@ -6229,7 +7706,7 @@
                           </a:solidFill>
                           <a:latin typeface="Calibri"/>
                         </a:rPr>
-                        <a:t>Everything looks the same</a:t>
+                        <a:t>Overall conversion before and after</a:t>
                       </a:r>
                     </a:p>
                   </a:txBody>
@@ -6251,7 +7728,143 @@
                           </a:solidFill>
                           <a:latin typeface="Calibri"/>
                         </a:rPr>
-                        <a:t>Name the segment, the stage and the date; propose the fix</a:t>
+                        <a:t>Checkout start to order, 72.5 to 55, members on Android only, from the release week</a:t>
+                      </a:r>
+                    </a:p>
+                  </a:txBody>
+                  <a:tcPr marL="101600" marR="101600" marT="38100" marB="38100" anchor="ctr">
+                    <a:solidFill>
+                      <a:srgbClr val="F4F2FA"/>
+                    </a:solidFill>
+                  </a:tcPr>
+                </a:tc>
+              </a:tr>
+              <a:tr h="369824">
+                <a:tc>
+                  <a:txBody>
+                    <a:bodyPr/>
+                    <a:lstStyle/>
+                    <a:p>
+                      <a:r>
+                        <a:rPr sz="1400" b="0" i="0">
+                          <a:solidFill>
+                            <a:srgbClr val="1A1440"/>
+                          </a:solidFill>
+                          <a:latin typeface="Calibri"/>
+                        </a:rPr>
+                        <a:t>The comparators</a:t>
+                      </a:r>
+                    </a:p>
+                  </a:txBody>
+                  <a:tcPr marL="101600" marR="101600" marT="38100" marB="38100" anchor="ctr">
+                    <a:solidFill>
+                      <a:srgbClr val="FFFFFF"/>
+                    </a:solidFill>
+                  </a:tcPr>
+                </a:tc>
+                <a:tc>
+                  <a:txBody>
+                    <a:bodyPr/>
+                    <a:lstStyle/>
+                    <a:p>
+                      <a:r>
+                        <a:rPr sz="1400" b="0" i="0">
+                          <a:solidFill>
+                            <a:srgbClr val="1A1440"/>
+                          </a:solidFill>
+                          <a:latin typeface="Calibri"/>
+                        </a:rPr>
+                        <a:t>None</a:t>
+                      </a:r>
+                    </a:p>
+                  </a:txBody>
+                  <a:tcPr marL="101600" marR="101600" marT="38100" marB="38100" anchor="ctr">
+                    <a:solidFill>
+                      <a:srgbClr val="FFFFFF"/>
+                    </a:solidFill>
+                  </a:tcPr>
+                </a:tc>
+                <a:tc>
+                  <a:txBody>
+                    <a:bodyPr/>
+                    <a:lstStyle/>
+                    <a:p>
+                      <a:r>
+                        <a:rPr sz="1400" b="0" i="0">
+                          <a:solidFill>
+                            <a:srgbClr val="1A1440"/>
+                          </a:solidFill>
+                          <a:latin typeface="Calibri"/>
+                        </a:rPr>
+                        <a:t>iOS members 57 to 56; non-members on Android 52 to 51</a:t>
+                      </a:r>
+                    </a:p>
+                  </a:txBody>
+                  <a:tcPr marL="101600" marR="101600" marT="38100" marB="38100" anchor="ctr">
+                    <a:solidFill>
+                      <a:srgbClr val="FFFFFF"/>
+                    </a:solidFill>
+                  </a:tcPr>
+                </a:tc>
+              </a:tr>
+              <a:tr h="611632">
+                <a:tc>
+                  <a:txBody>
+                    <a:bodyPr/>
+                    <a:lstStyle/>
+                    <a:p>
+                      <a:r>
+                        <a:rPr sz="1400" b="0" i="0">
+                          <a:solidFill>
+                            <a:srgbClr val="1A1440"/>
+                          </a:solidFill>
+                          <a:latin typeface="Calibri"/>
+                        </a:rPr>
+                        <a:t>What would change my mind</a:t>
+                      </a:r>
+                    </a:p>
+                  </a:txBody>
+                  <a:tcPr marL="101600" marR="101600" marT="38100" marB="38100" anchor="ctr">
+                    <a:solidFill>
+                      <a:srgbClr val="F4F2FA"/>
+                    </a:solidFill>
+                  </a:tcPr>
+                </a:tc>
+                <a:tc>
+                  <a:txBody>
+                    <a:bodyPr/>
+                    <a:lstStyle/>
+                    <a:p>
+                      <a:r>
+                        <a:rPr sz="1400" b="0" i="0">
+                          <a:solidFill>
+                            <a:srgbClr val="1A1440"/>
+                          </a:solidFill>
+                          <a:latin typeface="Calibri"/>
+                        </a:rPr>
+                        <a:t>Nothing</a:t>
+                      </a:r>
+                    </a:p>
+                  </a:txBody>
+                  <a:tcPr marL="101600" marR="101600" marT="38100" marB="38100" anchor="ctr">
+                    <a:solidFill>
+                      <a:srgbClr val="F4F2FA"/>
+                    </a:solidFill>
+                  </a:tcPr>
+                </a:tc>
+                <a:tc>
+                  <a:txBody>
+                    <a:bodyPr/>
+                    <a:lstStyle/>
+                    <a:p>
+                      <a:r>
+                        <a:rPr sz="1400" b="0" i="0">
+                          <a:solidFill>
+                            <a:srgbClr val="1A1440"/>
+                          </a:solidFill>
+                          <a:latin typeface="Calibri"/>
+                        </a:rPr>
+                        <a:t>"If the event the release renamed is mapped wrong, I'd rerun it on your mapping."</a:t>
                       </a:r>
                     </a:p>
                   </a:txBody>
@@ -6319,7 +7932,7 @@
         <p:spPr>
           <a:xfrm>
             <a:off x="640080" y="6437376"/>
-            <a:ext cx="1608486" cy="152146"/>
+            <a:ext cx="1516475" cy="152146"/>
           </a:xfrm>
           <a:prstGeom prst="rect">
             <a:avLst/>
@@ -6340,7 +7953,7 @@
                 </a:solidFill>
                 <a:latin typeface="Calibri"/>
               </a:rPr>
-              <a:t>Weaned users and the mix move</a:t>
+              <a:t>Can weaning lift retention?</a:t>
             </a:r>
           </a:p>
         </p:txBody>
@@ -6353,7 +7966,7 @@
         </p:nvSpPr>
         <p:spPr>
           <a:xfrm>
-            <a:off x="2340006" y="6492240"/>
+            <a:off x="2247995" y="6492240"/>
             <a:ext cx="64008" cy="64008"/>
           </a:xfrm>
           <a:prstGeom prst="ellipse">
@@ -6397,8 +8010,8 @@
         </p:nvSpPr>
         <p:spPr>
           <a:xfrm>
-            <a:off x="2449734" y="6437376"/>
-            <a:ext cx="2022538" cy="152146"/>
+            <a:off x="2357723" y="6437376"/>
+            <a:ext cx="1470469" cy="152146"/>
           </a:xfrm>
           <a:prstGeom prst="rect">
             <a:avLst/>
@@ -6419,7 +8032,7 @@
                 </a:solidFill>
                 <a:latin typeface="Calibri"/>
               </a:rPr>
-              <a:t>Monthly against weekly on today's data</a:t>
+              <a:t>Does a weekly table agree?</a:t>
             </a:r>
           </a:p>
         </p:txBody>
@@ -6432,7 +8045,86 @@
         </p:nvSpPr>
         <p:spPr>
           <a:xfrm>
-            <a:off x="4563713" y="6492240"/>
+            <a:off x="3919632" y="6492240"/>
+            <a:ext cx="64008" cy="64008"/>
+          </a:xfrm>
+          <a:prstGeom prst="ellipse">
+            <a:avLst/>
+          </a:prstGeom>
+          <a:solidFill>
+            <a:srgbClr val="CFC9EE"/>
+          </a:solidFill>
+          <a:ln>
+            <a:noFill/>
+          </a:ln>
+          <a:effectLst/>
+        </p:spPr>
+        <p:style>
+          <a:lnRef idx="1">
+            <a:schemeClr val="accent1"/>
+          </a:lnRef>
+          <a:fillRef idx="3">
+            <a:schemeClr val="accent1"/>
+          </a:fillRef>
+          <a:effectRef idx="2">
+            <a:schemeClr val="accent1"/>
+          </a:effectRef>
+          <a:fontRef idx="minor">
+            <a:schemeClr val="lt1"/>
+          </a:fontRef>
+        </p:style>
+        <p:txBody>
+          <a:bodyPr rtlCol="0" anchor="ctr" wrap="square"/>
+          <a:lstStyle/>
+          <a:p>
+            <a:pPr algn="ctr"/>
+          </a:p>
+        </p:txBody>
+      </p:sp>
+      <p:sp>
+        <p:nvSpPr>
+          <p:cNvPr id="15" name="TextBox 14"/>
+          <p:cNvSpPr txBox="1"/>
+          <p:nvPr/>
+        </p:nvSpPr>
+        <p:spPr>
+          <a:xfrm>
+            <a:off x="4029360" y="6437376"/>
+            <a:ext cx="1470469" cy="152146"/>
+          </a:xfrm>
+          <a:prstGeom prst="rect">
+            <a:avLst/>
+          </a:prstGeom>
+          <a:noFill/>
+        </p:spPr>
+        <p:txBody>
+          <a:bodyPr wrap="square" anchor="t" lIns="0" rIns="0" tIns="0" bIns="0">
+            <a:spAutoFit/>
+          </a:bodyPr>
+          <a:lstStyle/>
+          <a:p>
+            <a:pPr algn="l"/>
+            <a:r>
+              <a:rPr sz="700" b="0" i="0">
+                <a:solidFill>
+                  <a:srgbClr val="6B6690"/>
+                </a:solidFill>
+                <a:latin typeface="Calibri"/>
+              </a:rPr>
+              <a:t>Did Gold cause the orders?</a:t>
+            </a:r>
+          </a:p>
+        </p:txBody>
+      </p:sp>
+      <p:sp>
+        <p:nvSpPr>
+          <p:cNvPr id="16" name="Oval 15"/>
+          <p:cNvSpPr/>
+          <p:nvPr/>
+        </p:nvSpPr>
+        <p:spPr>
+          <a:xfrm>
+            <a:off x="5591270" y="6492240"/>
             <a:ext cx="64008" cy="64008"/>
           </a:xfrm>
           <a:prstGeom prst="ellipse">
@@ -6470,14 +8162,14 @@
       </p:sp>
       <p:sp>
         <p:nvSpPr>
-          <p:cNvPr id="15" name="TextBox 14"/>
+          <p:cNvPr id="17" name="TextBox 16"/>
           <p:cNvSpPr txBox="1"/>
           <p:nvPr/>
         </p:nvSpPr>
         <p:spPr>
           <a:xfrm>
-            <a:off x="4673441" y="6437376"/>
-            <a:ext cx="2194560" cy="152146"/>
+            <a:off x="5700998" y="6437376"/>
+            <a:ext cx="1608486" cy="152146"/>
           </a:xfrm>
           <a:prstGeom prst="rect">
             <a:avLst/>
@@ -6498,65 +8190,21 @@
                 </a:solidFill>
                 <a:latin typeface="Calibri"/>
               </a:rPr>
-              <a:t>Zomato's 60 percent rise, kept descriptive</a:t>
-            </a:r>
-          </a:p>
-        </p:txBody>
-      </p:sp>
-      <p:sp>
-        <p:nvSpPr>
-          <p:cNvPr id="16" name="Oval 15"/>
-          <p:cNvSpPr/>
-          <p:nvPr/>
-        </p:nvSpPr>
-        <p:spPr>
-          <a:xfrm>
-            <a:off x="6959441" y="6492240"/>
-            <a:ext cx="64008" cy="64008"/>
-          </a:xfrm>
-          <a:prstGeom prst="ellipse">
-            <a:avLst/>
-          </a:prstGeom>
-          <a:solidFill>
-            <a:srgbClr val="CFC9EE"/>
-          </a:solidFill>
-          <a:ln>
-            <a:noFill/>
-          </a:ln>
-          <a:effectLst/>
-        </p:spPr>
-        <p:style>
-          <a:lnRef idx="1">
-            <a:schemeClr val="accent1"/>
-          </a:lnRef>
-          <a:fillRef idx="3">
-            <a:schemeClr val="accent1"/>
-          </a:fillRef>
-          <a:effectRef idx="2">
-            <a:schemeClr val="accent1"/>
-          </a:effectRef>
-          <a:fontRef idx="minor">
-            <a:schemeClr val="lt1"/>
-          </a:fontRef>
-        </p:style>
-        <p:txBody>
-          <a:bodyPr rtlCol="0" anchor="ctr" wrap="square"/>
-          <a:lstStyle/>
-          <a:p>
-            <a:pPr algn="ctr"/>
-          </a:p>
-        </p:txBody>
-      </p:sp>
-      <p:sp>
-        <p:nvSpPr>
-          <p:cNvPr id="17" name="TextBox 16"/>
+              <a:t>Is the app team's stage fine?</a:t>
+            </a:r>
+          </a:p>
+        </p:txBody>
+      </p:sp>
+      <p:sp>
+        <p:nvSpPr>
+          <p:cNvPr id="18" name="TextBox 17"/>
           <p:cNvSpPr txBox="1"/>
           <p:nvPr/>
         </p:nvSpPr>
         <p:spPr>
           <a:xfrm>
-            <a:off x="7069169" y="6437376"/>
-            <a:ext cx="504348" cy="152146"/>
+            <a:off x="10198303" y="6437376"/>
+            <a:ext cx="1463040" cy="160401"/>
           </a:xfrm>
           <a:prstGeom prst="rect">
             <a:avLst/>
@@ -6569,50 +8217,15 @@
           </a:bodyPr>
           <a:lstStyle/>
           <a:p>
-            <a:pPr algn="l"/>
-            <a:r>
-              <a:rPr sz="700" b="0" i="0">
+            <a:pPr algn="r"/>
+            <a:r>
+              <a:rPr sz="750" b="0" i="0">
                 <a:solidFill>
                   <a:srgbClr val="6B6690"/>
                 </a:solidFill>
                 <a:latin typeface="Calibri"/>
               </a:rPr>
-              <a:t>Close</a:t>
-            </a:r>
-          </a:p>
-        </p:txBody>
-      </p:sp>
-      <p:sp>
-        <p:nvSpPr>
-          <p:cNvPr id="18" name="TextBox 17"/>
-          <p:cNvSpPr txBox="1"/>
-          <p:nvPr/>
-        </p:nvSpPr>
-        <p:spPr>
-          <a:xfrm>
-            <a:off x="10198303" y="6437376"/>
-            <a:ext cx="1463040" cy="160401"/>
-          </a:xfrm>
-          <a:prstGeom prst="rect">
-            <a:avLst/>
-          </a:prstGeom>
-          <a:noFill/>
-        </p:spPr>
-        <p:txBody>
-          <a:bodyPr wrap="square" anchor="t" lIns="0" rIns="0" tIns="0" bIns="0">
-            <a:spAutoFit/>
-          </a:bodyPr>
-          <a:lstStyle/>
-          <a:p>
-            <a:pPr algn="r"/>
-            <a:r>
-              <a:rPr sz="750" b="0" i="0">
-                <a:solidFill>
-                  <a:srgbClr val="6B6690"/>
-                </a:solidFill>
-                <a:latin typeface="Calibri"/>
-              </a:rPr>
-              <a:t>S7  ·  11 / 13</a:t>
+              <a:t>S9  ·  13 / 14</a:t>
             </a:r>
           </a:p>
         </p:txBody>
@@ -6625,573 +8238,7 @@
 </p:sld>
 </file>
 
-<file path=ppt/slides/slide12.xml><?xml version="1.0" encoding="utf-8"?>
-<p:sld xmlns:a="http://schemas.openxmlformats.org/drawingml/2006/main" xmlns:p="http://schemas.openxmlformats.org/presentationml/2006/main" xmlns:r="http://schemas.openxmlformats.org/officeDocument/2006/relationships">
-  <p:cSld>
-    <p:spTree>
-      <p:nvGrpSpPr>
-        <p:cNvPr id="1" name=""/>
-        <p:cNvGrpSpPr/>
-        <p:nvPr/>
-      </p:nvGrpSpPr>
-      <p:grpSpPr/>
-      <p:pic>
-        <p:nvPicPr>
-          <p:cNvPr id="2" name="Picture 1" descr="bg_dark.jpg"/>
-          <p:cNvPicPr>
-            <a:picLocks noChangeAspect="1"/>
-          </p:cNvPicPr>
-          <p:nvPr/>
-        </p:nvPicPr>
-        <p:blipFill>
-          <a:blip r:embed="rId2"/>
-          <a:stretch>
-            <a:fillRect/>
-          </a:stretch>
-        </p:blipFill>
-        <p:spPr>
-          <a:xfrm>
-            <a:off x="0" y="0"/>
-            <a:ext cx="12191695" cy="6858000"/>
-          </a:xfrm>
-          <a:prstGeom prst="rect">
-            <a:avLst/>
-          </a:prstGeom>
-        </p:spPr>
-      </p:pic>
-      <p:pic>
-        <p:nvPicPr>
-          <p:cNvPr id="3" name="Picture 2" descr="iitgn_logo.png"/>
-          <p:cNvPicPr>
-            <a:picLocks noChangeAspect="1"/>
-          </p:cNvPicPr>
-          <p:nvPr/>
-        </p:nvPicPr>
-        <p:blipFill>
-          <a:blip r:embed="rId3"/>
-          <a:stretch>
-            <a:fillRect/>
-          </a:stretch>
-        </p:blipFill>
-        <p:spPr>
-          <a:xfrm>
-            <a:off x="530352" y="201168"/>
-            <a:ext cx="420624" cy="420624"/>
-          </a:xfrm>
-          <a:prstGeom prst="rect">
-            <a:avLst/>
-          </a:prstGeom>
-        </p:spPr>
-      </p:pic>
-      <p:sp>
-        <p:nvSpPr>
-          <p:cNvPr id="4" name="TextBox 3"/>
-          <p:cNvSpPr txBox="1"/>
-          <p:nvPr/>
-        </p:nvSpPr>
-        <p:spPr>
-          <a:xfrm>
-            <a:off x="1042416" y="228600"/>
-            <a:ext cx="5120640" cy="185166"/>
-          </a:xfrm>
-          <a:prstGeom prst="rect">
-            <a:avLst/>
-          </a:prstGeom>
-          <a:noFill/>
-        </p:spPr>
-        <p:txBody>
-          <a:bodyPr wrap="square" anchor="t" lIns="0" rIns="0" tIns="0" bIns="0">
-            <a:spAutoFit/>
-          </a:bodyPr>
-          <a:lstStyle/>
-          <a:p>
-            <a:pPr algn="l"/>
-            <a:r>
-              <a:rPr sz="900" b="1" i="0">
-                <a:solidFill>
-                  <a:srgbClr val="FFFFFF"/>
-                </a:solidFill>
-                <a:latin typeface="Calibri"/>
-              </a:rPr>
-              <a:t>Indian Institute of Technology Gandhinagar</a:t>
-            </a:r>
-          </a:p>
-        </p:txBody>
-      </p:sp>
-      <p:sp>
-        <p:nvSpPr>
-          <p:cNvPr id="5" name="TextBox 4"/>
-          <p:cNvSpPr txBox="1"/>
-          <p:nvPr/>
-        </p:nvSpPr>
-        <p:spPr>
-          <a:xfrm>
-            <a:off x="1042416" y="420623"/>
-            <a:ext cx="5852160" cy="127381"/>
-          </a:xfrm>
-          <a:prstGeom prst="rect">
-            <a:avLst/>
-          </a:prstGeom>
-          <a:noFill/>
-        </p:spPr>
-        <p:txBody>
-          <a:bodyPr wrap="square" anchor="t" lIns="0" rIns="0" tIns="0" bIns="0">
-            <a:spAutoFit/>
-          </a:bodyPr>
-          <a:lstStyle/>
-          <a:p>
-            <a:pPr algn="l"/>
-            <a:r>
-              <a:rPr sz="550" b="1" i="0" spc="300">
-                <a:solidFill>
-                  <a:srgbClr val="CFC9EE"/>
-                </a:solidFill>
-                <a:latin typeface="Calibri"/>
-              </a:rPr>
-              <a:t>ADMINISTERED THROUGH THE COMPETENCY ADVANCEMENT ACADEMY</a:t>
-            </a:r>
-          </a:p>
-        </p:txBody>
-      </p:sp>
-      <p:sp>
-        <p:nvSpPr>
-          <p:cNvPr id="6" name="TextBox 5"/>
-          <p:cNvSpPr txBox="1"/>
-          <p:nvPr/>
-        </p:nvSpPr>
-        <p:spPr>
-          <a:xfrm>
-            <a:off x="5992063" y="310896"/>
-            <a:ext cx="5669280" cy="127381"/>
-          </a:xfrm>
-          <a:prstGeom prst="rect">
-            <a:avLst/>
-          </a:prstGeom>
-          <a:noFill/>
-        </p:spPr>
-        <p:txBody>
-          <a:bodyPr wrap="square" anchor="t" lIns="0" rIns="0" tIns="0" bIns="0">
-            <a:spAutoFit/>
-          </a:bodyPr>
-          <a:lstStyle/>
-          <a:p>
-            <a:pPr algn="r"/>
-            <a:r>
-              <a:rPr sz="550" b="1" i="0" spc="300">
-                <a:solidFill>
-                  <a:srgbClr val="CFC9EE"/>
-                </a:solidFill>
-                <a:latin typeface="Calibri"/>
-              </a:rPr>
-              <a:t>PG DIPLOMA IN AI-ML AND AGENTIC AI ENGINEERING  ·  COHORT 2</a:t>
-            </a:r>
-          </a:p>
-        </p:txBody>
-      </p:sp>
-      <p:sp>
-        <p:nvSpPr>
-          <p:cNvPr id="7" name="TextBox 6"/>
-          <p:cNvSpPr txBox="1"/>
-          <p:nvPr/>
-        </p:nvSpPr>
-        <p:spPr>
-          <a:xfrm>
-            <a:off x="731519" y="1143000"/>
-            <a:ext cx="3657600" cy="1371600"/>
-          </a:xfrm>
-          <a:prstGeom prst="rect">
-            <a:avLst/>
-          </a:prstGeom>
-          <a:noFill/>
-        </p:spPr>
-        <p:txBody>
-          <a:bodyPr wrap="square" anchor="t" lIns="0" rIns="0" tIns="0" bIns="0">
-            <a:spAutoFit/>
-          </a:bodyPr>
-          <a:lstStyle/>
-          <a:p>
-            <a:pPr algn="l"/>
-            <a:r>
-              <a:rPr sz="9600" b="0" i="0">
-                <a:solidFill>
-                  <a:srgbClr val="D9A7FF"/>
-                </a:solidFill>
-                <a:latin typeface="Georgia"/>
-              </a:rPr>
-              <a:t>04</a:t>
-            </a:r>
-          </a:p>
-        </p:txBody>
-      </p:sp>
-      <p:sp>
-        <p:nvSpPr>
-          <p:cNvPr id="8" name="TextBox 7"/>
-          <p:cNvSpPr txBox="1"/>
-          <p:nvPr/>
-        </p:nvSpPr>
-        <p:spPr>
-          <a:xfrm>
-            <a:off x="731519" y="2606040"/>
-            <a:ext cx="10673791" cy="731520"/>
-          </a:xfrm>
-          <a:prstGeom prst="rect">
-            <a:avLst/>
-          </a:prstGeom>
-          <a:noFill/>
-        </p:spPr>
-        <p:txBody>
-          <a:bodyPr wrap="square" anchor="t" lIns="0" rIns="0" tIns="0" bIns="0">
-            <a:spAutoFit/>
-          </a:bodyPr>
-          <a:lstStyle/>
-          <a:p>
-            <a:pPr algn="l"/>
-            <a:r>
-              <a:rPr sz="4000" b="0" i="0">
-                <a:solidFill>
-                  <a:srgbClr val="FFFFFF"/>
-                </a:solidFill>
-                <a:latin typeface="Georgia"/>
-              </a:rPr>
-              <a:t>Close</a:t>
-            </a:r>
-          </a:p>
-        </p:txBody>
-      </p:sp>
-      <p:sp>
-        <p:nvSpPr>
-          <p:cNvPr id="9" name="TextBox 8"/>
-          <p:cNvSpPr txBox="1"/>
-          <p:nvPr/>
-        </p:nvSpPr>
-        <p:spPr>
-          <a:xfrm>
-            <a:off x="731519" y="3520440"/>
-            <a:ext cx="9509760" cy="284226"/>
-          </a:xfrm>
-          <a:prstGeom prst="rect">
-            <a:avLst/>
-          </a:prstGeom>
-          <a:noFill/>
-        </p:spPr>
-        <p:txBody>
-          <a:bodyPr wrap="square" anchor="t" lIns="0" rIns="0" tIns="0" bIns="0">
-            <a:spAutoFit/>
-          </a:bodyPr>
-          <a:lstStyle/>
-          <a:p>
-            <a:pPr algn="l"/>
-            <a:r>
-              <a:rPr sz="1500" b="0" i="0">
-                <a:solidFill>
-                  <a:srgbClr val="E4E1F1"/>
-                </a:solidFill>
-                <a:latin typeface="Calibri"/>
-              </a:rPr>
-              <a:t>What the fallback hour taught, in one sentence.</a:t>
-            </a:r>
-          </a:p>
-        </p:txBody>
-      </p:sp>
-      <p:sp>
-        <p:nvSpPr>
-          <p:cNvPr id="10" name="Rounded Rectangle 9"/>
-          <p:cNvSpPr/>
-          <p:nvPr/>
-        </p:nvSpPr>
-        <p:spPr>
-          <a:xfrm>
-            <a:off x="731519" y="5074920"/>
-            <a:ext cx="2083023" cy="310896"/>
-          </a:xfrm>
-          <a:prstGeom prst="roundRect">
-            <a:avLst>
-              <a:gd name="adj" fmla="val 50000"/>
-            </a:avLst>
-          </a:prstGeom>
-          <a:noFill/>
-          <a:ln w="9525">
-            <a:solidFill>
-              <a:srgbClr val="CFC9EE"/>
-            </a:solidFill>
-          </a:ln>
-          <a:effectLst/>
-        </p:spPr>
-        <p:style>
-          <a:lnRef idx="1">
-            <a:schemeClr val="accent1"/>
-          </a:lnRef>
-          <a:fillRef idx="3">
-            <a:schemeClr val="accent1"/>
-          </a:fillRef>
-          <a:effectRef idx="2">
-            <a:schemeClr val="accent1"/>
-          </a:effectRef>
-          <a:fontRef idx="minor">
-            <a:schemeClr val="lt1"/>
-          </a:fontRef>
-        </p:style>
-        <p:txBody>
-          <a:bodyPr rtlCol="0" anchor="ctr" wrap="none" lIns="25400" rIns="25400" tIns="0" bIns="0"/>
-          <a:lstStyle/>
-          <a:p>
-            <a:pPr algn="ctr"/>
-            <a:r>
-              <a:rPr sz="850" b="0">
-                <a:solidFill>
-                  <a:srgbClr val="CFC9EE"/>
-                </a:solidFill>
-                <a:latin typeface="Calibri"/>
-              </a:rPr>
-              <a:t>Weaned users and the mix move</a:t>
-            </a:r>
-          </a:p>
-        </p:txBody>
-      </p:sp>
-      <p:sp>
-        <p:nvSpPr>
-          <p:cNvPr id="11" name="Rounded Rectangle 10"/>
-          <p:cNvSpPr/>
-          <p:nvPr/>
-        </p:nvSpPr>
-        <p:spPr>
-          <a:xfrm>
-            <a:off x="2924271" y="5074920"/>
-            <a:ext cx="2148840" cy="310896"/>
-          </a:xfrm>
-          <a:prstGeom prst="roundRect">
-            <a:avLst>
-              <a:gd name="adj" fmla="val 50000"/>
-            </a:avLst>
-          </a:prstGeom>
-          <a:noFill/>
-          <a:ln w="9525">
-            <a:solidFill>
-              <a:srgbClr val="CFC9EE"/>
-            </a:solidFill>
-          </a:ln>
-          <a:effectLst/>
-        </p:spPr>
-        <p:style>
-          <a:lnRef idx="1">
-            <a:schemeClr val="accent1"/>
-          </a:lnRef>
-          <a:fillRef idx="3">
-            <a:schemeClr val="accent1"/>
-          </a:fillRef>
-          <a:effectRef idx="2">
-            <a:schemeClr val="accent1"/>
-          </a:effectRef>
-          <a:fontRef idx="minor">
-            <a:schemeClr val="lt1"/>
-          </a:fontRef>
-        </p:style>
-        <p:txBody>
-          <a:bodyPr rtlCol="0" anchor="ctr" wrap="none" lIns="25400" rIns="25400" tIns="0" bIns="0"/>
-          <a:lstStyle/>
-          <a:p>
-            <a:pPr algn="ctr"/>
-            <a:r>
-              <a:rPr sz="850" b="0">
-                <a:solidFill>
-                  <a:srgbClr val="CFC9EE"/>
-                </a:solidFill>
-                <a:latin typeface="Calibri"/>
-              </a:rPr>
-              <a:t>Monthly against weekly on today's data</a:t>
-            </a:r>
-          </a:p>
-        </p:txBody>
-      </p:sp>
-      <p:sp>
-        <p:nvSpPr>
-          <p:cNvPr id="12" name="Rounded Rectangle 11"/>
-          <p:cNvSpPr/>
-          <p:nvPr/>
-        </p:nvSpPr>
-        <p:spPr>
-          <a:xfrm>
-            <a:off x="5182839" y="5074920"/>
-            <a:ext cx="2148840" cy="310896"/>
-          </a:xfrm>
-          <a:prstGeom prst="roundRect">
-            <a:avLst>
-              <a:gd name="adj" fmla="val 50000"/>
-            </a:avLst>
-          </a:prstGeom>
-          <a:noFill/>
-          <a:ln w="9525">
-            <a:solidFill>
-              <a:srgbClr val="CFC9EE"/>
-            </a:solidFill>
-          </a:ln>
-          <a:effectLst/>
-        </p:spPr>
-        <p:style>
-          <a:lnRef idx="1">
-            <a:schemeClr val="accent1"/>
-          </a:lnRef>
-          <a:fillRef idx="3">
-            <a:schemeClr val="accent1"/>
-          </a:fillRef>
-          <a:effectRef idx="2">
-            <a:schemeClr val="accent1"/>
-          </a:effectRef>
-          <a:fontRef idx="minor">
-            <a:schemeClr val="lt1"/>
-          </a:fontRef>
-        </p:style>
-        <p:txBody>
-          <a:bodyPr rtlCol="0" anchor="ctr" wrap="none" lIns="25400" rIns="25400" tIns="0" bIns="0"/>
-          <a:lstStyle/>
-          <a:p>
-            <a:pPr algn="ctr"/>
-            <a:r>
-              <a:rPr sz="850" b="0">
-                <a:solidFill>
-                  <a:srgbClr val="CFC9EE"/>
-                </a:solidFill>
-                <a:latin typeface="Calibri"/>
-              </a:rPr>
-              <a:t>Zomato's 60 percent rise, kept descriptive</a:t>
-            </a:r>
-          </a:p>
-        </p:txBody>
-      </p:sp>
-      <p:sp>
-        <p:nvSpPr>
-          <p:cNvPr id="13" name="Rounded Rectangle 12"/>
-          <p:cNvSpPr/>
-          <p:nvPr/>
-        </p:nvSpPr>
-        <p:spPr>
-          <a:xfrm>
-            <a:off x="7441407" y="5074920"/>
-            <a:ext cx="661839" cy="310896"/>
-          </a:xfrm>
-          <a:prstGeom prst="roundRect">
-            <a:avLst>
-              <a:gd name="adj" fmla="val 50000"/>
-            </a:avLst>
-          </a:prstGeom>
-          <a:solidFill>
-            <a:srgbClr val="D9A7FF"/>
-          </a:solidFill>
-          <a:ln>
-            <a:noFill/>
-          </a:ln>
-          <a:effectLst/>
-        </p:spPr>
-        <p:style>
-          <a:lnRef idx="1">
-            <a:schemeClr val="accent1"/>
-          </a:lnRef>
-          <a:fillRef idx="3">
-            <a:schemeClr val="accent1"/>
-          </a:fillRef>
-          <a:effectRef idx="2">
-            <a:schemeClr val="accent1"/>
-          </a:effectRef>
-          <a:fontRef idx="minor">
-            <a:schemeClr val="lt1"/>
-          </a:fontRef>
-        </p:style>
-        <p:txBody>
-          <a:bodyPr rtlCol="0" anchor="ctr" wrap="none" lIns="25400" rIns="25400" tIns="0" bIns="0"/>
-          <a:lstStyle/>
-          <a:p>
-            <a:pPr algn="ctr"/>
-            <a:r>
-              <a:rPr sz="850" b="1">
-                <a:solidFill>
-                  <a:srgbClr val="1A0F5C"/>
-                </a:solidFill>
-                <a:latin typeface="Calibri"/>
-              </a:rPr>
-              <a:t>Close</a:t>
-            </a:r>
-          </a:p>
-        </p:txBody>
-      </p:sp>
-      <p:sp>
-        <p:nvSpPr>
-          <p:cNvPr id="14" name="TextBox 13"/>
-          <p:cNvSpPr txBox="1"/>
-          <p:nvPr/>
-        </p:nvSpPr>
-        <p:spPr>
-          <a:xfrm>
-            <a:off x="530352" y="6437376"/>
-            <a:ext cx="9667951" cy="160401"/>
-          </a:xfrm>
-          <a:prstGeom prst="rect">
-            <a:avLst/>
-          </a:prstGeom>
-          <a:noFill/>
-        </p:spPr>
-        <p:txBody>
-          <a:bodyPr wrap="square" anchor="t" lIns="0" rIns="0" tIns="0" bIns="0">
-            <a:spAutoFit/>
-          </a:bodyPr>
-          <a:lstStyle/>
-          <a:p>
-            <a:pPr algn="l"/>
-            <a:r>
-              <a:rPr sz="750" b="0" i="0">
-                <a:solidFill>
-                  <a:srgbClr val="CFC9EE"/>
-                </a:solidFill>
-                <a:latin typeface="Calibri"/>
-              </a:rPr>
-              <a:t>Week 4 Day 4 fallback: the weaned-users hour</a:t>
-            </a:r>
-          </a:p>
-        </p:txBody>
-      </p:sp>
-      <p:sp>
-        <p:nvSpPr>
-          <p:cNvPr id="15" name="TextBox 14"/>
-          <p:cNvSpPr txBox="1"/>
-          <p:nvPr/>
-        </p:nvSpPr>
-        <p:spPr>
-          <a:xfrm>
-            <a:off x="10198303" y="6437376"/>
-            <a:ext cx="1463040" cy="160401"/>
-          </a:xfrm>
-          <a:prstGeom prst="rect">
-            <a:avLst/>
-          </a:prstGeom>
-          <a:noFill/>
-        </p:spPr>
-        <p:txBody>
-          <a:bodyPr wrap="square" anchor="t" lIns="0" rIns="0" tIns="0" bIns="0">
-            <a:spAutoFit/>
-          </a:bodyPr>
-          <a:lstStyle/>
-          <a:p>
-            <a:pPr algn="r"/>
-            <a:r>
-              <a:rPr sz="750" b="0" i="0">
-                <a:solidFill>
-                  <a:srgbClr val="CFC9EE"/>
-                </a:solidFill>
-                <a:latin typeface="Calibri"/>
-              </a:rPr>
-              <a:t>12 / 13</a:t>
-            </a:r>
-          </a:p>
-        </p:txBody>
-      </p:sp>
-    </p:spTree>
-  </p:cSld>
-  <p:clrMapOvr>
-    <a:masterClrMapping/>
-  </p:clrMapOvr>
-</p:sld>
-</file>
-
-<file path=ppt/slides/slide13.xml><?xml version="1.0" encoding="utf-8"?>
+<file path=ppt/slides/slide14.xml><?xml version="1.0" encoding="utf-8"?>
 <p:sld xmlns:a="http://schemas.openxmlformats.org/drawingml/2006/main" xmlns:p="http://schemas.openxmlformats.org/presentationml/2006/main" xmlns:r="http://schemas.openxmlformats.org/officeDocument/2006/relationships">
   <p:cSld>
     <p:spTree>
@@ -7349,7 +8396,7 @@
                 </a:solidFill>
                 <a:latin typeface="Calibri"/>
               </a:rPr>
-              <a:t>WEEK 4  ·  DAY 4  ·  KALPA GLOBAL CAPABILITY CENTRE</a:t>
+              <a:t>WEEK 4  ·  DAY 4  ·  THE FALLBACK, IF THE TENTATIVE FACULTY BLOCK SLIPS</a:t>
             </a:r>
           </a:p>
         </p:txBody>
@@ -7384,7 +8431,7 @@
                 </a:solidFill>
                 <a:latin typeface="Georgia"/>
               </a:rPr>
-              <a:t>The sentence that closes the fallback hour</a:t>
+              <a:t>The block in one sentence</a:t>
             </a:r>
           </a:p>
         </p:txBody>
@@ -7419,7 +8466,7 @@
                 </a:solidFill>
                 <a:latin typeface="Calibri"/>
               </a:rPr>
-              <a:t>What does the hour teach that the main day did not already carry?</a:t>
+              <a:t>What did the fallback block add to the day?</a:t>
             </a:r>
           </a:p>
         </p:txBody>
@@ -7433,7 +8480,7 @@
         <p:spPr>
           <a:xfrm>
             <a:off x="530352" y="1956816"/>
-            <a:ext cx="11130991" cy="1434592"/>
+            <a:ext cx="11130991" cy="772160"/>
           </a:xfrm>
           <a:prstGeom prst="rect">
             <a:avLst/>
@@ -7458,23 +8505,7 @@
                 </a:solidFill>
                 <a:latin typeface="Calibri"/>
               </a:rPr>
-              <a:t>A blended lift and a blended fall can both be the mix shifting rather than any member's behaviour changing. The chart that separates them is the cohort triangle with its denominator named.</a:t>
-            </a:r>
-          </a:p>
-          <a:p>
-            <a:pPr>
-              <a:spcAft>
-                <a:spcPts val="800"/>
-              </a:spcAft>
-            </a:pPr>
-            <a:r>
-              <a:rPr sz="1600" b="0" i="0">
-                <a:solidFill>
-                  <a:srgbClr val="1A1440"/>
-                </a:solidFill>
-                <a:latin typeface="Calibri"/>
-              </a:rPr>
-              <a:t>Nothing in this hour touched survival analysis, log-rank tests or hazard functions. The IITGN block owns those whenever it runs.</a:t>
+              <a:t>A retention number can rise or hold because of who is counted, with nobody's behaviour changing: the cohort table with its denominator and its grain named is what tells the two apart.</a:t>
             </a:r>
           </a:p>
         </p:txBody>
@@ -7532,7 +8563,7 @@
         <p:spPr>
           <a:xfrm>
             <a:off x="640080" y="6437376"/>
-            <a:ext cx="1608486" cy="152146"/>
+            <a:ext cx="1516475" cy="152146"/>
           </a:xfrm>
           <a:prstGeom prst="rect">
             <a:avLst/>
@@ -7553,7 +8584,7 @@
                 </a:solidFill>
                 <a:latin typeface="Calibri"/>
               </a:rPr>
-              <a:t>Weaned users and the mix move</a:t>
+              <a:t>Can weaning lift retention?</a:t>
             </a:r>
           </a:p>
         </p:txBody>
@@ -7566,7 +8597,7 @@
         </p:nvSpPr>
         <p:spPr>
           <a:xfrm>
-            <a:off x="2340006" y="6492240"/>
+            <a:off x="2247995" y="6492240"/>
             <a:ext cx="64008" cy="64008"/>
           </a:xfrm>
           <a:prstGeom prst="ellipse">
@@ -7610,8 +8641,8 @@
         </p:nvSpPr>
         <p:spPr>
           <a:xfrm>
-            <a:off x="2449734" y="6437376"/>
-            <a:ext cx="2022538" cy="152146"/>
+            <a:off x="2357723" y="6437376"/>
+            <a:ext cx="1470469" cy="152146"/>
           </a:xfrm>
           <a:prstGeom prst="rect">
             <a:avLst/>
@@ -7632,7 +8663,7 @@
                 </a:solidFill>
                 <a:latin typeface="Calibri"/>
               </a:rPr>
-              <a:t>Monthly against weekly on today's data</a:t>
+              <a:t>Does a weekly table agree?</a:t>
             </a:r>
           </a:p>
         </p:txBody>
@@ -7645,7 +8676,7 @@
         </p:nvSpPr>
         <p:spPr>
           <a:xfrm>
-            <a:off x="4563713" y="6492240"/>
+            <a:off x="3919632" y="6492240"/>
             <a:ext cx="64008" cy="64008"/>
           </a:xfrm>
           <a:prstGeom prst="ellipse">
@@ -7689,8 +8720,8 @@
         </p:nvSpPr>
         <p:spPr>
           <a:xfrm>
-            <a:off x="4673441" y="6437376"/>
-            <a:ext cx="2194560" cy="152146"/>
+            <a:off x="4029360" y="6437376"/>
+            <a:ext cx="1470469" cy="152146"/>
           </a:xfrm>
           <a:prstGeom prst="rect">
             <a:avLst/>
@@ -7711,7 +8742,7 @@
                 </a:solidFill>
                 <a:latin typeface="Calibri"/>
               </a:rPr>
-              <a:t>Zomato's 60 percent rise, kept descriptive</a:t>
+              <a:t>Did Gold cause the orders?</a:t>
             </a:r>
           </a:p>
         </p:txBody>
@@ -7724,7 +8755,7 @@
         </p:nvSpPr>
         <p:spPr>
           <a:xfrm>
-            <a:off x="6959441" y="6492240"/>
+            <a:off x="5591270" y="6492240"/>
             <a:ext cx="64008" cy="64008"/>
           </a:xfrm>
           <a:prstGeom prst="ellipse">
@@ -7768,8 +8799,8 @@
         </p:nvSpPr>
         <p:spPr>
           <a:xfrm>
-            <a:off x="7069169" y="6437376"/>
-            <a:ext cx="504348" cy="152146"/>
+            <a:off x="5700998" y="6437376"/>
+            <a:ext cx="1608486" cy="152146"/>
           </a:xfrm>
           <a:prstGeom prst="rect">
             <a:avLst/>
@@ -7790,7 +8821,7 @@
                 </a:solidFill>
                 <a:latin typeface="Calibri"/>
               </a:rPr>
-              <a:t>Close</a:t>
+              <a:t>Is the app team's stage fine?</a:t>
             </a:r>
           </a:p>
         </p:txBody>
@@ -7825,7 +8856,7 @@
                 </a:solidFill>
                 <a:latin typeface="Calibri"/>
               </a:rPr>
-              <a:t>S8  ·  13 / 13</a:t>
+              <a:t>S10  ·  14 / 14</a:t>
             </a:r>
           </a:p>
         </p:txBody>
@@ -7850,7 +8881,7 @@
       <p:grpSpPr/>
       <p:pic>
         <p:nvPicPr>
-          <p:cNvPr id="2" name="Picture 1" descr="bg_dark.jpg"/>
+          <p:cNvPr id="2" name="Picture 1" descr="bg_light.jpg"/>
           <p:cNvPicPr>
             <a:picLocks noChangeAspect="1"/>
           </p:cNvPicPr>
@@ -7922,7 +8953,7 @@
             <a:r>
               <a:rPr sz="900" b="1" i="0">
                 <a:solidFill>
-                  <a:srgbClr val="FFFFFF"/>
+                  <a:srgbClr val="1A0F5C"/>
                 </a:solidFill>
                 <a:latin typeface="Calibri"/>
               </a:rPr>
@@ -7957,7 +8988,7 @@
             <a:r>
               <a:rPr sz="550" b="1" i="0" spc="300">
                 <a:solidFill>
-                  <a:srgbClr val="CFC9EE"/>
+                  <a:srgbClr val="6B6690"/>
                 </a:solidFill>
                 <a:latin typeface="Calibri"/>
               </a:rPr>
@@ -7992,11 +9023,11 @@
             <a:r>
               <a:rPr sz="550" b="1" i="0" spc="300">
                 <a:solidFill>
-                  <a:srgbClr val="CFC9EE"/>
+                  <a:srgbClr val="6B6690"/>
                 </a:solidFill>
                 <a:latin typeface="Calibri"/>
               </a:rPr>
-              <a:t>PG DIPLOMA IN AI-ML AND AGENTIC AI ENGINEERING  ·  COHORT 2</a:t>
+              <a:t>WEEK 4  ·  DAY 4  ·  THE FALLBACK, IF THE TENTATIVE FACULTY BLOCK SLIPS</a:t>
             </a:r>
           </a:p>
         </p:txBody>
@@ -8009,8 +9040,43 @@
         </p:nvSpPr>
         <p:spPr>
           <a:xfrm>
-            <a:off x="731519" y="1143000"/>
-            <a:ext cx="3657600" cy="1371600"/>
+            <a:off x="530352" y="676656"/>
+            <a:ext cx="11130991" cy="512064"/>
+          </a:xfrm>
+          <a:prstGeom prst="rect">
+            <a:avLst/>
+          </a:prstGeom>
+          <a:noFill/>
+        </p:spPr>
+        <p:txBody>
+          <a:bodyPr wrap="square" anchor="b" lIns="0" rIns="0" tIns="0" bIns="0">
+            <a:spAutoFit/>
+          </a:bodyPr>
+          <a:lstStyle/>
+          <a:p>
+            <a:pPr algn="l"/>
+            <a:r>
+              <a:rPr sz="2600" b="0" i="0">
+                <a:solidFill>
+                  <a:srgbClr val="1A0F5C"/>
+                </a:solidFill>
+                <a:latin typeface="Georgia"/>
+              </a:rPr>
+              <a:t>Swiggy weaned 4 million users; retention rose</a:t>
+            </a:r>
+          </a:p>
+        </p:txBody>
+      </p:sp>
+      <p:sp>
+        <p:nvSpPr>
+          <p:cNvPr id="8" name="TextBox 7"/>
+          <p:cNvSpPr txBox="1"/>
+          <p:nvPr/>
+        </p:nvSpPr>
+        <p:spPr>
+          <a:xfrm>
+            <a:off x="530352" y="1243584"/>
+            <a:ext cx="11130991" cy="234696"/>
           </a:xfrm>
           <a:prstGeom prst="rect">
             <a:avLst/>
@@ -8025,27 +9091,27 @@
           <a:p>
             <a:pPr algn="l"/>
             <a:r>
-              <a:rPr sz="9600" b="0" i="0">
-                <a:solidFill>
-                  <a:srgbClr val="D9A7FF"/>
-                </a:solidFill>
-                <a:latin typeface="Georgia"/>
-              </a:rPr>
-              <a:t>01</a:t>
-            </a:r>
-          </a:p>
-        </p:txBody>
-      </p:sp>
-      <p:sp>
-        <p:nvSpPr>
-          <p:cNvPr id="8" name="TextBox 7"/>
+              <a:rPr sz="1200" b="0" i="0">
+                <a:solidFill>
+                  <a:srgbClr val="6B6690"/>
+                </a:solidFill>
+                <a:latin typeface="Calibri"/>
+              </a:rPr>
+              <a:t>What did Swiggy decide, and what did its numbers do?</a:t>
+            </a:r>
+          </a:p>
+        </p:txBody>
+      </p:sp>
+      <p:sp>
+        <p:nvSpPr>
+          <p:cNvPr id="9" name="TextBox 8"/>
           <p:cNvSpPr txBox="1"/>
           <p:nvPr/>
         </p:nvSpPr>
         <p:spPr>
           <a:xfrm>
-            <a:off x="731519" y="2606040"/>
-            <a:ext cx="10673791" cy="731520"/>
+            <a:off x="530352" y="1956816"/>
+            <a:ext cx="3527450" cy="698500"/>
           </a:xfrm>
           <a:prstGeom prst="rect">
             <a:avLst/>
@@ -8060,27 +9126,27 @@
           <a:p>
             <a:pPr algn="l"/>
             <a:r>
-              <a:rPr sz="4000" b="0" i="0">
-                <a:solidFill>
-                  <a:srgbClr val="FFFFFF"/>
+              <a:rPr sz="4400" b="0" i="0">
+                <a:solidFill>
+                  <a:srgbClr val="5B3FD6"/>
                 </a:solidFill>
                 <a:latin typeface="Georgia"/>
               </a:rPr>
-              <a:t>Weaned users and the mix move</a:t>
-            </a:r>
-          </a:p>
-        </p:txBody>
-      </p:sp>
-      <p:sp>
-        <p:nvSpPr>
-          <p:cNvPr id="9" name="TextBox 8"/>
+              <a:t>4M+</a:t>
+            </a:r>
+          </a:p>
+        </p:txBody>
+      </p:sp>
+      <p:sp>
+        <p:nvSpPr>
+          <p:cNvPr id="10" name="TextBox 9"/>
           <p:cNvSpPr txBox="1"/>
           <p:nvPr/>
         </p:nvSpPr>
         <p:spPr>
           <a:xfrm>
-            <a:off x="731519" y="3520440"/>
-            <a:ext cx="9509760" cy="284226"/>
+            <a:off x="530352" y="2691892"/>
+            <a:ext cx="3527450" cy="168656"/>
           </a:xfrm>
           <a:prstGeom prst="rect">
             <a:avLst/>
@@ -8095,35 +9161,68 @@
           <a:p>
             <a:pPr algn="l"/>
             <a:r>
-              <a:rPr sz="1500" b="0" i="0">
-                <a:solidFill>
-                  <a:srgbClr val="E4E1F1"/>
+              <a:rPr sz="800" b="1" i="0" spc="250">
+                <a:solidFill>
+                  <a:srgbClr val="1A0F5C"/>
                 </a:solidFill>
                 <a:latin typeface="Calibri"/>
               </a:rPr>
-              <a:t>Swiggy's own triangle, the move the mix makes, and the numbers.</a:t>
-            </a:r>
-          </a:p>
-        </p:txBody>
-      </p:sp>
-      <p:sp>
-        <p:nvSpPr>
-          <p:cNvPr id="10" name="Rounded Rectangle 9"/>
+              <a:t>USERS WEANED AWAY</a:t>
+            </a:r>
+          </a:p>
+        </p:txBody>
+      </p:sp>
+      <p:sp>
+        <p:nvSpPr>
+          <p:cNvPr id="11" name="TextBox 10"/>
+          <p:cNvSpPr txBox="1"/>
+          <p:nvPr/>
+        </p:nvSpPr>
+        <p:spPr>
+          <a:xfrm>
+            <a:off x="530352" y="2893060"/>
+            <a:ext cx="3527450" cy="350266"/>
+          </a:xfrm>
+          <a:prstGeom prst="rect">
+            <a:avLst/>
+          </a:prstGeom>
+          <a:noFill/>
+        </p:spPr>
+        <p:txBody>
+          <a:bodyPr wrap="square" anchor="t" lIns="0" rIns="0" tIns="0" bIns="0">
+            <a:spAutoFit/>
+          </a:bodyPr>
+          <a:lstStyle/>
+          <a:p>
+            <a:pPr algn="l"/>
+            <a:r>
+              <a:rPr sz="950" b="0" i="0">
+                <a:solidFill>
+                  <a:srgbClr val="6B6690"/>
+                </a:solidFill>
+                <a:latin typeface="Calibri"/>
+              </a:rPr>
+              <a:t>unprofitable Instamart users, over three quarters to Q1 FY27</a:t>
+            </a:r>
+          </a:p>
+        </p:txBody>
+      </p:sp>
+      <p:sp>
+        <p:nvSpPr>
+          <p:cNvPr id="12" name="Rectangle 11"/>
           <p:cNvSpPr/>
           <p:nvPr/>
         </p:nvSpPr>
         <p:spPr>
           <a:xfrm>
-            <a:off x="731519" y="5074920"/>
-            <a:ext cx="2083023" cy="310896"/>
-          </a:xfrm>
-          <a:prstGeom prst="roundRect">
-            <a:avLst>
-              <a:gd name="adj" fmla="val 50000"/>
-            </a:avLst>
+            <a:off x="530352" y="3145536"/>
+            <a:ext cx="3527450" cy="10972"/>
+          </a:xfrm>
+          <a:prstGeom prst="rect">
+            <a:avLst/>
           </a:prstGeom>
           <a:solidFill>
-            <a:srgbClr val="D9A7FF"/>
+            <a:srgbClr val="E4E1F1"/>
           </a:solidFill>
           <a:ln>
             <a:noFill/>
@@ -8145,43 +9244,137 @@
           </a:fontRef>
         </p:style>
         <p:txBody>
-          <a:bodyPr rtlCol="0" anchor="ctr" wrap="none" lIns="25400" rIns="25400" tIns="0" bIns="0"/>
+          <a:bodyPr rtlCol="0" anchor="ctr" wrap="square"/>
           <a:lstStyle/>
           <a:p>
             <a:pPr algn="ctr"/>
-            <a:r>
-              <a:rPr sz="850" b="1">
+          </a:p>
+        </p:txBody>
+      </p:sp>
+      <p:sp>
+        <p:nvSpPr>
+          <p:cNvPr id="13" name="TextBox 12"/>
+          <p:cNvSpPr txBox="1"/>
+          <p:nvPr/>
+        </p:nvSpPr>
+        <p:spPr>
+          <a:xfrm>
+            <a:off x="4332122" y="1956816"/>
+            <a:ext cx="3527450" cy="698500"/>
+          </a:xfrm>
+          <a:prstGeom prst="rect">
+            <a:avLst/>
+          </a:prstGeom>
+          <a:noFill/>
+        </p:spPr>
+        <p:txBody>
+          <a:bodyPr wrap="square" anchor="t" lIns="0" rIns="0" tIns="0" bIns="0">
+            <a:spAutoFit/>
+          </a:bodyPr>
+          <a:lstStyle/>
+          <a:p>
+            <a:pPr algn="l"/>
+            <a:r>
+              <a:rPr sz="4400" b="0" i="0">
+                <a:solidFill>
+                  <a:srgbClr val="5B3FD6"/>
+                </a:solidFill>
+                <a:latin typeface="Georgia"/>
+              </a:rPr>
+              <a:t>55 to 61</a:t>
+            </a:r>
+          </a:p>
+        </p:txBody>
+      </p:sp>
+      <p:sp>
+        <p:nvSpPr>
+          <p:cNvPr id="14" name="TextBox 13"/>
+          <p:cNvSpPr txBox="1"/>
+          <p:nvPr/>
+        </p:nvSpPr>
+        <p:spPr>
+          <a:xfrm>
+            <a:off x="4332122" y="2691892"/>
+            <a:ext cx="3527450" cy="168656"/>
+          </a:xfrm>
+          <a:prstGeom prst="rect">
+            <a:avLst/>
+          </a:prstGeom>
+          <a:noFill/>
+        </p:spPr>
+        <p:txBody>
+          <a:bodyPr wrap="square" anchor="t" lIns="0" rIns="0" tIns="0" bIns="0">
+            <a:spAutoFit/>
+          </a:bodyPr>
+          <a:lstStyle/>
+          <a:p>
+            <a:pPr algn="l"/>
+            <a:r>
+              <a:rPr sz="800" b="1" i="0" spc="250">
                 <a:solidFill>
                   <a:srgbClr val="1A0F5C"/>
                 </a:solidFill>
                 <a:latin typeface="Calibri"/>
               </a:rPr>
-              <a:t>Weaned users and the mix move</a:t>
-            </a:r>
-          </a:p>
-        </p:txBody>
-      </p:sp>
-      <p:sp>
-        <p:nvSpPr>
-          <p:cNvPr id="11" name="Rounded Rectangle 10"/>
+              <a:t>PERCENT</a:t>
+            </a:r>
+          </a:p>
+        </p:txBody>
+      </p:sp>
+      <p:sp>
+        <p:nvSpPr>
+          <p:cNvPr id="15" name="TextBox 14"/>
+          <p:cNvSpPr txBox="1"/>
+          <p:nvPr/>
+        </p:nvSpPr>
+        <p:spPr>
+          <a:xfrm>
+            <a:off x="4332122" y="2893060"/>
+            <a:ext cx="3527450" cy="350266"/>
+          </a:xfrm>
+          <a:prstGeom prst="rect">
+            <a:avLst/>
+          </a:prstGeom>
+          <a:noFill/>
+        </p:spPr>
+        <p:txBody>
+          <a:bodyPr wrap="square" anchor="t" lIns="0" rIns="0" tIns="0" bIns="0">
+            <a:spAutoFit/>
+          </a:bodyPr>
+          <a:lstStyle/>
+          <a:p>
+            <a:pPr algn="l"/>
+            <a:r>
+              <a:rPr sz="950" b="0" i="0">
+                <a:solidFill>
+                  <a:srgbClr val="6B6690"/>
+                </a:solidFill>
+                <a:latin typeface="Calibri"/>
+              </a:rPr>
+              <a:t>one-month retention of the transacting base, Q1 FY26 to Q1 FY27</a:t>
+            </a:r>
+          </a:p>
+        </p:txBody>
+      </p:sp>
+      <p:sp>
+        <p:nvSpPr>
+          <p:cNvPr id="16" name="Rectangle 15"/>
           <p:cNvSpPr/>
           <p:nvPr/>
         </p:nvSpPr>
         <p:spPr>
           <a:xfrm>
-            <a:off x="2924271" y="5074920"/>
-            <a:ext cx="2148840" cy="310896"/>
-          </a:xfrm>
-          <a:prstGeom prst="roundRect">
-            <a:avLst>
-              <a:gd name="adj" fmla="val 50000"/>
-            </a:avLst>
-          </a:prstGeom>
-          <a:noFill/>
-          <a:ln w="9525">
-            <a:solidFill>
-              <a:srgbClr val="CFC9EE"/>
-            </a:solidFill>
+            <a:off x="4332122" y="3145536"/>
+            <a:ext cx="3527450" cy="10972"/>
+          </a:xfrm>
+          <a:prstGeom prst="rect">
+            <a:avLst/>
+          </a:prstGeom>
+          <a:solidFill>
+            <a:srgbClr val="E4E1F1"/>
+          </a:solidFill>
+          <a:ln>
+            <a:noFill/>
           </a:ln>
           <a:effectLst/>
         </p:spPr>
@@ -8200,43 +9393,137 @@
           </a:fontRef>
         </p:style>
         <p:txBody>
-          <a:bodyPr rtlCol="0" anchor="ctr" wrap="none" lIns="25400" rIns="25400" tIns="0" bIns="0"/>
+          <a:bodyPr rtlCol="0" anchor="ctr" wrap="square"/>
           <a:lstStyle/>
           <a:p>
             <a:pPr algn="ctr"/>
-            <a:r>
-              <a:rPr sz="850" b="0">
-                <a:solidFill>
-                  <a:srgbClr val="CFC9EE"/>
+          </a:p>
+        </p:txBody>
+      </p:sp>
+      <p:sp>
+        <p:nvSpPr>
+          <p:cNvPr id="17" name="TextBox 16"/>
+          <p:cNvSpPr txBox="1"/>
+          <p:nvPr/>
+        </p:nvSpPr>
+        <p:spPr>
+          <a:xfrm>
+            <a:off x="8133892" y="1956816"/>
+            <a:ext cx="3527450" cy="698500"/>
+          </a:xfrm>
+          <a:prstGeom prst="rect">
+            <a:avLst/>
+          </a:prstGeom>
+          <a:noFill/>
+        </p:spPr>
+        <p:txBody>
+          <a:bodyPr wrap="square" anchor="t" lIns="0" rIns="0" tIns="0" bIns="0">
+            <a:spAutoFit/>
+          </a:bodyPr>
+          <a:lstStyle/>
+          <a:p>
+            <a:pPr algn="l"/>
+            <a:r>
+              <a:rPr sz="4400" b="0" i="0">
+                <a:solidFill>
+                  <a:srgbClr val="5B3FD6"/>
+                </a:solidFill>
+                <a:latin typeface="Georgia"/>
+              </a:rPr>
+              <a:t>4.14x</a:t>
+            </a:r>
+          </a:p>
+        </p:txBody>
+      </p:sp>
+      <p:sp>
+        <p:nvSpPr>
+          <p:cNvPr id="18" name="TextBox 17"/>
+          <p:cNvSpPr txBox="1"/>
+          <p:nvPr/>
+        </p:nvSpPr>
+        <p:spPr>
+          <a:xfrm>
+            <a:off x="8133892" y="2691892"/>
+            <a:ext cx="3527450" cy="168656"/>
+          </a:xfrm>
+          <a:prstGeom prst="rect">
+            <a:avLst/>
+          </a:prstGeom>
+          <a:noFill/>
+        </p:spPr>
+        <p:txBody>
+          <a:bodyPr wrap="square" anchor="t" lIns="0" rIns="0" tIns="0" bIns="0">
+            <a:spAutoFit/>
+          </a:bodyPr>
+          <a:lstStyle/>
+          <a:p>
+            <a:pPr algn="l"/>
+            <a:r>
+              <a:rPr sz="800" b="1" i="0" spc="250">
+                <a:solidFill>
+                  <a:srgbClr val="1A0F5C"/>
                 </a:solidFill>
                 <a:latin typeface="Calibri"/>
               </a:rPr>
-              <a:t>Monthly against weekly on today's data</a:t>
-            </a:r>
-          </a:p>
-        </p:txBody>
-      </p:sp>
-      <p:sp>
-        <p:nvSpPr>
-          <p:cNvPr id="12" name="Rounded Rectangle 11"/>
+              <a:t>SPEND AT Q6</a:t>
+            </a:r>
+          </a:p>
+        </p:txBody>
+      </p:sp>
+      <p:sp>
+        <p:nvSpPr>
+          <p:cNvPr id="19" name="TextBox 18"/>
+          <p:cNvSpPr txBox="1"/>
+          <p:nvPr/>
+        </p:nvSpPr>
+        <p:spPr>
+          <a:xfrm>
+            <a:off x="8133892" y="2893060"/>
+            <a:ext cx="3527450" cy="350266"/>
+          </a:xfrm>
+          <a:prstGeom prst="rect">
+            <a:avLst/>
+          </a:prstGeom>
+          <a:noFill/>
+        </p:spPr>
+        <p:txBody>
+          <a:bodyPr wrap="square" anchor="t" lIns="0" rIns="0" tIns="0" bIns="0">
+            <a:spAutoFit/>
+          </a:bodyPr>
+          <a:lstStyle/>
+          <a:p>
+            <a:pPr algn="l"/>
+            <a:r>
+              <a:rPr sz="950" b="0" i="0">
+                <a:solidFill>
+                  <a:srgbClr val="6B6690"/>
+                </a:solidFill>
+                <a:latin typeface="Calibri"/>
+              </a:rPr>
+              <a:t>the Q4 FY24 cohort's spend in its sixth quarter against its first</a:t>
+            </a:r>
+          </a:p>
+        </p:txBody>
+      </p:sp>
+      <p:sp>
+        <p:nvSpPr>
+          <p:cNvPr id="20" name="Rectangle 19"/>
           <p:cNvSpPr/>
           <p:nvPr/>
         </p:nvSpPr>
         <p:spPr>
           <a:xfrm>
-            <a:off x="5182839" y="5074920"/>
-            <a:ext cx="2148840" cy="310896"/>
-          </a:xfrm>
-          <a:prstGeom prst="roundRect">
-            <a:avLst>
-              <a:gd name="adj" fmla="val 50000"/>
-            </a:avLst>
-          </a:prstGeom>
-          <a:noFill/>
-          <a:ln w="9525">
-            <a:solidFill>
-              <a:srgbClr val="CFC9EE"/>
-            </a:solidFill>
+            <a:off x="8133892" y="3145536"/>
+            <a:ext cx="3527450" cy="10972"/>
+          </a:xfrm>
+          <a:prstGeom prst="rect">
+            <a:avLst/>
+          </a:prstGeom>
+          <a:solidFill>
+            <a:srgbClr val="E4E1F1"/>
+          </a:solidFill>
+          <a:ln>
+            <a:noFill/>
           </a:ln>
           <a:effectLst/>
         </p:spPr>
@@ -8255,43 +9542,71 @@
           </a:fontRef>
         </p:style>
         <p:txBody>
-          <a:bodyPr rtlCol="0" anchor="ctr" wrap="none" lIns="25400" rIns="25400" tIns="0" bIns="0"/>
+          <a:bodyPr rtlCol="0" anchor="ctr" wrap="square"/>
           <a:lstStyle/>
           <a:p>
             <a:pPr algn="ctr"/>
-            <a:r>
-              <a:rPr sz="850" b="0">
-                <a:solidFill>
-                  <a:srgbClr val="CFC9EE"/>
+          </a:p>
+        </p:txBody>
+      </p:sp>
+      <p:sp>
+        <p:nvSpPr>
+          <p:cNvPr id="21" name="TextBox 20"/>
+          <p:cNvSpPr txBox="1"/>
+          <p:nvPr/>
+        </p:nvSpPr>
+        <p:spPr>
+          <a:xfrm>
+            <a:off x="530352" y="3419856"/>
+            <a:ext cx="11130991" cy="1048512"/>
+          </a:xfrm>
+          <a:prstGeom prst="rect">
+            <a:avLst/>
+          </a:prstGeom>
+          <a:noFill/>
+        </p:spPr>
+        <p:txBody>
+          <a:bodyPr wrap="square" anchor="t" lIns="0" rIns="0" tIns="0" bIns="0">
+            <a:spAutoFit/>
+          </a:bodyPr>
+          <a:lstStyle/>
+          <a:p>
+            <a:pPr>
+              <a:spcAft>
+                <a:spcPts val="800"/>
+              </a:spcAft>
+            </a:pPr>
+            <a:r>
+              <a:rPr sz="1600" b="0" i="0">
+                <a:solidFill>
+                  <a:srgbClr val="1A1440"/>
                 </a:solidFill>
                 <a:latin typeface="Calibri"/>
               </a:rPr>
-              <a:t>Zomato's 60 percent rise, kept descriptive</a:t>
-            </a:r>
-          </a:p>
-        </p:txBody>
-      </p:sp>
-      <p:sp>
-        <p:nvSpPr>
-          <p:cNvPr id="13" name="Rounded Rectangle 12"/>
+              <a:t>Swiggy says it used cohort-level levers (minimum order thresholds, free deliveries, new-user coupons) and weaned away users with low expected lifetime value. Sources: Swiggy's Q1 FY27 and Q2 FY26 shareholder letters, each checked 12 October 2026.</a:t>
+            </a:r>
+          </a:p>
+        </p:txBody>
+      </p:sp>
+      <p:sp>
+        <p:nvSpPr>
+          <p:cNvPr id="22" name="Oval 21"/>
           <p:cNvSpPr/>
           <p:nvPr/>
         </p:nvSpPr>
         <p:spPr>
           <a:xfrm>
-            <a:off x="7441407" y="5074920"/>
-            <a:ext cx="661839" cy="310896"/>
-          </a:xfrm>
-          <a:prstGeom prst="roundRect">
-            <a:avLst>
-              <a:gd name="adj" fmla="val 50000"/>
-            </a:avLst>
-          </a:prstGeom>
-          <a:noFill/>
-          <a:ln w="9525">
-            <a:solidFill>
-              <a:srgbClr val="CFC9EE"/>
-            </a:solidFill>
+            <a:off x="530352" y="6492240"/>
+            <a:ext cx="64008" cy="64008"/>
+          </a:xfrm>
+          <a:prstGeom prst="ellipse">
+            <a:avLst/>
+          </a:prstGeom>
+          <a:solidFill>
+            <a:srgbClr val="5B3FD6"/>
+          </a:solidFill>
+          <a:ln>
+            <a:noFill/>
           </a:ln>
           <a:effectLst/>
         </p:spPr>
@@ -8310,32 +9625,23 @@
           </a:fontRef>
         </p:style>
         <p:txBody>
-          <a:bodyPr rtlCol="0" anchor="ctr" wrap="none" lIns="25400" rIns="25400" tIns="0" bIns="0"/>
+          <a:bodyPr rtlCol="0" anchor="ctr" wrap="square"/>
           <a:lstStyle/>
           <a:p>
             <a:pPr algn="ctr"/>
-            <a:r>
-              <a:rPr sz="850" b="0">
-                <a:solidFill>
-                  <a:srgbClr val="CFC9EE"/>
-                </a:solidFill>
-                <a:latin typeface="Calibri"/>
-              </a:rPr>
-              <a:t>Close</a:t>
-            </a:r>
-          </a:p>
-        </p:txBody>
-      </p:sp>
-      <p:sp>
-        <p:nvSpPr>
-          <p:cNvPr id="14" name="TextBox 13"/>
+          </a:p>
+        </p:txBody>
+      </p:sp>
+      <p:sp>
+        <p:nvSpPr>
+          <p:cNvPr id="23" name="TextBox 22"/>
           <p:cNvSpPr txBox="1"/>
           <p:nvPr/>
         </p:nvSpPr>
         <p:spPr>
           <a:xfrm>
-            <a:off x="530352" y="6437376"/>
-            <a:ext cx="9667951" cy="160401"/>
+            <a:off x="640080" y="6437376"/>
+            <a:ext cx="1516475" cy="152146"/>
           </a:xfrm>
           <a:prstGeom prst="rect">
             <a:avLst/>
@@ -8350,27 +9656,71 @@
           <a:p>
             <a:pPr algn="l"/>
             <a:r>
-              <a:rPr sz="750" b="0" i="0">
-                <a:solidFill>
-                  <a:srgbClr val="CFC9EE"/>
+              <a:rPr sz="700" b="1" i="0">
+                <a:solidFill>
+                  <a:srgbClr val="5B3FD6"/>
                 </a:solidFill>
                 <a:latin typeface="Calibri"/>
               </a:rPr>
-              <a:t>Week 4 Day 4 fallback: the weaned-users hour</a:t>
-            </a:r>
-          </a:p>
-        </p:txBody>
-      </p:sp>
-      <p:sp>
-        <p:nvSpPr>
-          <p:cNvPr id="15" name="TextBox 14"/>
+              <a:t>Can weaning lift retention?</a:t>
+            </a:r>
+          </a:p>
+        </p:txBody>
+      </p:sp>
+      <p:sp>
+        <p:nvSpPr>
+          <p:cNvPr id="24" name="Oval 23"/>
+          <p:cNvSpPr/>
+          <p:nvPr/>
+        </p:nvSpPr>
+        <p:spPr>
+          <a:xfrm>
+            <a:off x="2247995" y="6492240"/>
+            <a:ext cx="64008" cy="64008"/>
+          </a:xfrm>
+          <a:prstGeom prst="ellipse">
+            <a:avLst/>
+          </a:prstGeom>
+          <a:solidFill>
+            <a:srgbClr val="CFC9EE"/>
+          </a:solidFill>
+          <a:ln>
+            <a:noFill/>
+          </a:ln>
+          <a:effectLst/>
+        </p:spPr>
+        <p:style>
+          <a:lnRef idx="1">
+            <a:schemeClr val="accent1"/>
+          </a:lnRef>
+          <a:fillRef idx="3">
+            <a:schemeClr val="accent1"/>
+          </a:fillRef>
+          <a:effectRef idx="2">
+            <a:schemeClr val="accent1"/>
+          </a:effectRef>
+          <a:fontRef idx="minor">
+            <a:schemeClr val="lt1"/>
+          </a:fontRef>
+        </p:style>
+        <p:txBody>
+          <a:bodyPr rtlCol="0" anchor="ctr" wrap="square"/>
+          <a:lstStyle/>
+          <a:p>
+            <a:pPr algn="ctr"/>
+          </a:p>
+        </p:txBody>
+      </p:sp>
+      <p:sp>
+        <p:nvSpPr>
+          <p:cNvPr id="25" name="TextBox 24"/>
           <p:cNvSpPr txBox="1"/>
           <p:nvPr/>
         </p:nvSpPr>
         <p:spPr>
           <a:xfrm>
-            <a:off x="10198303" y="6437376"/>
-            <a:ext cx="1463040" cy="160401"/>
+            <a:off x="2357723" y="6437376"/>
+            <a:ext cx="1470469" cy="152146"/>
           </a:xfrm>
           <a:prstGeom prst="rect">
             <a:avLst/>
@@ -8383,15 +9733,208 @@
           </a:bodyPr>
           <a:lstStyle/>
           <a:p>
+            <a:pPr algn="l"/>
+            <a:r>
+              <a:rPr sz="700" b="0" i="0">
+                <a:solidFill>
+                  <a:srgbClr val="6B6690"/>
+                </a:solidFill>
+                <a:latin typeface="Calibri"/>
+              </a:rPr>
+              <a:t>Does a weekly table agree?</a:t>
+            </a:r>
+          </a:p>
+        </p:txBody>
+      </p:sp>
+      <p:sp>
+        <p:nvSpPr>
+          <p:cNvPr id="26" name="Oval 25"/>
+          <p:cNvSpPr/>
+          <p:nvPr/>
+        </p:nvSpPr>
+        <p:spPr>
+          <a:xfrm>
+            <a:off x="3919632" y="6492240"/>
+            <a:ext cx="64008" cy="64008"/>
+          </a:xfrm>
+          <a:prstGeom prst="ellipse">
+            <a:avLst/>
+          </a:prstGeom>
+          <a:solidFill>
+            <a:srgbClr val="CFC9EE"/>
+          </a:solidFill>
+          <a:ln>
+            <a:noFill/>
+          </a:ln>
+          <a:effectLst/>
+        </p:spPr>
+        <p:style>
+          <a:lnRef idx="1">
+            <a:schemeClr val="accent1"/>
+          </a:lnRef>
+          <a:fillRef idx="3">
+            <a:schemeClr val="accent1"/>
+          </a:fillRef>
+          <a:effectRef idx="2">
+            <a:schemeClr val="accent1"/>
+          </a:effectRef>
+          <a:fontRef idx="minor">
+            <a:schemeClr val="lt1"/>
+          </a:fontRef>
+        </p:style>
+        <p:txBody>
+          <a:bodyPr rtlCol="0" anchor="ctr" wrap="square"/>
+          <a:lstStyle/>
+          <a:p>
+            <a:pPr algn="ctr"/>
+          </a:p>
+        </p:txBody>
+      </p:sp>
+      <p:sp>
+        <p:nvSpPr>
+          <p:cNvPr id="27" name="TextBox 26"/>
+          <p:cNvSpPr txBox="1"/>
+          <p:nvPr/>
+        </p:nvSpPr>
+        <p:spPr>
+          <a:xfrm>
+            <a:off x="4029360" y="6437376"/>
+            <a:ext cx="1470469" cy="152146"/>
+          </a:xfrm>
+          <a:prstGeom prst="rect">
+            <a:avLst/>
+          </a:prstGeom>
+          <a:noFill/>
+        </p:spPr>
+        <p:txBody>
+          <a:bodyPr wrap="square" anchor="t" lIns="0" rIns="0" tIns="0" bIns="0">
+            <a:spAutoFit/>
+          </a:bodyPr>
+          <a:lstStyle/>
+          <a:p>
+            <a:pPr algn="l"/>
+            <a:r>
+              <a:rPr sz="700" b="0" i="0">
+                <a:solidFill>
+                  <a:srgbClr val="6B6690"/>
+                </a:solidFill>
+                <a:latin typeface="Calibri"/>
+              </a:rPr>
+              <a:t>Did Gold cause the orders?</a:t>
+            </a:r>
+          </a:p>
+        </p:txBody>
+      </p:sp>
+      <p:sp>
+        <p:nvSpPr>
+          <p:cNvPr id="28" name="Oval 27"/>
+          <p:cNvSpPr/>
+          <p:nvPr/>
+        </p:nvSpPr>
+        <p:spPr>
+          <a:xfrm>
+            <a:off x="5591270" y="6492240"/>
+            <a:ext cx="64008" cy="64008"/>
+          </a:xfrm>
+          <a:prstGeom prst="ellipse">
+            <a:avLst/>
+          </a:prstGeom>
+          <a:solidFill>
+            <a:srgbClr val="CFC9EE"/>
+          </a:solidFill>
+          <a:ln>
+            <a:noFill/>
+          </a:ln>
+          <a:effectLst/>
+        </p:spPr>
+        <p:style>
+          <a:lnRef idx="1">
+            <a:schemeClr val="accent1"/>
+          </a:lnRef>
+          <a:fillRef idx="3">
+            <a:schemeClr val="accent1"/>
+          </a:fillRef>
+          <a:effectRef idx="2">
+            <a:schemeClr val="accent1"/>
+          </a:effectRef>
+          <a:fontRef idx="minor">
+            <a:schemeClr val="lt1"/>
+          </a:fontRef>
+        </p:style>
+        <p:txBody>
+          <a:bodyPr rtlCol="0" anchor="ctr" wrap="square"/>
+          <a:lstStyle/>
+          <a:p>
+            <a:pPr algn="ctr"/>
+          </a:p>
+        </p:txBody>
+      </p:sp>
+      <p:sp>
+        <p:nvSpPr>
+          <p:cNvPr id="29" name="TextBox 28"/>
+          <p:cNvSpPr txBox="1"/>
+          <p:nvPr/>
+        </p:nvSpPr>
+        <p:spPr>
+          <a:xfrm>
+            <a:off x="5700998" y="6437376"/>
+            <a:ext cx="1608486" cy="152146"/>
+          </a:xfrm>
+          <a:prstGeom prst="rect">
+            <a:avLst/>
+          </a:prstGeom>
+          <a:noFill/>
+        </p:spPr>
+        <p:txBody>
+          <a:bodyPr wrap="square" anchor="t" lIns="0" rIns="0" tIns="0" bIns="0">
+            <a:spAutoFit/>
+          </a:bodyPr>
+          <a:lstStyle/>
+          <a:p>
+            <a:pPr algn="l"/>
+            <a:r>
+              <a:rPr sz="700" b="0" i="0">
+                <a:solidFill>
+                  <a:srgbClr val="6B6690"/>
+                </a:solidFill>
+                <a:latin typeface="Calibri"/>
+              </a:rPr>
+              <a:t>Is the app team's stage fine?</a:t>
+            </a:r>
+          </a:p>
+        </p:txBody>
+      </p:sp>
+      <p:sp>
+        <p:nvSpPr>
+          <p:cNvPr id="30" name="TextBox 29"/>
+          <p:cNvSpPr txBox="1"/>
+          <p:nvPr/>
+        </p:nvSpPr>
+        <p:spPr>
+          <a:xfrm>
+            <a:off x="10198303" y="6437376"/>
+            <a:ext cx="1463040" cy="160401"/>
+          </a:xfrm>
+          <a:prstGeom prst="rect">
+            <a:avLst/>
+          </a:prstGeom>
+          <a:noFill/>
+        </p:spPr>
+        <p:txBody>
+          <a:bodyPr wrap="square" anchor="t" lIns="0" rIns="0" tIns="0" bIns="0">
+            <a:spAutoFit/>
+          </a:bodyPr>
+          <a:lstStyle/>
+          <a:p>
             <a:pPr algn="r"/>
             <a:r>
               <a:rPr sz="750" b="0" i="0">
                 <a:solidFill>
-                  <a:srgbClr val="CFC9EE"/>
+                  <a:srgbClr val="6B6690"/>
                 </a:solidFill>
                 <a:latin typeface="Calibri"/>
               </a:rPr>
-              <a:t>2 / 13</a:t>
+              <a:t>S1  ·  2 / 14</a:t>
             </a:r>
           </a:p>
         </p:txBody>
@@ -8562,7 +10105,7 @@
                 </a:solidFill>
                 <a:latin typeface="Calibri"/>
               </a:rPr>
-              <a:t>WEEK 4  ·  DAY 4  ·  KALPA GLOBAL CAPABILITY CENTRE</a:t>
+              <a:t>WEEK 4  ·  DAY 4  ·  THE FALLBACK, IF THE TENTATIVE FACULTY BLOCK SLIPS</a:t>
             </a:r>
           </a:p>
         </p:txBody>
@@ -8597,7 +10140,7 @@
                 </a:solidFill>
                 <a:latin typeface="Georgia"/>
               </a:rPr>
-              <a:t>55 to 61 percent: where does the lift come from.</a:t>
+              <a:t>Drop five weak members, and every column rises</a:t>
             </a:r>
           </a:p>
         </p:txBody>
@@ -8632,7 +10175,7 @@
                 </a:solidFill>
                 <a:latin typeface="Calibri"/>
               </a:rPr>
-              <a:t>What rose, what left, and how does the mix shift show in a cohort chart?</a:t>
+              <a:t>Ten members, five strong and five weak: what happens to each month's rate when the weak five leave (invented)?</a:t>
             </a:r>
           </a:p>
         </p:txBody>
@@ -8647,7 +10190,7 @@
         </p:nvGraphicFramePr>
         <p:xfrm>
           <a:off x="530352" y="1956816"/>
-          <a:ext cx="11130990" cy="1849120"/>
+          <a:ext cx="11130989" cy="1849120"/>
         </p:xfrm>
         <a:graphic>
           <a:graphicData uri="http://schemas.openxmlformats.org/drawingml/2006/table">
@@ -8656,8 +10199,9 @@
                 <a:tableStyleId>{2D5ABB26-0587-4C30-8999-92F81FD0307C}</a:tableStyleId>
               </a:tblPr>
               <a:tblGrid>
-                <a:gridCol w="5156155"/>
-                <a:gridCol w="5974835"/>
+                <a:gridCol w="3078592"/>
+                <a:gridCol w="2351787"/>
+                <a:gridCol w="5700610"/>
               </a:tblGrid>
               <a:tr h="369824">
                 <a:tc>
@@ -8672,7 +10216,7 @@
                           </a:solidFill>
                           <a:latin typeface="Calibri"/>
                         </a:rPr>
-                        <a:t>Fact in R2 (Th3)</a:t>
+                        <a:t>Month</a:t>
                       </a:r>
                     </a:p>
                   </a:txBody>
@@ -8694,7 +10238,29 @@
                           </a:solidFill>
                           <a:latin typeface="Calibri"/>
                         </a:rPr>
-                        <a:t>What the picture shows</a:t>
+                        <a:t>All ten</a:t>
+                      </a:r>
+                    </a:p>
+                  </a:txBody>
+                  <a:tcPr marL="101600" marR="101600" marT="38100" marB="38100" anchor="ctr">
+                    <a:solidFill>
+                      <a:srgbClr val="1A0F5C"/>
+                    </a:solidFill>
+                  </a:tcPr>
+                </a:tc>
+                <a:tc>
+                  <a:txBody>
+                    <a:bodyPr/>
+                    <a:lstStyle/>
+                    <a:p>
+                      <a:r>
+                        <a:rPr sz="1450" b="1" i="0">
+                          <a:solidFill>
+                            <a:srgbClr val="FFFFFF"/>
+                          </a:solidFill>
+                          <a:latin typeface="Calibri"/>
+                        </a:rPr>
+                        <a:t>The strong five only</a:t>
                       </a:r>
                     </a:p>
                   </a:txBody>
@@ -8718,7 +10284,7 @@
                           </a:solidFill>
                           <a:latin typeface="Calibri"/>
                         </a:rPr>
-                        <a:t>MTU up 27.4 percent</a:t>
+                        <a:t>Month one</a:t>
                       </a:r>
                     </a:p>
                   </a:txBody>
@@ -8740,7 +10306,29 @@
                           </a:solidFill>
                           <a:latin typeface="Calibri"/>
                         </a:rPr>
-                        <a:t>More users touched the platform in the quarter</a:t>
+                        <a:t>7 of 10</a:t>
+                      </a:r>
+                    </a:p>
+                  </a:txBody>
+                  <a:tcPr marL="101600" marR="101600" marT="38100" marB="38100" anchor="ctr">
+                    <a:solidFill>
+                      <a:srgbClr val="FFFFFF"/>
+                    </a:solidFill>
+                  </a:tcPr>
+                </a:tc>
+                <a:tc>
+                  <a:txBody>
+                    <a:bodyPr/>
+                    <a:lstStyle/>
+                    <a:p>
+                      <a:r>
+                        <a:rPr sz="1400" b="0" i="0">
+                          <a:solidFill>
+                            <a:srgbClr val="1A1440"/>
+                          </a:solidFill>
+                          <a:latin typeface="Calibri"/>
+                        </a:rPr>
+                        <a:t>5 of 5</a:t>
                       </a:r>
                     </a:p>
                   </a:txBody>
@@ -8764,7 +10352,7 @@
                           </a:solidFill>
                           <a:latin typeface="Calibri"/>
                         </a:rPr>
-                        <a:t>Platform frequency fell 6.3 percent</a:t>
+                        <a:t>Month two</a:t>
                       </a:r>
                     </a:p>
                   </a:txBody>
@@ -8786,7 +10374,29 @@
                           </a:solidFill>
                           <a:latin typeface="Calibri"/>
                         </a:rPr>
-                        <a:t>Each user used it slightly less often</a:t>
+                        <a:t>5 of 10</a:t>
+                      </a:r>
+                    </a:p>
+                  </a:txBody>
+                  <a:tcPr marL="101600" marR="101600" marT="38100" marB="38100" anchor="ctr">
+                    <a:solidFill>
+                      <a:srgbClr val="F4F2FA"/>
+                    </a:solidFill>
+                  </a:tcPr>
+                </a:tc>
+                <a:tc>
+                  <a:txBody>
+                    <a:bodyPr/>
+                    <a:lstStyle/>
+                    <a:p>
+                      <a:r>
+                        <a:rPr sz="1400" b="0" i="0">
+                          <a:solidFill>
+                            <a:srgbClr val="1A1440"/>
+                          </a:solidFill>
+                          <a:latin typeface="Calibri"/>
+                        </a:rPr>
+                        <a:t>5 of 5</a:t>
                       </a:r>
                     </a:p>
                   </a:txBody>
@@ -8810,7 +10420,7 @@
                           </a:solidFill>
                           <a:latin typeface="Calibri"/>
                         </a:rPr>
-                        <a:t>Over four million unprofitable users weaned away</a:t>
+                        <a:t>Month three</a:t>
                       </a:r>
                     </a:p>
                   </a:txBody>
@@ -8832,7 +10442,29 @@
                           </a:solidFill>
                           <a:latin typeface="Calibri"/>
                         </a:rPr>
-                        <a:t>The weakest column of the triangle removed from the base</a:t>
+                        <a:t>4 of 10</a:t>
+                      </a:r>
+                    </a:p>
+                  </a:txBody>
+                  <a:tcPr marL="101600" marR="101600" marT="38100" marB="38100" anchor="ctr">
+                    <a:solidFill>
+                      <a:srgbClr val="FFFFFF"/>
+                    </a:solidFill>
+                  </a:tcPr>
+                </a:tc>
+                <a:tc>
+                  <a:txBody>
+                    <a:bodyPr/>
+                    <a:lstStyle/>
+                    <a:p>
+                      <a:r>
+                        <a:rPr sz="1400" b="0" i="0">
+                          <a:solidFill>
+                            <a:srgbClr val="1A1440"/>
+                          </a:solidFill>
+                          <a:latin typeface="Calibri"/>
+                        </a:rPr>
+                        <a:t>4 of 5</a:t>
                       </a:r>
                     </a:p>
                   </a:txBody>
@@ -8856,7 +10488,7 @@
                           </a:solidFill>
                           <a:latin typeface="Calibri"/>
                         </a:rPr>
-                        <a:t>One-month retention 55 to 61 percent</a:t>
+                        <a:t>Month four</a:t>
                       </a:r>
                     </a:p>
                   </a:txBody>
@@ -8878,7 +10510,29 @@
                           </a:solidFill>
                           <a:latin typeface="Calibri"/>
                         </a:rPr>
-                        <a:t>Blended rate climbed six points</a:t>
+                        <a:t>3 of 10</a:t>
+                      </a:r>
+                    </a:p>
+                  </a:txBody>
+                  <a:tcPr marL="101600" marR="101600" marT="38100" marB="38100" anchor="ctr">
+                    <a:solidFill>
+                      <a:srgbClr val="F4F2FA"/>
+                    </a:solidFill>
+                  </a:tcPr>
+                </a:tc>
+                <a:tc>
+                  <a:txBody>
+                    <a:bodyPr/>
+                    <a:lstStyle/>
+                    <a:p>
+                      <a:r>
+                        <a:rPr sz="1400" b="0" i="0">
+                          <a:solidFill>
+                            <a:srgbClr val="1A1440"/>
+                          </a:solidFill>
+                          <a:latin typeface="Calibri"/>
+                        </a:rPr>
+                        <a:t>3 of 5</a:t>
                       </a:r>
                     </a:p>
                   </a:txBody>
@@ -8927,7 +10581,7 @@
                 </a:solidFill>
                 <a:latin typeface="Calibri"/>
               </a:rPr>
-              <a:t>A lift of six points on blended retention can come from the remaining users ordering more, from the weakest users leaving, or from both. The cohort chart separates the two, which the dashboard does not.</a:t>
+              <a:t>No member changed what she did, and every month's rate rose: 70 to 100, 50 to 100, 40 to 80, 30 to 60 percent. A retention rise after a weaning is partly the mix of who remains.</a:t>
             </a:r>
           </a:p>
         </p:txBody>
@@ -8985,7 +10639,7 @@
         <p:spPr>
           <a:xfrm>
             <a:off x="640080" y="6437376"/>
-            <a:ext cx="1608486" cy="152146"/>
+            <a:ext cx="1516475" cy="152146"/>
           </a:xfrm>
           <a:prstGeom prst="rect">
             <a:avLst/>
@@ -9006,7 +10660,7 @@
                 </a:solidFill>
                 <a:latin typeface="Calibri"/>
               </a:rPr>
-              <a:t>Weaned users and the mix move</a:t>
+              <a:t>Can weaning lift retention?</a:t>
             </a:r>
           </a:p>
         </p:txBody>
@@ -9019,7 +10673,7 @@
         </p:nvSpPr>
         <p:spPr>
           <a:xfrm>
-            <a:off x="2340006" y="6492240"/>
+            <a:off x="2247995" y="6492240"/>
             <a:ext cx="64008" cy="64008"/>
           </a:xfrm>
           <a:prstGeom prst="ellipse">
@@ -9063,8 +10717,8 @@
         </p:nvSpPr>
         <p:spPr>
           <a:xfrm>
-            <a:off x="2449734" y="6437376"/>
-            <a:ext cx="2022538" cy="152146"/>
+            <a:off x="2357723" y="6437376"/>
+            <a:ext cx="1470469" cy="152146"/>
           </a:xfrm>
           <a:prstGeom prst="rect">
             <a:avLst/>
@@ -9085,7 +10739,7 @@
                 </a:solidFill>
                 <a:latin typeface="Calibri"/>
               </a:rPr>
-              <a:t>Monthly against weekly on today's data</a:t>
+              <a:t>Does a weekly table agree?</a:t>
             </a:r>
           </a:p>
         </p:txBody>
@@ -9098,7 +10752,7 @@
         </p:nvSpPr>
         <p:spPr>
           <a:xfrm>
-            <a:off x="4563713" y="6492240"/>
+            <a:off x="3919632" y="6492240"/>
             <a:ext cx="64008" cy="64008"/>
           </a:xfrm>
           <a:prstGeom prst="ellipse">
@@ -9142,8 +10796,8 @@
         </p:nvSpPr>
         <p:spPr>
           <a:xfrm>
-            <a:off x="4673441" y="6437376"/>
-            <a:ext cx="2194560" cy="152146"/>
+            <a:off x="4029360" y="6437376"/>
+            <a:ext cx="1470469" cy="152146"/>
           </a:xfrm>
           <a:prstGeom prst="rect">
             <a:avLst/>
@@ -9164,7 +10818,7 @@
                 </a:solidFill>
                 <a:latin typeface="Calibri"/>
               </a:rPr>
-              <a:t>Zomato's 60 percent rise, kept descriptive</a:t>
+              <a:t>Did Gold cause the orders?</a:t>
             </a:r>
           </a:p>
         </p:txBody>
@@ -9177,7 +10831,7 @@
         </p:nvSpPr>
         <p:spPr>
           <a:xfrm>
-            <a:off x="6959441" y="6492240"/>
+            <a:off x="5591270" y="6492240"/>
             <a:ext cx="64008" cy="64008"/>
           </a:xfrm>
           <a:prstGeom prst="ellipse">
@@ -9221,8 +10875,8 @@
         </p:nvSpPr>
         <p:spPr>
           <a:xfrm>
-            <a:off x="7069169" y="6437376"/>
-            <a:ext cx="504348" cy="152146"/>
+            <a:off x="5700998" y="6437376"/>
+            <a:ext cx="1608486" cy="152146"/>
           </a:xfrm>
           <a:prstGeom prst="rect">
             <a:avLst/>
@@ -9243,7 +10897,7 @@
                 </a:solidFill>
                 <a:latin typeface="Calibri"/>
               </a:rPr>
-              <a:t>Close</a:t>
+              <a:t>Is the app team's stage fine?</a:t>
             </a:r>
           </a:p>
         </p:txBody>
@@ -9278,7 +10932,7 @@
                 </a:solidFill>
                 <a:latin typeface="Calibri"/>
               </a:rPr>
-              <a:t>S1  ·  3 / 13</a:t>
+              <a:t>S2  ·  3 / 14</a:t>
             </a:r>
           </a:p>
         </p:txBody>
@@ -9449,7 +11103,7 @@
                 </a:solidFill>
                 <a:latin typeface="Calibri"/>
               </a:rPr>
-              <a:t>WEEK 4  ·  DAY 4  ·  KALPA GLOBAL CAPABILITY CENTRE</a:t>
+              <a:t>WEEK 4  ·  DAY 4  ·  THE FALLBACK, IF THE TENTATIVE FACULTY BLOCK SLIPS</a:t>
             </a:r>
           </a:p>
         </p:txBody>
@@ -9484,7 +11138,7 @@
                 </a:solidFill>
                 <a:latin typeface="Georgia"/>
               </a:rPr>
-              <a:t>Five weak users leave, every column reads higher</a:t>
+              <a:t>Three denominators give three different charts</a:t>
             </a:r>
           </a:p>
         </p:txBody>
@@ -9519,14 +11173,14 @@
                 </a:solidFill>
                 <a:latin typeface="Calibri"/>
               </a:rPr>
-              <a:t>Ten members, five weak and five strong; drop the five weak and the mean rises on every month.</a:t>
+              <a:t>Which denominator does a published cohort chart use, and what would the others say?</a:t>
             </a:r>
           </a:p>
         </p:txBody>
       </p:sp>
       <p:pic>
         <p:nvPicPr>
-          <p:cNvPr id="9" name="mermaid diagram" descr="04d02a300949687b.png"/>
+          <p:cNvPr id="9" name="mermaid diagram" descr="c88584e5f6a98df8.png"/>
           <p:cNvPicPr>
             <a:picLocks noChangeAspect="1"/>
           </p:cNvPicPr>
@@ -9540,391 +11194,24 @@
         </p:blipFill>
         <p:spPr>
           <a:xfrm>
-            <a:off x="530352" y="1682496"/>
-            <a:ext cx="5291175" cy="1754139"/>
+            <a:off x="1773878" y="1956816"/>
+            <a:ext cx="8643937" cy="2271712"/>
           </a:xfrm>
           <a:prstGeom prst="rect">
             <a:avLst/>
           </a:prstGeom>
         </p:spPr>
       </p:pic>
-      <p:graphicFrame>
-        <p:nvGraphicFramePr>
-          <p:cNvPr id="10" name="Table 9"/>
-          <p:cNvGraphicFramePr>
-            <a:graphicFrameLocks noGrp="1"/>
-          </p:cNvGraphicFramePr>
-          <p:nvPr/>
-        </p:nvGraphicFramePr>
-        <p:xfrm>
-          <a:off x="530352" y="3582939"/>
-          <a:ext cx="5291174" cy="1554480"/>
-        </p:xfrm>
-        <a:graphic>
-          <a:graphicData uri="http://schemas.openxmlformats.org/drawingml/2006/table">
-            <a:tbl>
-              <a:tblPr firstRow="0" bandRow="0">
-                <a:tableStyleId>{2D5ABB26-0587-4C30-8999-92F81FD0307C}</a:tableStyleId>
-              </a:tblPr>
-              <a:tblGrid>
-                <a:gridCol w="914400"/>
-                <a:gridCol w="1804370"/>
-                <a:gridCol w="2572404"/>
-              </a:tblGrid>
-              <a:tr h="310896">
-                <a:tc>
-                  <a:txBody>
-                    <a:bodyPr/>
-                    <a:lstStyle/>
-                    <a:p>
-                      <a:r>
-                        <a:rPr sz="950" b="1" i="0">
-                          <a:solidFill>
-                            <a:srgbClr val="FFFFFF"/>
-                          </a:solidFill>
-                          <a:latin typeface="Calibri"/>
-                        </a:rPr>
-                        <a:t>Month</a:t>
-                      </a:r>
-                    </a:p>
-                  </a:txBody>
-                  <a:tcPr marL="101600" marR="101600" marT="38100" marB="38100" anchor="ctr">
-                    <a:solidFill>
-                      <a:srgbClr val="1A0F5C"/>
-                    </a:solidFill>
-                  </a:tcPr>
-                </a:tc>
-                <a:tc>
-                  <a:txBody>
-                    <a:bodyPr/>
-                    <a:lstStyle/>
-                    <a:p>
-                      <a:r>
-                        <a:rPr sz="950" b="1" i="0">
-                          <a:solidFill>
-                            <a:srgbClr val="FFFFFF"/>
-                          </a:solidFill>
-                          <a:latin typeface="Calibri"/>
-                        </a:rPr>
-                        <a:t>All ten</a:t>
-                      </a:r>
-                    </a:p>
-                  </a:txBody>
-                  <a:tcPr marL="101600" marR="101600" marT="38100" marB="38100" anchor="ctr">
-                    <a:solidFill>
-                      <a:srgbClr val="1A0F5C"/>
-                    </a:solidFill>
-                  </a:tcPr>
-                </a:tc>
-                <a:tc>
-                  <a:txBody>
-                    <a:bodyPr/>
-                    <a:lstStyle/>
-                    <a:p>
-                      <a:r>
-                        <a:rPr sz="950" b="1" i="0">
-                          <a:solidFill>
-                            <a:srgbClr val="FFFFFF"/>
-                          </a:solidFill>
-                          <a:latin typeface="Calibri"/>
-                        </a:rPr>
-                        <a:t>Only the strong five</a:t>
-                      </a:r>
-                    </a:p>
-                  </a:txBody>
-                  <a:tcPr marL="101600" marR="101600" marT="38100" marB="38100" anchor="ctr">
-                    <a:solidFill>
-                      <a:srgbClr val="1A0F5C"/>
-                    </a:solidFill>
-                  </a:tcPr>
-                </a:tc>
-              </a:tr>
-              <a:tr h="310896">
-                <a:tc>
-                  <a:txBody>
-                    <a:bodyPr/>
-                    <a:lstStyle/>
-                    <a:p>
-                      <a:r>
-                        <a:rPr sz="900" b="0" i="0">
-                          <a:solidFill>
-                            <a:srgbClr val="1A1440"/>
-                          </a:solidFill>
-                          <a:latin typeface="Calibri"/>
-                        </a:rPr>
-                        <a:t>m1</a:t>
-                      </a:r>
-                    </a:p>
-                  </a:txBody>
-                  <a:tcPr marL="101600" marR="101600" marT="38100" marB="38100" anchor="ctr">
-                    <a:solidFill>
-                      <a:srgbClr val="FFFFFF"/>
-                    </a:solidFill>
-                  </a:tcPr>
-                </a:tc>
-                <a:tc>
-                  <a:txBody>
-                    <a:bodyPr/>
-                    <a:lstStyle/>
-                    <a:p>
-                      <a:r>
-                        <a:rPr sz="900" b="0" i="0">
-                          <a:solidFill>
-                            <a:srgbClr val="1A1440"/>
-                          </a:solidFill>
-                          <a:latin typeface="Calibri"/>
-                        </a:rPr>
-                        <a:t>7 of 10 ordered</a:t>
-                      </a:r>
-                    </a:p>
-                  </a:txBody>
-                  <a:tcPr marL="101600" marR="101600" marT="38100" marB="38100" anchor="ctr">
-                    <a:solidFill>
-                      <a:srgbClr val="FFFFFF"/>
-                    </a:solidFill>
-                  </a:tcPr>
-                </a:tc>
-                <a:tc>
-                  <a:txBody>
-                    <a:bodyPr/>
-                    <a:lstStyle/>
-                    <a:p>
-                      <a:r>
-                        <a:rPr sz="900" b="0" i="0">
-                          <a:solidFill>
-                            <a:srgbClr val="1A1440"/>
-                          </a:solidFill>
-                          <a:latin typeface="Calibri"/>
-                        </a:rPr>
-                        <a:t>5 of 5 ordered</a:t>
-                      </a:r>
-                    </a:p>
-                  </a:txBody>
-                  <a:tcPr marL="101600" marR="101600" marT="38100" marB="38100" anchor="ctr">
-                    <a:solidFill>
-                      <a:srgbClr val="FFFFFF"/>
-                    </a:solidFill>
-                  </a:tcPr>
-                </a:tc>
-              </a:tr>
-              <a:tr h="310896">
-                <a:tc>
-                  <a:txBody>
-                    <a:bodyPr/>
-                    <a:lstStyle/>
-                    <a:p>
-                      <a:r>
-                        <a:rPr sz="900" b="0" i="0">
-                          <a:solidFill>
-                            <a:srgbClr val="1A1440"/>
-                          </a:solidFill>
-                          <a:latin typeface="Calibri"/>
-                        </a:rPr>
-                        <a:t>m2</a:t>
-                      </a:r>
-                    </a:p>
-                  </a:txBody>
-                  <a:tcPr marL="101600" marR="101600" marT="38100" marB="38100" anchor="ctr">
-                    <a:solidFill>
-                      <a:srgbClr val="F4F2FA"/>
-                    </a:solidFill>
-                  </a:tcPr>
-                </a:tc>
-                <a:tc>
-                  <a:txBody>
-                    <a:bodyPr/>
-                    <a:lstStyle/>
-                    <a:p>
-                      <a:r>
-                        <a:rPr sz="900" b="0" i="0">
-                          <a:solidFill>
-                            <a:srgbClr val="1A1440"/>
-                          </a:solidFill>
-                          <a:latin typeface="Calibri"/>
-                        </a:rPr>
-                        <a:t>5 of 10 ordered</a:t>
-                      </a:r>
-                    </a:p>
-                  </a:txBody>
-                  <a:tcPr marL="101600" marR="101600" marT="38100" marB="38100" anchor="ctr">
-                    <a:solidFill>
-                      <a:srgbClr val="F4F2FA"/>
-                    </a:solidFill>
-                  </a:tcPr>
-                </a:tc>
-                <a:tc>
-                  <a:txBody>
-                    <a:bodyPr/>
-                    <a:lstStyle/>
-                    <a:p>
-                      <a:r>
-                        <a:rPr sz="900" b="0" i="0">
-                          <a:solidFill>
-                            <a:srgbClr val="1A1440"/>
-                          </a:solidFill>
-                          <a:latin typeface="Calibri"/>
-                        </a:rPr>
-                        <a:t>5 of 5 ordered</a:t>
-                      </a:r>
-                    </a:p>
-                  </a:txBody>
-                  <a:tcPr marL="101600" marR="101600" marT="38100" marB="38100" anchor="ctr">
-                    <a:solidFill>
-                      <a:srgbClr val="F4F2FA"/>
-                    </a:solidFill>
-                  </a:tcPr>
-                </a:tc>
-              </a:tr>
-              <a:tr h="310896">
-                <a:tc>
-                  <a:txBody>
-                    <a:bodyPr/>
-                    <a:lstStyle/>
-                    <a:p>
-                      <a:r>
-                        <a:rPr sz="900" b="0" i="0">
-                          <a:solidFill>
-                            <a:srgbClr val="1A1440"/>
-                          </a:solidFill>
-                          <a:latin typeface="Calibri"/>
-                        </a:rPr>
-                        <a:t>m3</a:t>
-                      </a:r>
-                    </a:p>
-                  </a:txBody>
-                  <a:tcPr marL="101600" marR="101600" marT="38100" marB="38100" anchor="ctr">
-                    <a:solidFill>
-                      <a:srgbClr val="FFFFFF"/>
-                    </a:solidFill>
-                  </a:tcPr>
-                </a:tc>
-                <a:tc>
-                  <a:txBody>
-                    <a:bodyPr/>
-                    <a:lstStyle/>
-                    <a:p>
-                      <a:r>
-                        <a:rPr sz="900" b="0" i="0">
-                          <a:solidFill>
-                            <a:srgbClr val="1A1440"/>
-                          </a:solidFill>
-                          <a:latin typeface="Calibri"/>
-                        </a:rPr>
-                        <a:t>4 of 10 ordered</a:t>
-                      </a:r>
-                    </a:p>
-                  </a:txBody>
-                  <a:tcPr marL="101600" marR="101600" marT="38100" marB="38100" anchor="ctr">
-                    <a:solidFill>
-                      <a:srgbClr val="FFFFFF"/>
-                    </a:solidFill>
-                  </a:tcPr>
-                </a:tc>
-                <a:tc>
-                  <a:txBody>
-                    <a:bodyPr/>
-                    <a:lstStyle/>
-                    <a:p>
-                      <a:r>
-                        <a:rPr sz="900" b="0" i="0">
-                          <a:solidFill>
-                            <a:srgbClr val="1A1440"/>
-                          </a:solidFill>
-                          <a:latin typeface="Calibri"/>
-                        </a:rPr>
-                        <a:t>4 of 5 ordered</a:t>
-                      </a:r>
-                    </a:p>
-                  </a:txBody>
-                  <a:tcPr marL="101600" marR="101600" marT="38100" marB="38100" anchor="ctr">
-                    <a:solidFill>
-                      <a:srgbClr val="FFFFFF"/>
-                    </a:solidFill>
-                  </a:tcPr>
-                </a:tc>
-              </a:tr>
-              <a:tr h="310896">
-                <a:tc>
-                  <a:txBody>
-                    <a:bodyPr/>
-                    <a:lstStyle/>
-                    <a:p>
-                      <a:r>
-                        <a:rPr sz="900" b="0" i="0">
-                          <a:solidFill>
-                            <a:srgbClr val="1A1440"/>
-                          </a:solidFill>
-                          <a:latin typeface="Calibri"/>
-                        </a:rPr>
-                        <a:t>m4</a:t>
-                      </a:r>
-                    </a:p>
-                  </a:txBody>
-                  <a:tcPr marL="101600" marR="101600" marT="38100" marB="38100" anchor="ctr">
-                    <a:solidFill>
-                      <a:srgbClr val="F4F2FA"/>
-                    </a:solidFill>
-                  </a:tcPr>
-                </a:tc>
-                <a:tc>
-                  <a:txBody>
-                    <a:bodyPr/>
-                    <a:lstStyle/>
-                    <a:p>
-                      <a:r>
-                        <a:rPr sz="900" b="0" i="0">
-                          <a:solidFill>
-                            <a:srgbClr val="1A1440"/>
-                          </a:solidFill>
-                          <a:latin typeface="Calibri"/>
-                        </a:rPr>
-                        <a:t>3 of 10 ordered</a:t>
-                      </a:r>
-                    </a:p>
-                  </a:txBody>
-                  <a:tcPr marL="101600" marR="101600" marT="38100" marB="38100" anchor="ctr">
-                    <a:solidFill>
-                      <a:srgbClr val="F4F2FA"/>
-                    </a:solidFill>
-                  </a:tcPr>
-                </a:tc>
-                <a:tc>
-                  <a:txBody>
-                    <a:bodyPr/>
-                    <a:lstStyle/>
-                    <a:p>
-                      <a:r>
-                        <a:rPr sz="900" b="0" i="0">
-                          <a:solidFill>
-                            <a:srgbClr val="1A1440"/>
-                          </a:solidFill>
-                          <a:latin typeface="Calibri"/>
-                        </a:rPr>
-                        <a:t>3 of 5 ordered</a:t>
-                      </a:r>
-                    </a:p>
-                  </a:txBody>
-                  <a:tcPr marL="101600" marR="101600" marT="38100" marB="38100" anchor="ctr">
-                    <a:solidFill>
-                      <a:srgbClr val="F4F2FA"/>
-                    </a:solidFill>
-                  </a:tcPr>
-                </a:tc>
-              </a:tr>
-            </a:tbl>
-          </a:graphicData>
-        </a:graphic>
-      </p:graphicFrame>
-      <p:sp>
-        <p:nvSpPr>
-          <p:cNvPr id="11" name="TextBox 10"/>
+      <p:sp>
+        <p:nvSpPr>
+          <p:cNvPr id="10" name="TextBox 9"/>
           <p:cNvSpPr txBox="1"/>
           <p:nvPr/>
         </p:nvSpPr>
         <p:spPr>
           <a:xfrm>
-            <a:off x="6370167" y="1682496"/>
-            <a:ext cx="5291175" cy="1324864"/>
+            <a:off x="530352" y="4374832"/>
+            <a:ext cx="11130991" cy="1048512"/>
           </a:xfrm>
           <a:prstGeom prst="rect">
             <a:avLst/>
@@ -9949,14 +11236,14 @@
                 </a:solidFill>
                 <a:latin typeface="Calibri"/>
               </a:rPr>
-              <a:t>Drop the five weak members and every cell rises without a single member changing behaviour. The lift is a composition effect, which the triangle makes visible and the dashboard hides.</a:t>
-            </a:r>
-          </a:p>
-        </p:txBody>
-      </p:sp>
-      <p:sp>
-        <p:nvSpPr>
-          <p:cNvPr id="12" name="Oval 11"/>
+              <a:t>A cohort chart without its denominator is a shape. Swiggy's table is indexed to its Q4 FY24 cohort's first quarter, and calls the groups "retained user cohorts": the first thing to ask is who stays in the count.</a:t>
+            </a:r>
+          </a:p>
+        </p:txBody>
+      </p:sp>
+      <p:sp>
+        <p:nvSpPr>
+          <p:cNvPr id="11" name="Oval 10"/>
           <p:cNvSpPr/>
           <p:nvPr/>
         </p:nvSpPr>
@@ -10000,14 +11287,14 @@
       </p:sp>
       <p:sp>
         <p:nvSpPr>
-          <p:cNvPr id="13" name="TextBox 12"/>
+          <p:cNvPr id="12" name="TextBox 11"/>
           <p:cNvSpPr txBox="1"/>
           <p:nvPr/>
         </p:nvSpPr>
         <p:spPr>
           <a:xfrm>
             <a:off x="640080" y="6437376"/>
-            <a:ext cx="1608486" cy="152146"/>
+            <a:ext cx="1516475" cy="152146"/>
           </a:xfrm>
           <a:prstGeom prst="rect">
             <a:avLst/>
@@ -10028,20 +11315,20 @@
                 </a:solidFill>
                 <a:latin typeface="Calibri"/>
               </a:rPr>
-              <a:t>Weaned users and the mix move</a:t>
-            </a:r>
-          </a:p>
-        </p:txBody>
-      </p:sp>
-      <p:sp>
-        <p:nvSpPr>
-          <p:cNvPr id="14" name="Oval 13"/>
+              <a:t>Can weaning lift retention?</a:t>
+            </a:r>
+          </a:p>
+        </p:txBody>
+      </p:sp>
+      <p:sp>
+        <p:nvSpPr>
+          <p:cNvPr id="13" name="Oval 12"/>
           <p:cNvSpPr/>
           <p:nvPr/>
         </p:nvSpPr>
         <p:spPr>
           <a:xfrm>
-            <a:off x="2340006" y="6492240"/>
+            <a:off x="2247995" y="6492240"/>
             <a:ext cx="64008" cy="64008"/>
           </a:xfrm>
           <a:prstGeom prst="ellipse">
@@ -10079,14 +11366,14 @@
       </p:sp>
       <p:sp>
         <p:nvSpPr>
-          <p:cNvPr id="15" name="TextBox 14"/>
+          <p:cNvPr id="14" name="TextBox 13"/>
           <p:cNvSpPr txBox="1"/>
           <p:nvPr/>
         </p:nvSpPr>
         <p:spPr>
           <a:xfrm>
-            <a:off x="2449734" y="6437376"/>
-            <a:ext cx="2022538" cy="152146"/>
+            <a:off x="2357723" y="6437376"/>
+            <a:ext cx="1470469" cy="152146"/>
           </a:xfrm>
           <a:prstGeom prst="rect">
             <a:avLst/>
@@ -10107,20 +11394,20 @@
                 </a:solidFill>
                 <a:latin typeface="Calibri"/>
               </a:rPr>
-              <a:t>Monthly against weekly on today's data</a:t>
-            </a:r>
-          </a:p>
-        </p:txBody>
-      </p:sp>
-      <p:sp>
-        <p:nvSpPr>
-          <p:cNvPr id="16" name="Oval 15"/>
+              <a:t>Does a weekly table agree?</a:t>
+            </a:r>
+          </a:p>
+        </p:txBody>
+      </p:sp>
+      <p:sp>
+        <p:nvSpPr>
+          <p:cNvPr id="15" name="Oval 14"/>
           <p:cNvSpPr/>
           <p:nvPr/>
         </p:nvSpPr>
         <p:spPr>
           <a:xfrm>
-            <a:off x="4563713" y="6492240"/>
+            <a:off x="3919632" y="6492240"/>
             <a:ext cx="64008" cy="64008"/>
           </a:xfrm>
           <a:prstGeom prst="ellipse">
@@ -10158,14 +11445,14 @@
       </p:sp>
       <p:sp>
         <p:nvSpPr>
-          <p:cNvPr id="17" name="TextBox 16"/>
+          <p:cNvPr id="16" name="TextBox 15"/>
           <p:cNvSpPr txBox="1"/>
           <p:nvPr/>
         </p:nvSpPr>
         <p:spPr>
           <a:xfrm>
-            <a:off x="4673441" y="6437376"/>
-            <a:ext cx="2194560" cy="152146"/>
+            <a:off x="4029360" y="6437376"/>
+            <a:ext cx="1470469" cy="152146"/>
           </a:xfrm>
           <a:prstGeom prst="rect">
             <a:avLst/>
@@ -10186,20 +11473,20 @@
                 </a:solidFill>
                 <a:latin typeface="Calibri"/>
               </a:rPr>
-              <a:t>Zomato's 60 percent rise, kept descriptive</a:t>
-            </a:r>
-          </a:p>
-        </p:txBody>
-      </p:sp>
-      <p:sp>
-        <p:nvSpPr>
-          <p:cNvPr id="18" name="Oval 17"/>
+              <a:t>Did Gold cause the orders?</a:t>
+            </a:r>
+          </a:p>
+        </p:txBody>
+      </p:sp>
+      <p:sp>
+        <p:nvSpPr>
+          <p:cNvPr id="17" name="Oval 16"/>
           <p:cNvSpPr/>
           <p:nvPr/>
         </p:nvSpPr>
         <p:spPr>
           <a:xfrm>
-            <a:off x="6959441" y="6492240"/>
+            <a:off x="5591270" y="6492240"/>
             <a:ext cx="64008" cy="64008"/>
           </a:xfrm>
           <a:prstGeom prst="ellipse">
@@ -10237,14 +11524,14 @@
       </p:sp>
       <p:sp>
         <p:nvSpPr>
-          <p:cNvPr id="19" name="TextBox 18"/>
+          <p:cNvPr id="18" name="TextBox 17"/>
           <p:cNvSpPr txBox="1"/>
           <p:nvPr/>
         </p:nvSpPr>
         <p:spPr>
           <a:xfrm>
-            <a:off x="7069169" y="6437376"/>
-            <a:ext cx="504348" cy="152146"/>
+            <a:off x="5700998" y="6437376"/>
+            <a:ext cx="1608486" cy="152146"/>
           </a:xfrm>
           <a:prstGeom prst="rect">
             <a:avLst/>
@@ -10265,14 +11552,14 @@
                 </a:solidFill>
                 <a:latin typeface="Calibri"/>
               </a:rPr>
-              <a:t>Close</a:t>
-            </a:r>
-          </a:p>
-        </p:txBody>
-      </p:sp>
-      <p:sp>
-        <p:nvSpPr>
-          <p:cNvPr id="20" name="TextBox 19"/>
+              <a:t>Is the app team's stage fine?</a:t>
+            </a:r>
+          </a:p>
+        </p:txBody>
+      </p:sp>
+      <p:sp>
+        <p:nvSpPr>
+          <p:cNvPr id="19" name="TextBox 18"/>
           <p:cNvSpPr txBox="1"/>
           <p:nvPr/>
         </p:nvSpPr>
@@ -10300,7 +11587,7 @@
                 </a:solidFill>
                 <a:latin typeface="Calibri"/>
               </a:rPr>
-              <a:t>S2  ·  4 / 13</a:t>
+              <a:t>S3  ·  4 / 14</a:t>
             </a:r>
           </a:p>
         </p:txBody>
@@ -10325,7 +11612,7 @@
       <p:grpSpPr/>
       <p:pic>
         <p:nvPicPr>
-          <p:cNvPr id="2" name="Picture 1" descr="bg_light.jpg"/>
+          <p:cNvPr id="2" name="Picture 1" descr="bg_dark.jpg"/>
           <p:cNvPicPr>
             <a:picLocks noChangeAspect="1"/>
           </p:cNvPicPr>
@@ -10397,7 +11684,7 @@
             <a:r>
               <a:rPr sz="900" b="1" i="0">
                 <a:solidFill>
-                  <a:srgbClr val="1A0F5C"/>
+                  <a:srgbClr val="FFFFFF"/>
                 </a:solidFill>
                 <a:latin typeface="Calibri"/>
               </a:rPr>
@@ -10432,7 +11719,7 @@
             <a:r>
               <a:rPr sz="550" b="1" i="0" spc="300">
                 <a:solidFill>
-                  <a:srgbClr val="6B6690"/>
+                  <a:srgbClr val="CFC9EE"/>
                 </a:solidFill>
                 <a:latin typeface="Calibri"/>
               </a:rPr>
@@ -10467,11 +11754,11 @@
             <a:r>
               <a:rPr sz="550" b="1" i="0" spc="300">
                 <a:solidFill>
-                  <a:srgbClr val="6B6690"/>
+                  <a:srgbClr val="CFC9EE"/>
                 </a:solidFill>
                 <a:latin typeface="Calibri"/>
               </a:rPr>
-              <a:t>WEEK 4  ·  DAY 4  ·  KALPA GLOBAL CAPABILITY CENTRE</a:t>
+              <a:t>PG DIPLOMA IN AI-ML AND AGENTIC AI ENGINEERING  ·  COHORT 2</a:t>
             </a:r>
           </a:p>
         </p:txBody>
@@ -10484,43 +11771,8 @@
         </p:nvSpPr>
         <p:spPr>
           <a:xfrm>
-            <a:off x="530352" y="676656"/>
-            <a:ext cx="11130991" cy="512064"/>
-          </a:xfrm>
-          <a:prstGeom prst="rect">
-            <a:avLst/>
-          </a:prstGeom>
-          <a:noFill/>
-        </p:spPr>
-        <p:txBody>
-          <a:bodyPr wrap="square" anchor="b" lIns="0" rIns="0" tIns="0" bIns="0">
-            <a:spAutoFit/>
-          </a:bodyPr>
-          <a:lstStyle/>
-          <a:p>
-            <a:pPr algn="l"/>
-            <a:r>
-              <a:rPr sz="2600" b="0" i="0">
-                <a:solidFill>
-                  <a:srgbClr val="1A0F5C"/>
-                </a:solidFill>
-                <a:latin typeface="Georgia"/>
-              </a:rPr>
-              <a:t>The denominator question on Swiggy's triangle</a:t>
-            </a:r>
-          </a:p>
-        </p:txBody>
-      </p:sp>
-      <p:sp>
-        <p:nvSpPr>
-          <p:cNvPr id="8" name="TextBox 7"/>
-          <p:cNvSpPr txBox="1"/>
-          <p:nvPr/>
-        </p:nvSpPr>
-        <p:spPr>
-          <a:xfrm>
-            <a:off x="530352" y="1243584"/>
-            <a:ext cx="11130991" cy="234696"/>
+            <a:off x="731519" y="1143000"/>
+            <a:ext cx="3657600" cy="1371600"/>
           </a:xfrm>
           <a:prstGeom prst="rect">
             <a:avLst/>
@@ -10535,51 +11787,27 @@
           <a:p>
             <a:pPr algn="l"/>
             <a:r>
-              <a:rPr sz="1200" b="0" i="0">
-                <a:solidFill>
-                  <a:srgbClr val="6B6690"/>
-                </a:solidFill>
-                <a:latin typeface="Calibri"/>
-              </a:rPr>
-              <a:t>Which denominator did Swiggy pick, and what would the alternatives have said?</a:t>
-            </a:r>
-          </a:p>
-        </p:txBody>
-      </p:sp>
-      <p:pic>
-        <p:nvPicPr>
-          <p:cNvPr id="9" name="mermaid diagram" descr="a9ec9e189daeaa7c.png"/>
-          <p:cNvPicPr>
-            <a:picLocks noChangeAspect="1"/>
-          </p:cNvPicPr>
-          <p:nvPr/>
-        </p:nvPicPr>
-        <p:blipFill>
-          <a:blip r:embed="rId5"/>
-          <a:stretch>
-            <a:fillRect/>
-          </a:stretch>
-        </p:blipFill>
-        <p:spPr>
-          <a:xfrm>
-            <a:off x="2603224" y="1664208"/>
-            <a:ext cx="6985246" cy="3808984"/>
-          </a:xfrm>
-          <a:prstGeom prst="rect">
-            <a:avLst/>
-          </a:prstGeom>
-        </p:spPr>
-      </p:pic>
-      <p:sp>
-        <p:nvSpPr>
-          <p:cNvPr id="10" name="TextBox 9"/>
+              <a:rPr sz="9600" b="0" i="0">
+                <a:solidFill>
+                  <a:srgbClr val="D9A7FF"/>
+                </a:solidFill>
+                <a:latin typeface="Georgia"/>
+              </a:rPr>
+              <a:t>08</a:t>
+            </a:r>
+          </a:p>
+        </p:txBody>
+      </p:sp>
+      <p:sp>
+        <p:nvSpPr>
+          <p:cNvPr id="8" name="TextBox 7"/>
           <p:cNvSpPr txBox="1"/>
           <p:nvPr/>
         </p:nvSpPr>
         <p:spPr>
           <a:xfrm>
-            <a:off x="530352" y="5518912"/>
-            <a:ext cx="11130991" cy="680720"/>
+            <a:off x="731519" y="2606040"/>
+            <a:ext cx="10673791" cy="731520"/>
           </a:xfrm>
           <a:prstGeom prst="rect">
             <a:avLst/>
@@ -10592,34 +11820,127 @@
           </a:bodyPr>
           <a:lstStyle/>
           <a:p>
-            <a:r>
-              <a:rPr sz="1600" b="0" i="0">
-                <a:solidFill>
-                  <a:srgbClr val="1A1440"/>
+            <a:pPr algn="l"/>
+            <a:r>
+              <a:rPr sz="4000" b="0" i="0">
+                <a:solidFill>
+                  <a:srgbClr val="FFFFFF"/>
+                </a:solidFill>
+                <a:latin typeface="Georgia"/>
+              </a:rPr>
+              <a:t>Does a weekly table agree?</a:t>
+            </a:r>
+          </a:p>
+        </p:txBody>
+      </p:sp>
+      <p:sp>
+        <p:nvSpPr>
+          <p:cNvPr id="9" name="TextBox 8"/>
+          <p:cNvSpPr txBox="1"/>
+          <p:nvPr/>
+        </p:nvSpPr>
+        <p:spPr>
+          <a:xfrm>
+            <a:off x="731519" y="3520440"/>
+            <a:ext cx="9509760" cy="531876"/>
+          </a:xfrm>
+          <a:prstGeom prst="rect">
+            <a:avLst/>
+          </a:prstGeom>
+          <a:noFill/>
+        </p:spPr>
+        <p:txBody>
+          <a:bodyPr wrap="square" anchor="t" lIns="0" rIns="0" tIns="0" bIns="0">
+            <a:spAutoFit/>
+          </a:bodyPr>
+          <a:lstStyle/>
+          <a:p>
+            <a:pPr algn="l"/>
+            <a:r>
+              <a:rPr sz="1500" b="0" i="0">
+                <a:solidFill>
+                  <a:srgbClr val="E4E1F1"/>
                 </a:solidFill>
                 <a:latin typeface="Calibri"/>
               </a:rPr>
-              <a:t>A chart with no stated denominator is a shape; a chart with its denominator stated is a number. Swiggy's letter indexed to the Q4 FY24 cohort; a different index would have moved every row.</a:t>
-            </a:r>
-          </a:p>
-        </p:txBody>
-      </p:sp>
-      <p:sp>
-        <p:nvSpPr>
-          <p:cNvPr id="11" name="Oval 10"/>
+              <a:t>Rebuilt by signup week instead of signup month, which part of the morning's story holds and which needs new words?</a:t>
+            </a:r>
+          </a:p>
+        </p:txBody>
+      </p:sp>
+      <p:sp>
+        <p:nvSpPr>
+          <p:cNvPr id="10" name="Rounded Rectangle 9"/>
           <p:cNvSpPr/>
           <p:nvPr/>
         </p:nvSpPr>
         <p:spPr>
           <a:xfrm>
-            <a:off x="530352" y="6492240"/>
-            <a:ext cx="64008" cy="64008"/>
-          </a:xfrm>
-          <a:prstGeom prst="ellipse">
-            <a:avLst/>
+            <a:off x="731519" y="5074920"/>
+            <a:ext cx="1964591" cy="310896"/>
+          </a:xfrm>
+          <a:prstGeom prst="roundRect">
+            <a:avLst>
+              <a:gd name="adj" fmla="val 50000"/>
+            </a:avLst>
+          </a:prstGeom>
+          <a:noFill/>
+          <a:ln w="9525">
+            <a:solidFill>
+              <a:srgbClr val="CFC9EE"/>
+            </a:solidFill>
+          </a:ln>
+          <a:effectLst/>
+        </p:spPr>
+        <p:style>
+          <a:lnRef idx="1">
+            <a:schemeClr val="accent1"/>
+          </a:lnRef>
+          <a:fillRef idx="3">
+            <a:schemeClr val="accent1"/>
+          </a:fillRef>
+          <a:effectRef idx="2">
+            <a:schemeClr val="accent1"/>
+          </a:effectRef>
+          <a:fontRef idx="minor">
+            <a:schemeClr val="lt1"/>
+          </a:fontRef>
+        </p:style>
+        <p:txBody>
+          <a:bodyPr rtlCol="0" anchor="ctr" wrap="none" lIns="25400" rIns="25400" tIns="0" bIns="0"/>
+          <a:lstStyle/>
+          <a:p>
+            <a:pPr algn="ctr"/>
+            <a:r>
+              <a:rPr sz="850" b="0">
+                <a:solidFill>
+                  <a:srgbClr val="CFC9EE"/>
+                </a:solidFill>
+                <a:latin typeface="Calibri"/>
+              </a:rPr>
+              <a:t>Can weaning lift retention?</a:t>
+            </a:r>
+          </a:p>
+        </p:txBody>
+      </p:sp>
+      <p:sp>
+        <p:nvSpPr>
+          <p:cNvPr id="11" name="Rounded Rectangle 10"/>
+          <p:cNvSpPr/>
+          <p:nvPr/>
+        </p:nvSpPr>
+        <p:spPr>
+          <a:xfrm>
+            <a:off x="2805839" y="5074920"/>
+            <a:ext cx="1905375" cy="310896"/>
+          </a:xfrm>
+          <a:prstGeom prst="roundRect">
+            <a:avLst>
+              <a:gd name="adj" fmla="val 50000"/>
+            </a:avLst>
           </a:prstGeom>
           <a:solidFill>
-            <a:srgbClr val="5B3FD6"/>
+            <a:srgbClr val="D9A7FF"/>
           </a:solidFill>
           <a:ln>
             <a:noFill/>
@@ -10641,67 +11962,43 @@
           </a:fontRef>
         </p:style>
         <p:txBody>
-          <a:bodyPr rtlCol="0" anchor="ctr" wrap="square"/>
+          <a:bodyPr rtlCol="0" anchor="ctr" wrap="none" lIns="25400" rIns="25400" tIns="0" bIns="0"/>
           <a:lstStyle/>
           <a:p>
             <a:pPr algn="ctr"/>
-          </a:p>
-        </p:txBody>
-      </p:sp>
-      <p:sp>
-        <p:nvSpPr>
-          <p:cNvPr id="12" name="TextBox 11"/>
-          <p:cNvSpPr txBox="1"/>
-          <p:nvPr/>
-        </p:nvSpPr>
-        <p:spPr>
-          <a:xfrm>
-            <a:off x="640080" y="6437376"/>
-            <a:ext cx="1608486" cy="152146"/>
-          </a:xfrm>
-          <a:prstGeom prst="rect">
-            <a:avLst/>
-          </a:prstGeom>
-          <a:noFill/>
-        </p:spPr>
-        <p:txBody>
-          <a:bodyPr wrap="square" anchor="t" lIns="0" rIns="0" tIns="0" bIns="0">
-            <a:spAutoFit/>
-          </a:bodyPr>
-          <a:lstStyle/>
-          <a:p>
-            <a:pPr algn="l"/>
-            <a:r>
-              <a:rPr sz="700" b="1" i="0">
-                <a:solidFill>
-                  <a:srgbClr val="5B3FD6"/>
+            <a:r>
+              <a:rPr sz="850" b="1">
+                <a:solidFill>
+                  <a:srgbClr val="1A0F5C"/>
                 </a:solidFill>
                 <a:latin typeface="Calibri"/>
               </a:rPr>
-              <a:t>Weaned users and the mix move</a:t>
-            </a:r>
-          </a:p>
-        </p:txBody>
-      </p:sp>
-      <p:sp>
-        <p:nvSpPr>
-          <p:cNvPr id="13" name="Oval 12"/>
+              <a:t>Does a weekly table agree?</a:t>
+            </a:r>
+          </a:p>
+        </p:txBody>
+      </p:sp>
+      <p:sp>
+        <p:nvSpPr>
+          <p:cNvPr id="12" name="Rounded Rectangle 11"/>
           <p:cNvSpPr/>
           <p:nvPr/>
         </p:nvSpPr>
         <p:spPr>
           <a:xfrm>
-            <a:off x="2340006" y="6492240"/>
-            <a:ext cx="64008" cy="64008"/>
-          </a:xfrm>
-          <a:prstGeom prst="ellipse">
-            <a:avLst/>
-          </a:prstGeom>
-          <a:solidFill>
-            <a:srgbClr val="CFC9EE"/>
-          </a:solidFill>
-          <a:ln>
-            <a:noFill/>
+            <a:off x="4820942" y="5074920"/>
+            <a:ext cx="1905375" cy="310896"/>
+          </a:xfrm>
+          <a:prstGeom prst="roundRect">
+            <a:avLst>
+              <a:gd name="adj" fmla="val 50000"/>
+            </a:avLst>
+          </a:prstGeom>
+          <a:noFill/>
+          <a:ln w="9525">
+            <a:solidFill>
+              <a:srgbClr val="CFC9EE"/>
+            </a:solidFill>
           </a:ln>
           <a:effectLst/>
         </p:spPr>
@@ -10720,67 +12017,43 @@
           </a:fontRef>
         </p:style>
         <p:txBody>
-          <a:bodyPr rtlCol="0" anchor="ctr" wrap="square"/>
+          <a:bodyPr rtlCol="0" anchor="ctr" wrap="none" lIns="25400" rIns="25400" tIns="0" bIns="0"/>
           <a:lstStyle/>
           <a:p>
             <a:pPr algn="ctr"/>
-          </a:p>
-        </p:txBody>
-      </p:sp>
-      <p:sp>
-        <p:nvSpPr>
-          <p:cNvPr id="14" name="TextBox 13"/>
-          <p:cNvSpPr txBox="1"/>
-          <p:nvPr/>
-        </p:nvSpPr>
-        <p:spPr>
-          <a:xfrm>
-            <a:off x="2449734" y="6437376"/>
-            <a:ext cx="2022538" cy="152146"/>
-          </a:xfrm>
-          <a:prstGeom prst="rect">
-            <a:avLst/>
-          </a:prstGeom>
-          <a:noFill/>
-        </p:spPr>
-        <p:txBody>
-          <a:bodyPr wrap="square" anchor="t" lIns="0" rIns="0" tIns="0" bIns="0">
-            <a:spAutoFit/>
-          </a:bodyPr>
-          <a:lstStyle/>
-          <a:p>
-            <a:pPr algn="l"/>
-            <a:r>
-              <a:rPr sz="700" b="0" i="0">
-                <a:solidFill>
-                  <a:srgbClr val="6B6690"/>
+            <a:r>
+              <a:rPr sz="850" b="0">
+                <a:solidFill>
+                  <a:srgbClr val="CFC9EE"/>
                 </a:solidFill>
                 <a:latin typeface="Calibri"/>
               </a:rPr>
-              <a:t>Monthly against weekly on today's data</a:t>
-            </a:r>
-          </a:p>
-        </p:txBody>
-      </p:sp>
-      <p:sp>
-        <p:nvSpPr>
-          <p:cNvPr id="15" name="Oval 14"/>
+              <a:t>Did Gold cause the orders?</a:t>
+            </a:r>
+          </a:p>
+        </p:txBody>
+      </p:sp>
+      <p:sp>
+        <p:nvSpPr>
+          <p:cNvPr id="13" name="Rounded Rectangle 12"/>
           <p:cNvSpPr/>
           <p:nvPr/>
         </p:nvSpPr>
         <p:spPr>
           <a:xfrm>
-            <a:off x="4563713" y="6492240"/>
-            <a:ext cx="64008" cy="64008"/>
-          </a:xfrm>
-          <a:prstGeom prst="ellipse">
-            <a:avLst/>
-          </a:prstGeom>
-          <a:solidFill>
-            <a:srgbClr val="CFC9EE"/>
-          </a:solidFill>
-          <a:ln>
-            <a:noFill/>
+            <a:off x="6836045" y="5074920"/>
+            <a:ext cx="2083023" cy="310896"/>
+          </a:xfrm>
+          <a:prstGeom prst="roundRect">
+            <a:avLst>
+              <a:gd name="adj" fmla="val 50000"/>
+            </a:avLst>
+          </a:prstGeom>
+          <a:noFill/>
+          <a:ln w="9525">
+            <a:solidFill>
+              <a:srgbClr val="CFC9EE"/>
+            </a:solidFill>
           </a:ln>
           <a:effectLst/>
         </p:spPr>
@@ -10799,23 +12072,32 @@
           </a:fontRef>
         </p:style>
         <p:txBody>
-          <a:bodyPr rtlCol="0" anchor="ctr" wrap="square"/>
+          <a:bodyPr rtlCol="0" anchor="ctr" wrap="none" lIns="25400" rIns="25400" tIns="0" bIns="0"/>
           <a:lstStyle/>
           <a:p>
             <a:pPr algn="ctr"/>
-          </a:p>
-        </p:txBody>
-      </p:sp>
-      <p:sp>
-        <p:nvSpPr>
-          <p:cNvPr id="16" name="TextBox 15"/>
+            <a:r>
+              <a:rPr sz="850" b="0">
+                <a:solidFill>
+                  <a:srgbClr val="CFC9EE"/>
+                </a:solidFill>
+                <a:latin typeface="Calibri"/>
+              </a:rPr>
+              <a:t>Is the app team's stage fine?</a:t>
+            </a:r>
+          </a:p>
+        </p:txBody>
+      </p:sp>
+      <p:sp>
+        <p:nvSpPr>
+          <p:cNvPr id="14" name="TextBox 13"/>
           <p:cNvSpPr txBox="1"/>
           <p:nvPr/>
         </p:nvSpPr>
         <p:spPr>
           <a:xfrm>
-            <a:off x="4673441" y="6437376"/>
-            <a:ext cx="2194560" cy="152146"/>
+            <a:off x="530352" y="6437376"/>
+            <a:ext cx="9667951" cy="160401"/>
           </a:xfrm>
           <a:prstGeom prst="rect">
             <a:avLst/>
@@ -10830,71 +12112,27 @@
           <a:p>
             <a:pPr algn="l"/>
             <a:r>
-              <a:rPr sz="700" b="0" i="0">
-                <a:solidFill>
-                  <a:srgbClr val="6B6690"/>
+              <a:rPr sz="750" b="0" i="0">
+                <a:solidFill>
+                  <a:srgbClr val="CFC9EE"/>
                 </a:solidFill>
                 <a:latin typeface="Calibri"/>
               </a:rPr>
-              <a:t>Zomato's 60 percent rise, kept descriptive</a:t>
-            </a:r>
-          </a:p>
-        </p:txBody>
-      </p:sp>
-      <p:sp>
-        <p:nvSpPr>
-          <p:cNvPr id="17" name="Oval 16"/>
-          <p:cNvSpPr/>
-          <p:nvPr/>
-        </p:nvSpPr>
-        <p:spPr>
-          <a:xfrm>
-            <a:off x="6959441" y="6492240"/>
-            <a:ext cx="64008" cy="64008"/>
-          </a:xfrm>
-          <a:prstGeom prst="ellipse">
-            <a:avLst/>
-          </a:prstGeom>
-          <a:solidFill>
-            <a:srgbClr val="CFC9EE"/>
-          </a:solidFill>
-          <a:ln>
-            <a:noFill/>
-          </a:ln>
-          <a:effectLst/>
-        </p:spPr>
-        <p:style>
-          <a:lnRef idx="1">
-            <a:schemeClr val="accent1"/>
-          </a:lnRef>
-          <a:fillRef idx="3">
-            <a:schemeClr val="accent1"/>
-          </a:fillRef>
-          <a:effectRef idx="2">
-            <a:schemeClr val="accent1"/>
-          </a:effectRef>
-          <a:fontRef idx="minor">
-            <a:schemeClr val="lt1"/>
-          </a:fontRef>
-        </p:style>
-        <p:txBody>
-          <a:bodyPr rtlCol="0" anchor="ctr" wrap="square"/>
-          <a:lstStyle/>
-          <a:p>
-            <a:pPr algn="ctr"/>
-          </a:p>
-        </p:txBody>
-      </p:sp>
-      <p:sp>
-        <p:nvSpPr>
-          <p:cNvPr id="18" name="TextBox 17"/>
+              <a:t>Week 4 Day 4: the fallback block</a:t>
+            </a:r>
+          </a:p>
+        </p:txBody>
+      </p:sp>
+      <p:sp>
+        <p:nvSpPr>
+          <p:cNvPr id="15" name="TextBox 14"/>
           <p:cNvSpPr txBox="1"/>
           <p:nvPr/>
         </p:nvSpPr>
         <p:spPr>
           <a:xfrm>
-            <a:off x="7069169" y="6437376"/>
-            <a:ext cx="504348" cy="152146"/>
+            <a:off x="10198303" y="6437376"/>
+            <a:ext cx="1463040" cy="160401"/>
           </a:xfrm>
           <a:prstGeom prst="rect">
             <a:avLst/>
@@ -10907,50 +12145,15 @@
           </a:bodyPr>
           <a:lstStyle/>
           <a:p>
-            <a:pPr algn="l"/>
-            <a:r>
-              <a:rPr sz="700" b="0" i="0">
-                <a:solidFill>
-                  <a:srgbClr val="6B6690"/>
+            <a:pPr algn="r"/>
+            <a:r>
+              <a:rPr sz="750" b="0" i="0">
+                <a:solidFill>
+                  <a:srgbClr val="CFC9EE"/>
                 </a:solidFill>
                 <a:latin typeface="Calibri"/>
               </a:rPr>
-              <a:t>Close</a:t>
-            </a:r>
-          </a:p>
-        </p:txBody>
-      </p:sp>
-      <p:sp>
-        <p:nvSpPr>
-          <p:cNvPr id="19" name="TextBox 18"/>
-          <p:cNvSpPr txBox="1"/>
-          <p:nvPr/>
-        </p:nvSpPr>
-        <p:spPr>
-          <a:xfrm>
-            <a:off x="10198303" y="6437376"/>
-            <a:ext cx="1463040" cy="160401"/>
-          </a:xfrm>
-          <a:prstGeom prst="rect">
-            <a:avLst/>
-          </a:prstGeom>
-          <a:noFill/>
-        </p:spPr>
-        <p:txBody>
-          <a:bodyPr wrap="square" anchor="t" lIns="0" rIns="0" tIns="0" bIns="0">
-            <a:spAutoFit/>
-          </a:bodyPr>
-          <a:lstStyle/>
-          <a:p>
-            <a:pPr algn="r"/>
-            <a:r>
-              <a:rPr sz="750" b="0" i="0">
-                <a:solidFill>
-                  <a:srgbClr val="6B6690"/>
-                </a:solidFill>
-                <a:latin typeface="Calibri"/>
-              </a:rPr>
-              <a:t>S3  ·  5 / 13</a:t>
+              <a:t>5 / 14</a:t>
             </a:r>
           </a:p>
         </p:txBody>
@@ -10975,7 +12178,7 @@
       <p:grpSpPr/>
       <p:pic>
         <p:nvPicPr>
-          <p:cNvPr id="2" name="Picture 1" descr="bg_dark.jpg"/>
+          <p:cNvPr id="2" name="Picture 1" descr="bg_light.jpg"/>
           <p:cNvPicPr>
             <a:picLocks noChangeAspect="1"/>
           </p:cNvPicPr>
@@ -11047,7 +12250,7 @@
             <a:r>
               <a:rPr sz="900" b="1" i="0">
                 <a:solidFill>
-                  <a:srgbClr val="FFFFFF"/>
+                  <a:srgbClr val="1A0F5C"/>
                 </a:solidFill>
                 <a:latin typeface="Calibri"/>
               </a:rPr>
@@ -11082,7 +12285,7 @@
             <a:r>
               <a:rPr sz="550" b="1" i="0" spc="300">
                 <a:solidFill>
-                  <a:srgbClr val="CFC9EE"/>
+                  <a:srgbClr val="6B6690"/>
                 </a:solidFill>
                 <a:latin typeface="Calibri"/>
               </a:rPr>
@@ -11117,11 +12320,11 @@
             <a:r>
               <a:rPr sz="550" b="1" i="0" spc="300">
                 <a:solidFill>
-                  <a:srgbClr val="CFC9EE"/>
+                  <a:srgbClr val="6B6690"/>
                 </a:solidFill>
                 <a:latin typeface="Calibri"/>
               </a:rPr>
-              <a:t>PG DIPLOMA IN AI-ML AND AGENTIC AI ENGINEERING  ·  COHORT 2</a:t>
+              <a:t>WEEK 4  ·  DAY 4  ·  THE FALLBACK, IF THE TENTATIVE FACULTY BLOCK SLIPS</a:t>
             </a:r>
           </a:p>
         </p:txBody>
@@ -11134,8 +12337,43 @@
         </p:nvSpPr>
         <p:spPr>
           <a:xfrm>
-            <a:off x="731519" y="1143000"/>
-            <a:ext cx="3657600" cy="1371600"/>
+            <a:off x="530352" y="676656"/>
+            <a:ext cx="11130991" cy="512064"/>
+          </a:xfrm>
+          <a:prstGeom prst="rect">
+            <a:avLst/>
+          </a:prstGeom>
+          <a:noFill/>
+        </p:spPr>
+        <p:txBody>
+          <a:bodyPr wrap="square" anchor="b" lIns="0" rIns="0" tIns="0" bIns="0">
+            <a:spAutoFit/>
+          </a:bodyPr>
+          <a:lstStyle/>
+          <a:p>
+            <a:pPr algn="l"/>
+            <a:r>
+              <a:rPr sz="2600" b="0" i="0">
+                <a:solidFill>
+                  <a:srgbClr val="1A0F5C"/>
+                </a:solidFill>
+                <a:latin typeface="Georgia"/>
+              </a:rPr>
+              <a:t>The task: cohorts by signup week, from the log</a:t>
+            </a:r>
+          </a:p>
+        </p:txBody>
+      </p:sp>
+      <p:sp>
+        <p:nvSpPr>
+          <p:cNvPr id="8" name="TextBox 7"/>
+          <p:cNvSpPr txBox="1"/>
+          <p:nvPr/>
+        </p:nvSpPr>
+        <p:spPr>
+          <a:xfrm>
+            <a:off x="530352" y="1243584"/>
+            <a:ext cx="11130991" cy="234696"/>
           </a:xfrm>
           <a:prstGeom prst="rect">
             <a:avLst/>
@@ -11150,110 +12388,46 @@
           <a:p>
             <a:pPr algn="l"/>
             <a:r>
-              <a:rPr sz="9600" b="0" i="0">
-                <a:solidFill>
-                  <a:srgbClr val="D9A7FF"/>
-                </a:solidFill>
-                <a:latin typeface="Georgia"/>
-              </a:rPr>
-              <a:t>02</a:t>
-            </a:r>
-          </a:p>
-        </p:txBody>
-      </p:sp>
-      <p:sp>
-        <p:nvSpPr>
-          <p:cNvPr id="8" name="TextBox 7"/>
-          <p:cNvSpPr txBox="1"/>
-          <p:nvPr/>
-        </p:nvSpPr>
-        <p:spPr>
-          <a:xfrm>
-            <a:off x="731519" y="2606040"/>
-            <a:ext cx="10673791" cy="731520"/>
-          </a:xfrm>
-          <a:prstGeom prst="rect">
-            <a:avLst/>
-          </a:prstGeom>
-          <a:noFill/>
-        </p:spPr>
-        <p:txBody>
-          <a:bodyPr wrap="square" anchor="t" lIns="0" rIns="0" tIns="0" bIns="0">
-            <a:spAutoFit/>
-          </a:bodyPr>
-          <a:lstStyle/>
-          <a:p>
-            <a:pPr algn="l"/>
-            <a:r>
-              <a:rPr sz="4000" b="0" i="0">
-                <a:solidFill>
-                  <a:srgbClr val="FFFFFF"/>
-                </a:solidFill>
-                <a:latin typeface="Georgia"/>
-              </a:rPr>
-              <a:t>Monthly against weekly on today's data</a:t>
-            </a:r>
-          </a:p>
-        </p:txBody>
-      </p:sp>
-      <p:sp>
-        <p:nvSpPr>
-          <p:cNvPr id="9" name="TextBox 8"/>
-          <p:cNvSpPr txBox="1"/>
-          <p:nvPr/>
-        </p:nvSpPr>
-        <p:spPr>
-          <a:xfrm>
-            <a:off x="731519" y="3520440"/>
-            <a:ext cx="9509760" cy="284226"/>
-          </a:xfrm>
-          <a:prstGeom prst="rect">
-            <a:avLst/>
-          </a:prstGeom>
-          <a:noFill/>
-        </p:spPr>
-        <p:txBody>
-          <a:bodyPr wrap="square" anchor="t" lIns="0" rIns="0" tIns="0" bIns="0">
-            <a:spAutoFit/>
-          </a:bodyPr>
-          <a:lstStyle/>
-          <a:p>
-            <a:pPr algn="l"/>
-            <a:r>
-              <a:rPr sz="1500" b="0" i="0">
-                <a:solidFill>
-                  <a:srgbClr val="E4E1F1"/>
+              <a:rPr sz="1200" b="0" i="0">
+                <a:solidFill>
+                  <a:srgbClr val="6B6690"/>
                 </a:solidFill>
                 <a:latin typeface="Calibri"/>
               </a:rPr>
-              <a:t>Rerun the Chennai cohort at a weekly granularity: which story survives?</a:t>
-            </a:r>
-          </a:p>
-        </p:txBody>
-      </p:sp>
-      <p:sp>
-        <p:nvSpPr>
-          <p:cNvPr id="10" name="Rounded Rectangle 9"/>
+              <a:t>How is a weekly cohort table built from the event log?</a:t>
+            </a:r>
+          </a:p>
+        </p:txBody>
+      </p:sp>
+      <p:sp>
+        <p:nvSpPr>
+          <p:cNvPr id="9" name="Rounded Rectangle 8"/>
           <p:cNvSpPr/>
           <p:nvPr/>
         </p:nvSpPr>
         <p:spPr>
           <a:xfrm>
-            <a:off x="731519" y="5074920"/>
-            <a:ext cx="2083023" cy="310896"/>
+            <a:off x="530352" y="1956816"/>
+            <a:ext cx="11130991" cy="1467104"/>
           </a:xfrm>
           <a:prstGeom prst="roundRect">
             <a:avLst>
-              <a:gd name="adj" fmla="val 50000"/>
+              <a:gd name="adj" fmla="val 3500"/>
             </a:avLst>
           </a:prstGeom>
-          <a:noFill/>
-          <a:ln w="9525">
-            <a:solidFill>
-              <a:srgbClr val="CFC9EE"/>
-            </a:solidFill>
+          <a:solidFill>
+            <a:srgbClr val="1A1440"/>
+          </a:solidFill>
+          <a:ln>
+            <a:noFill/>
           </a:ln>
-          <a:effectLst/>
+          <a:effectLst>
+            <a:outerShdw blurRad="76200" dist="19050" dir="5400000" algn="bl" rotWithShape="0">
+              <a:srgbClr val="1A0F5C">
+                <a:alpha val="12000"/>
+              </a:srgbClr>
+            </a:outerShdw>
+          </a:effectLst>
         </p:spPr>
         <p:style>
           <a:lnRef idx="1">
@@ -11270,37 +12444,70 @@
           </a:fontRef>
         </p:style>
         <p:txBody>
-          <a:bodyPr rtlCol="0" anchor="ctr" wrap="none" lIns="25400" rIns="25400" tIns="0" bIns="0"/>
+          <a:bodyPr rtlCol="0" anchor="ctr" wrap="square"/>
           <a:lstStyle/>
           <a:p>
             <a:pPr algn="ctr"/>
-            <a:r>
-              <a:rPr sz="850" b="0">
-                <a:solidFill>
-                  <a:srgbClr val="CFC9EE"/>
-                </a:solidFill>
-                <a:latin typeface="Calibri"/>
-              </a:rPr>
-              <a:t>Weaned users and the mix move</a:t>
-            </a:r>
-          </a:p>
-        </p:txBody>
-      </p:sp>
-      <p:sp>
-        <p:nvSpPr>
-          <p:cNvPr id="11" name="Rounded Rectangle 10"/>
+          </a:p>
+        </p:txBody>
+      </p:sp>
+      <p:sp>
+        <p:nvSpPr>
+          <p:cNvPr id="10" name="Oval 9"/>
           <p:cNvSpPr/>
           <p:nvPr/>
         </p:nvSpPr>
         <p:spPr>
           <a:xfrm>
-            <a:off x="2924271" y="5074920"/>
-            <a:ext cx="2148840" cy="310896"/>
-          </a:xfrm>
-          <a:prstGeom prst="roundRect">
-            <a:avLst>
-              <a:gd name="adj" fmla="val 50000"/>
-            </a:avLst>
+            <a:off x="713232" y="2084832"/>
+            <a:ext cx="91440" cy="91440"/>
+          </a:xfrm>
+          <a:prstGeom prst="ellipse">
+            <a:avLst/>
+          </a:prstGeom>
+          <a:solidFill>
+            <a:srgbClr val="D63A6A"/>
+          </a:solidFill>
+          <a:ln>
+            <a:noFill/>
+          </a:ln>
+          <a:effectLst/>
+        </p:spPr>
+        <p:style>
+          <a:lnRef idx="1">
+            <a:schemeClr val="accent1"/>
+          </a:lnRef>
+          <a:fillRef idx="3">
+            <a:schemeClr val="accent1"/>
+          </a:fillRef>
+          <a:effectRef idx="2">
+            <a:schemeClr val="accent1"/>
+          </a:effectRef>
+          <a:fontRef idx="minor">
+            <a:schemeClr val="lt1"/>
+          </a:fontRef>
+        </p:style>
+        <p:txBody>
+          <a:bodyPr rtlCol="0" anchor="ctr" wrap="square"/>
+          <a:lstStyle/>
+          <a:p>
+            <a:pPr algn="ctr"/>
+          </a:p>
+        </p:txBody>
+      </p:sp>
+      <p:sp>
+        <p:nvSpPr>
+          <p:cNvPr id="11" name="Oval 10"/>
+          <p:cNvSpPr/>
+          <p:nvPr/>
+        </p:nvSpPr>
+        <p:spPr>
+          <a:xfrm>
+            <a:off x="868680" y="2084832"/>
+            <a:ext cx="91440" cy="91440"/>
+          </a:xfrm>
+          <a:prstGeom prst="ellipse">
+            <a:avLst/>
           </a:prstGeom>
           <a:solidFill>
             <a:srgbClr val="D9A7FF"/>
@@ -11325,43 +12532,32 @@
           </a:fontRef>
         </p:style>
         <p:txBody>
-          <a:bodyPr rtlCol="0" anchor="ctr" wrap="none" lIns="25400" rIns="25400" tIns="0" bIns="0"/>
+          <a:bodyPr rtlCol="0" anchor="ctr" wrap="square"/>
           <a:lstStyle/>
           <a:p>
             <a:pPr algn="ctr"/>
-            <a:r>
-              <a:rPr sz="850" b="1">
-                <a:solidFill>
-                  <a:srgbClr val="1A0F5C"/>
-                </a:solidFill>
-                <a:latin typeface="Calibri"/>
-              </a:rPr>
-              <a:t>Monthly against weekly on today's data</a:t>
-            </a:r>
-          </a:p>
-        </p:txBody>
-      </p:sp>
-      <p:sp>
-        <p:nvSpPr>
-          <p:cNvPr id="12" name="Rounded Rectangle 11"/>
+          </a:p>
+        </p:txBody>
+      </p:sp>
+      <p:sp>
+        <p:nvSpPr>
+          <p:cNvPr id="12" name="Oval 11"/>
           <p:cNvSpPr/>
           <p:nvPr/>
         </p:nvSpPr>
         <p:spPr>
           <a:xfrm>
-            <a:off x="5182839" y="5074920"/>
-            <a:ext cx="2148840" cy="310896"/>
-          </a:xfrm>
-          <a:prstGeom prst="roundRect">
-            <a:avLst>
-              <a:gd name="adj" fmla="val 50000"/>
-            </a:avLst>
-          </a:prstGeom>
-          <a:noFill/>
-          <a:ln w="9525">
-            <a:solidFill>
-              <a:srgbClr val="CFC9EE"/>
-            </a:solidFill>
+            <a:off x="1024128" y="2084832"/>
+            <a:ext cx="91440" cy="91440"/>
+          </a:xfrm>
+          <a:prstGeom prst="ellipse">
+            <a:avLst/>
+          </a:prstGeom>
+          <a:solidFill>
+            <a:srgbClr val="1F8A5B"/>
+          </a:solidFill>
+          <a:ln>
+            <a:noFill/>
           </a:ln>
           <a:effectLst/>
         </p:spPr>
@@ -11380,43 +12576,158 @@
           </a:fontRef>
         </p:style>
         <p:txBody>
-          <a:bodyPr rtlCol="0" anchor="ctr" wrap="none" lIns="25400" rIns="25400" tIns="0" bIns="0"/>
+          <a:bodyPr rtlCol="0" anchor="ctr" wrap="square"/>
           <a:lstStyle/>
           <a:p>
             <a:pPr algn="ctr"/>
-            <a:r>
-              <a:rPr sz="850" b="0">
-                <a:solidFill>
-                  <a:srgbClr val="CFC9EE"/>
+          </a:p>
+        </p:txBody>
+      </p:sp>
+      <p:sp>
+        <p:nvSpPr>
+          <p:cNvPr id="13" name="TextBox 12"/>
+          <p:cNvSpPr txBox="1"/>
+          <p:nvPr/>
+        </p:nvSpPr>
+        <p:spPr>
+          <a:xfrm>
+            <a:off x="804671" y="2286000"/>
+            <a:ext cx="10673791" cy="1064768"/>
+          </a:xfrm>
+          <a:prstGeom prst="rect">
+            <a:avLst/>
+          </a:prstGeom>
+          <a:noFill/>
+        </p:spPr>
+        <p:txBody>
+          <a:bodyPr wrap="square" anchor="t" lIns="0" rIns="0" tIns="0" bIns="0">
+            <a:spAutoFit/>
+          </a:bodyPr>
+          <a:lstStyle/>
+          <a:p>
+            <a:pPr>
+              <a:spcAft>
+                <a:spcPts val="200"/>
+              </a:spcAft>
+            </a:pPr>
+            <a:r>
+              <a:rPr sz="1400" b="0" i="0">
+                <a:solidFill>
+                  <a:srgbClr val="E4E1F1"/>
+                </a:solidFill>
+                <a:latin typeface="Consolas"/>
+              </a:rPr>
+              <a:t>placed = ev[ev["stage"] == "order_placed"]</a:t>
+            </a:r>
+          </a:p>
+          <a:p>
+            <a:pPr>
+              <a:spcAft>
+                <a:spcPts val="200"/>
+              </a:spcAft>
+            </a:pPr>
+            <a:r>
+              <a:rPr sz="1400" b="0" i="0">
+                <a:solidFill>
+                  <a:srgbClr val="E4E1F1"/>
+                </a:solidFill>
+                <a:latin typeface="Consolas"/>
+              </a:rPr>
+              <a:t>week = lambda t: t.dt.to_period("W-SUN").dt.start_time      # weeks start on Monday</a:t>
+            </a:r>
+          </a:p>
+          <a:p>
+            <a:pPr>
+              <a:spcAft>
+                <a:spcPts val="200"/>
+              </a:spcAft>
+            </a:pPr>
+            <a:r>
+              <a:rPr sz="1400" b="0" i="0">
+                <a:solidFill>
+                  <a:srgbClr val="E4E1F1"/>
+                </a:solidFill>
+                <a:latin typeface="Consolas"/>
+              </a:rPr>
+              <a:t>orders_week = set(zip(placed["user_id"], week(placed["event_ts"])))</a:t>
+            </a:r>
+          </a:p>
+          <a:p>
+            <a:pPr>
+              <a:spcAft>
+                <a:spcPts val="200"/>
+              </a:spcAft>
+            </a:pPr>
+            <a:r>
+              <a:rPr sz="1400" b="0" i="0">
+                <a:solidFill>
+                  <a:srgbClr val="A9A3D2"/>
+                </a:solidFill>
+                <a:latin typeface="Consolas"/>
+              </a:rPr>
+              <a:t># members who joined 3 August to 13 September; week k is the k-th full week after the signup week</a:t>
+            </a:r>
+          </a:p>
+        </p:txBody>
+      </p:sp>
+      <p:sp>
+        <p:nvSpPr>
+          <p:cNvPr id="14" name="TextBox 13"/>
+          <p:cNvSpPr txBox="1"/>
+          <p:nvPr/>
+        </p:nvSpPr>
+        <p:spPr>
+          <a:xfrm>
+            <a:off x="530352" y="3588512"/>
+            <a:ext cx="11130991" cy="1048512"/>
+          </a:xfrm>
+          <a:prstGeom prst="rect">
+            <a:avLst/>
+          </a:prstGeom>
+          <a:noFill/>
+        </p:spPr>
+        <p:txBody>
+          <a:bodyPr wrap="square" anchor="t" lIns="0" rIns="0" tIns="0" bIns="0">
+            <a:spAutoFit/>
+          </a:bodyPr>
+          <a:lstStyle/>
+          <a:p>
+            <a:pPr>
+              <a:spcAft>
+                <a:spcPts val="800"/>
+              </a:spcAft>
+            </a:pPr>
+            <a:r>
+              <a:rPr sz="1600" b="0" i="0">
+                <a:solidFill>
+                  <a:srgbClr val="1A1440"/>
                 </a:solidFill>
                 <a:latin typeface="Calibri"/>
               </a:rPr>
-              <a:t>Zomato's 60 percent rise, kept descriptive</a:t>
-            </a:r>
-          </a:p>
-        </p:txBody>
-      </p:sp>
-      <p:sp>
-        <p:nvSpPr>
-          <p:cNvPr id="13" name="Rounded Rectangle 12"/>
+              <a:t>Members who joined from 3 August to 13 September form six weekly cohorts. A member is active in week k when she placed an order that week. The week of 28 September is three days long, so the table stops at the week of 21 September.</a:t>
+            </a:r>
+          </a:p>
+        </p:txBody>
+      </p:sp>
+      <p:sp>
+        <p:nvSpPr>
+          <p:cNvPr id="15" name="Oval 14"/>
           <p:cNvSpPr/>
           <p:nvPr/>
         </p:nvSpPr>
         <p:spPr>
           <a:xfrm>
-            <a:off x="7441407" y="5074920"/>
-            <a:ext cx="661839" cy="310896"/>
-          </a:xfrm>
-          <a:prstGeom prst="roundRect">
-            <a:avLst>
-              <a:gd name="adj" fmla="val 50000"/>
-            </a:avLst>
-          </a:prstGeom>
-          <a:noFill/>
-          <a:ln w="9525">
-            <a:solidFill>
-              <a:srgbClr val="CFC9EE"/>
-            </a:solidFill>
+            <a:off x="530352" y="6492240"/>
+            <a:ext cx="64008" cy="64008"/>
+          </a:xfrm>
+          <a:prstGeom prst="ellipse">
+            <a:avLst/>
+          </a:prstGeom>
+          <a:solidFill>
+            <a:srgbClr val="CFC9EE"/>
+          </a:solidFill>
+          <a:ln>
+            <a:noFill/>
           </a:ln>
           <a:effectLst/>
         </p:spPr>
@@ -11435,32 +12746,23 @@
           </a:fontRef>
         </p:style>
         <p:txBody>
-          <a:bodyPr rtlCol="0" anchor="ctr" wrap="none" lIns="25400" rIns="25400" tIns="0" bIns="0"/>
+          <a:bodyPr rtlCol="0" anchor="ctr" wrap="square"/>
           <a:lstStyle/>
           <a:p>
             <a:pPr algn="ctr"/>
-            <a:r>
-              <a:rPr sz="850" b="0">
-                <a:solidFill>
-                  <a:srgbClr val="CFC9EE"/>
-                </a:solidFill>
-                <a:latin typeface="Calibri"/>
-              </a:rPr>
-              <a:t>Close</a:t>
-            </a:r>
-          </a:p>
-        </p:txBody>
-      </p:sp>
-      <p:sp>
-        <p:nvSpPr>
-          <p:cNvPr id="14" name="TextBox 13"/>
+          </a:p>
+        </p:txBody>
+      </p:sp>
+      <p:sp>
+        <p:nvSpPr>
+          <p:cNvPr id="16" name="TextBox 15"/>
           <p:cNvSpPr txBox="1"/>
           <p:nvPr/>
         </p:nvSpPr>
         <p:spPr>
           <a:xfrm>
-            <a:off x="530352" y="6437376"/>
-            <a:ext cx="9667951" cy="160401"/>
+            <a:off x="640080" y="6437376"/>
+            <a:ext cx="1516475" cy="152146"/>
           </a:xfrm>
           <a:prstGeom prst="rect">
             <a:avLst/>
@@ -11475,27 +12777,71 @@
           <a:p>
             <a:pPr algn="l"/>
             <a:r>
-              <a:rPr sz="750" b="0" i="0">
-                <a:solidFill>
-                  <a:srgbClr val="CFC9EE"/>
+              <a:rPr sz="700" b="0" i="0">
+                <a:solidFill>
+                  <a:srgbClr val="6B6690"/>
                 </a:solidFill>
                 <a:latin typeface="Calibri"/>
               </a:rPr>
-              <a:t>Week 4 Day 4 fallback: the weaned-users hour</a:t>
-            </a:r>
-          </a:p>
-        </p:txBody>
-      </p:sp>
-      <p:sp>
-        <p:nvSpPr>
-          <p:cNvPr id="15" name="TextBox 14"/>
+              <a:t>Can weaning lift retention?</a:t>
+            </a:r>
+          </a:p>
+        </p:txBody>
+      </p:sp>
+      <p:sp>
+        <p:nvSpPr>
+          <p:cNvPr id="17" name="Oval 16"/>
+          <p:cNvSpPr/>
+          <p:nvPr/>
+        </p:nvSpPr>
+        <p:spPr>
+          <a:xfrm>
+            <a:off x="2247995" y="6492240"/>
+            <a:ext cx="64008" cy="64008"/>
+          </a:xfrm>
+          <a:prstGeom prst="ellipse">
+            <a:avLst/>
+          </a:prstGeom>
+          <a:solidFill>
+            <a:srgbClr val="5B3FD6"/>
+          </a:solidFill>
+          <a:ln>
+            <a:noFill/>
+          </a:ln>
+          <a:effectLst/>
+        </p:spPr>
+        <p:style>
+          <a:lnRef idx="1">
+            <a:schemeClr val="accent1"/>
+          </a:lnRef>
+          <a:fillRef idx="3">
+            <a:schemeClr val="accent1"/>
+          </a:fillRef>
+          <a:effectRef idx="2">
+            <a:schemeClr val="accent1"/>
+          </a:effectRef>
+          <a:fontRef idx="minor">
+            <a:schemeClr val="lt1"/>
+          </a:fontRef>
+        </p:style>
+        <p:txBody>
+          <a:bodyPr rtlCol="0" anchor="ctr" wrap="square"/>
+          <a:lstStyle/>
+          <a:p>
+            <a:pPr algn="ctr"/>
+          </a:p>
+        </p:txBody>
+      </p:sp>
+      <p:sp>
+        <p:nvSpPr>
+          <p:cNvPr id="18" name="TextBox 17"/>
           <p:cNvSpPr txBox="1"/>
           <p:nvPr/>
         </p:nvSpPr>
         <p:spPr>
           <a:xfrm>
-            <a:off x="10198303" y="6437376"/>
-            <a:ext cx="1463040" cy="160401"/>
+            <a:off x="2357723" y="6437376"/>
+            <a:ext cx="1470469" cy="152146"/>
           </a:xfrm>
           <a:prstGeom prst="rect">
             <a:avLst/>
@@ -11508,15 +12854,208 @@
           </a:bodyPr>
           <a:lstStyle/>
           <a:p>
+            <a:pPr algn="l"/>
+            <a:r>
+              <a:rPr sz="700" b="1" i="0">
+                <a:solidFill>
+                  <a:srgbClr val="5B3FD6"/>
+                </a:solidFill>
+                <a:latin typeface="Calibri"/>
+              </a:rPr>
+              <a:t>Does a weekly table agree?</a:t>
+            </a:r>
+          </a:p>
+        </p:txBody>
+      </p:sp>
+      <p:sp>
+        <p:nvSpPr>
+          <p:cNvPr id="19" name="Oval 18"/>
+          <p:cNvSpPr/>
+          <p:nvPr/>
+        </p:nvSpPr>
+        <p:spPr>
+          <a:xfrm>
+            <a:off x="3919632" y="6492240"/>
+            <a:ext cx="64008" cy="64008"/>
+          </a:xfrm>
+          <a:prstGeom prst="ellipse">
+            <a:avLst/>
+          </a:prstGeom>
+          <a:solidFill>
+            <a:srgbClr val="CFC9EE"/>
+          </a:solidFill>
+          <a:ln>
+            <a:noFill/>
+          </a:ln>
+          <a:effectLst/>
+        </p:spPr>
+        <p:style>
+          <a:lnRef idx="1">
+            <a:schemeClr val="accent1"/>
+          </a:lnRef>
+          <a:fillRef idx="3">
+            <a:schemeClr val="accent1"/>
+          </a:fillRef>
+          <a:effectRef idx="2">
+            <a:schemeClr val="accent1"/>
+          </a:effectRef>
+          <a:fontRef idx="minor">
+            <a:schemeClr val="lt1"/>
+          </a:fontRef>
+        </p:style>
+        <p:txBody>
+          <a:bodyPr rtlCol="0" anchor="ctr" wrap="square"/>
+          <a:lstStyle/>
+          <a:p>
+            <a:pPr algn="ctr"/>
+          </a:p>
+        </p:txBody>
+      </p:sp>
+      <p:sp>
+        <p:nvSpPr>
+          <p:cNvPr id="20" name="TextBox 19"/>
+          <p:cNvSpPr txBox="1"/>
+          <p:nvPr/>
+        </p:nvSpPr>
+        <p:spPr>
+          <a:xfrm>
+            <a:off x="4029360" y="6437376"/>
+            <a:ext cx="1470469" cy="152146"/>
+          </a:xfrm>
+          <a:prstGeom prst="rect">
+            <a:avLst/>
+          </a:prstGeom>
+          <a:noFill/>
+        </p:spPr>
+        <p:txBody>
+          <a:bodyPr wrap="square" anchor="t" lIns="0" rIns="0" tIns="0" bIns="0">
+            <a:spAutoFit/>
+          </a:bodyPr>
+          <a:lstStyle/>
+          <a:p>
+            <a:pPr algn="l"/>
+            <a:r>
+              <a:rPr sz="700" b="0" i="0">
+                <a:solidFill>
+                  <a:srgbClr val="6B6690"/>
+                </a:solidFill>
+                <a:latin typeface="Calibri"/>
+              </a:rPr>
+              <a:t>Did Gold cause the orders?</a:t>
+            </a:r>
+          </a:p>
+        </p:txBody>
+      </p:sp>
+      <p:sp>
+        <p:nvSpPr>
+          <p:cNvPr id="21" name="Oval 20"/>
+          <p:cNvSpPr/>
+          <p:nvPr/>
+        </p:nvSpPr>
+        <p:spPr>
+          <a:xfrm>
+            <a:off x="5591270" y="6492240"/>
+            <a:ext cx="64008" cy="64008"/>
+          </a:xfrm>
+          <a:prstGeom prst="ellipse">
+            <a:avLst/>
+          </a:prstGeom>
+          <a:solidFill>
+            <a:srgbClr val="CFC9EE"/>
+          </a:solidFill>
+          <a:ln>
+            <a:noFill/>
+          </a:ln>
+          <a:effectLst/>
+        </p:spPr>
+        <p:style>
+          <a:lnRef idx="1">
+            <a:schemeClr val="accent1"/>
+          </a:lnRef>
+          <a:fillRef idx="3">
+            <a:schemeClr val="accent1"/>
+          </a:fillRef>
+          <a:effectRef idx="2">
+            <a:schemeClr val="accent1"/>
+          </a:effectRef>
+          <a:fontRef idx="minor">
+            <a:schemeClr val="lt1"/>
+          </a:fontRef>
+        </p:style>
+        <p:txBody>
+          <a:bodyPr rtlCol="0" anchor="ctr" wrap="square"/>
+          <a:lstStyle/>
+          <a:p>
+            <a:pPr algn="ctr"/>
+          </a:p>
+        </p:txBody>
+      </p:sp>
+      <p:sp>
+        <p:nvSpPr>
+          <p:cNvPr id="22" name="TextBox 21"/>
+          <p:cNvSpPr txBox="1"/>
+          <p:nvPr/>
+        </p:nvSpPr>
+        <p:spPr>
+          <a:xfrm>
+            <a:off x="5700998" y="6437376"/>
+            <a:ext cx="1608486" cy="152146"/>
+          </a:xfrm>
+          <a:prstGeom prst="rect">
+            <a:avLst/>
+          </a:prstGeom>
+          <a:noFill/>
+        </p:spPr>
+        <p:txBody>
+          <a:bodyPr wrap="square" anchor="t" lIns="0" rIns="0" tIns="0" bIns="0">
+            <a:spAutoFit/>
+          </a:bodyPr>
+          <a:lstStyle/>
+          <a:p>
+            <a:pPr algn="l"/>
+            <a:r>
+              <a:rPr sz="700" b="0" i="0">
+                <a:solidFill>
+                  <a:srgbClr val="6B6690"/>
+                </a:solidFill>
+                <a:latin typeface="Calibri"/>
+              </a:rPr>
+              <a:t>Is the app team's stage fine?</a:t>
+            </a:r>
+          </a:p>
+        </p:txBody>
+      </p:sp>
+      <p:sp>
+        <p:nvSpPr>
+          <p:cNvPr id="23" name="TextBox 22"/>
+          <p:cNvSpPr txBox="1"/>
+          <p:nvPr/>
+        </p:nvSpPr>
+        <p:spPr>
+          <a:xfrm>
+            <a:off x="10198303" y="6437376"/>
+            <a:ext cx="1463040" cy="160401"/>
+          </a:xfrm>
+          <a:prstGeom prst="rect">
+            <a:avLst/>
+          </a:prstGeom>
+          <a:noFill/>
+        </p:spPr>
+        <p:txBody>
+          <a:bodyPr wrap="square" anchor="t" lIns="0" rIns="0" tIns="0" bIns="0">
+            <a:spAutoFit/>
+          </a:bodyPr>
+          <a:lstStyle/>
+          <a:p>
             <a:pPr algn="r"/>
             <a:r>
               <a:rPr sz="750" b="0" i="0">
                 <a:solidFill>
-                  <a:srgbClr val="CFC9EE"/>
+                  <a:srgbClr val="6B6690"/>
                 </a:solidFill>
                 <a:latin typeface="Calibri"/>
               </a:rPr>
-              <a:t>6 / 13</a:t>
+              <a:t>S4  ·  6 / 14</a:t>
             </a:r>
           </a:p>
         </p:txBody>
@@ -11687,7 +13226,7 @@
                 </a:solidFill>
                 <a:latin typeface="Calibri"/>
               </a:rPr>
-              <a:t>WEEK 4  ·  DAY 4  ·  KALPA GLOBAL CAPABILITY CENTRE</a:t>
+              <a:t>WEEK 4  ·  DAY 4  ·  THE FALLBACK, IF THE TENTATIVE FACULTY BLOCK SLIPS</a:t>
             </a:r>
           </a:p>
         </p:txBody>
@@ -11722,7 +13261,7 @@
                 </a:solidFill>
                 <a:latin typeface="Georgia"/>
               </a:rPr>
-              <a:t>Monthly against weekly, done in class</a:t>
+              <a:t>The sale week: 53 percent, then 12</a:t>
             </a:r>
           </a:p>
         </p:txBody>
@@ -11757,21 +13296,45 @@
                 </a:solidFill>
                 <a:latin typeface="Calibri"/>
               </a:rPr>
-              <a:t>Does the mix story the morning told hold at a weekly granularity, or does noise take over?</a:t>
-            </a:r>
-          </a:p>
-        </p:txBody>
-      </p:sp>
-      <p:sp>
-        <p:nvSpPr>
-          <p:cNvPr id="9" name="TextBox 8"/>
+              <a:t>What does the weekly table show for the sale week against the weeks either side of it?</a:t>
+            </a:r>
+          </a:p>
+        </p:txBody>
+      </p:sp>
+      <p:pic>
+        <p:nvPicPr>
+          <p:cNvPr id="9" name="mermaid diagram" descr="C2_W04_D04_weekly_cohorts_STUDENT.png"/>
+          <p:cNvPicPr>
+            <a:picLocks noChangeAspect="1"/>
+          </p:cNvPicPr>
+          <p:nvPr/>
+        </p:nvPicPr>
+        <p:blipFill>
+          <a:blip r:embed="rId4"/>
+          <a:stretch>
+            <a:fillRect/>
+          </a:stretch>
+        </p:blipFill>
+        <p:spPr>
+          <a:xfrm>
+            <a:off x="2837436" y="1664208"/>
+            <a:ext cx="6516821" cy="2939288"/>
+          </a:xfrm>
+          <a:prstGeom prst="rect">
+            <a:avLst/>
+          </a:prstGeom>
+        </p:spPr>
+      </p:pic>
+      <p:sp>
+        <p:nvSpPr>
+          <p:cNvPr id="10" name="picture caption"/>
           <p:cNvSpPr txBox="1"/>
           <p:nvPr/>
         </p:nvSpPr>
         <p:spPr>
           <a:xfrm>
-            <a:off x="530352" y="1956816"/>
-            <a:ext cx="11130991" cy="495807"/>
+            <a:off x="530352" y="4640072"/>
+            <a:ext cx="11130991" cy="316992"/>
           </a:xfrm>
           <a:prstGeom prst="rect">
             <a:avLst/>
@@ -11784,233 +13347,19 @@
           </a:bodyPr>
           <a:lstStyle/>
           <a:p>
-            <a:pPr>
-              <a:spcAft>
-                <a:spcPts val="800"/>
-              </a:spcAft>
-            </a:pPr>
-            <a:r>
-              <a:rPr sz="1600" b="0" i="0">
-                <a:solidFill>
-                  <a:srgbClr val="1A1440"/>
+            <a:pPr algn="ctr"/>
+            <a:r>
+              <a:rPr sz="1200" b="0" i="0">
+                <a:solidFill>
+                  <a:srgbClr val="6B6690"/>
                 </a:solidFill>
                 <a:latin typeface="Calibri"/>
               </a:rPr>
-              <a:t>The row's after-class brief asked for a weekly cohort rerun. The question is which story the rerun keeps:</a:t>
-            </a:r>
-          </a:p>
-        </p:txBody>
-      </p:sp>
-      <p:graphicFrame>
-        <p:nvGraphicFramePr>
-          <p:cNvPr id="10" name="Table 9"/>
-          <p:cNvGraphicFramePr>
-            <a:graphicFrameLocks noGrp="1"/>
-          </p:cNvGraphicFramePr>
-          <p:nvPr/>
-        </p:nvGraphicFramePr>
-        <p:xfrm>
-          <a:off x="530352" y="2580640"/>
-          <a:ext cx="11130990" cy="1479296"/>
-        </p:xfrm>
-        <a:graphic>
-          <a:graphicData uri="http://schemas.openxmlformats.org/drawingml/2006/table">
-            <a:tbl>
-              <a:tblPr firstRow="0" bandRow="0">
-                <a:tableStyleId>{2D5ABB26-0587-4C30-8999-92F81FD0307C}</a:tableStyleId>
-              </a:tblPr>
-              <a:tblGrid>
-                <a:gridCol w="4606459"/>
-                <a:gridCol w="6524531"/>
-              </a:tblGrid>
-              <a:tr h="369824">
-                <a:tc>
-                  <a:txBody>
-                    <a:bodyPr/>
-                    <a:lstStyle/>
-                    <a:p>
-                      <a:r>
-                        <a:rPr sz="1450" b="1" i="0">
-                          <a:solidFill>
-                            <a:srgbClr val="FFFFFF"/>
-                          </a:solidFill>
-                          <a:latin typeface="Calibri"/>
-                        </a:rPr>
-                        <a:t>What might change at the weekly axis</a:t>
-                      </a:r>
-                    </a:p>
-                  </a:txBody>
-                  <a:tcPr marL="101600" marR="101600" marT="38100" marB="38100" anchor="ctr">
-                    <a:solidFill>
-                      <a:srgbClr val="1A0F5C"/>
-                    </a:solidFill>
-                  </a:tcPr>
-                </a:tc>
-                <a:tc>
-                  <a:txBody>
-                    <a:bodyPr/>
-                    <a:lstStyle/>
-                    <a:p>
-                      <a:r>
-                        <a:rPr sz="1450" b="1" i="0">
-                          <a:solidFill>
-                            <a:srgbClr val="FFFFFF"/>
-                          </a:solidFill>
-                          <a:latin typeface="Calibri"/>
-                        </a:rPr>
-                        <a:t>Which story holds, which breaks</a:t>
-                      </a:r>
-                    </a:p>
-                  </a:txBody>
-                  <a:tcPr marL="101600" marR="101600" marT="38100" marB="38100" anchor="ctr">
-                    <a:solidFill>
-                      <a:srgbClr val="1A0F5C"/>
-                    </a:solidFill>
-                  </a:tcPr>
-                </a:tc>
-              </a:tr>
-              <a:tr h="369824">
-                <a:tc>
-                  <a:txBody>
-                    <a:bodyPr/>
-                    <a:lstStyle/>
-                    <a:p>
-                      <a:r>
-                        <a:rPr sz="1400" b="0" i="0">
-                          <a:solidFill>
-                            <a:srgbClr val="1A1440"/>
-                          </a:solidFill>
-                          <a:latin typeface="Calibri"/>
-                        </a:rPr>
-                        <a:t>Each cohort smaller, so curves noisier</a:t>
-                      </a:r>
-                    </a:p>
-                  </a:txBody>
-                  <a:tcPr marL="101600" marR="101600" marT="38100" marB="38100" anchor="ctr">
-                    <a:solidFill>
-                      <a:srgbClr val="FFFFFF"/>
-                    </a:solidFill>
-                  </a:tcPr>
-                </a:tc>
-                <a:tc>
-                  <a:txBody>
-                    <a:bodyPr/>
-                    <a:lstStyle/>
-                    <a:p>
-                      <a:r>
-                        <a:rPr sz="1400" b="0" i="0">
-                          <a:solidFill>
-                            <a:srgbClr val="1A1440"/>
-                          </a:solidFill>
-                          <a:latin typeface="Calibri"/>
-                        </a:rPr>
-                        <a:t>The paradox holds; the mix move is structural</a:t>
-                      </a:r>
-                    </a:p>
-                  </a:txBody>
-                  <a:tcPr marL="101600" marR="101600" marT="38100" marB="38100" anchor="ctr">
-                    <a:solidFill>
-                      <a:srgbClr val="FFFFFF"/>
-                    </a:solidFill>
-                  </a:tcPr>
-                </a:tc>
-              </a:tr>
-              <a:tr h="369824">
-                <a:tc>
-                  <a:txBody>
-                    <a:bodyPr/>
-                    <a:lstStyle/>
-                    <a:p>
-                      <a:r>
-                        <a:rPr sz="1400" b="0" i="0">
-                          <a:solidFill>
-                            <a:srgbClr val="1A1440"/>
-                          </a:solidFill>
-                          <a:latin typeface="Calibri"/>
-                        </a:rPr>
-                        <a:t>Seasonal weekends mix inside each month</a:t>
-                      </a:r>
-                    </a:p>
-                  </a:txBody>
-                  <a:tcPr marL="101600" marR="101600" marT="38100" marB="38100" anchor="ctr">
-                    <a:solidFill>
-                      <a:srgbClr val="F4F2FA"/>
-                    </a:solidFill>
-                  </a:tcPr>
-                </a:tc>
-                <a:tc>
-                  <a:txBody>
-                    <a:bodyPr/>
-                    <a:lstStyle/>
-                    <a:p>
-                      <a:r>
-                        <a:rPr sz="1400" b="0" i="0">
-                          <a:solidFill>
-                            <a:srgbClr val="1A1440"/>
-                          </a:solidFill>
-                          <a:latin typeface="Calibri"/>
-                        </a:rPr>
-                        <a:t>The denominator shift is where the lift sits</a:t>
-                      </a:r>
-                    </a:p>
-                  </a:txBody>
-                  <a:tcPr marL="101600" marR="101600" marT="38100" marB="38100" anchor="ctr">
-                    <a:solidFill>
-                      <a:srgbClr val="F4F2FA"/>
-                    </a:solidFill>
-                  </a:tcPr>
-                </a:tc>
-              </a:tr>
-              <a:tr h="369824">
-                <a:tc>
-                  <a:txBody>
-                    <a:bodyPr/>
-                    <a:lstStyle/>
-                    <a:p>
-                      <a:r>
-                        <a:rPr sz="1400" b="0" i="0">
-                          <a:solidFill>
-                            <a:srgbClr val="1A1440"/>
-                          </a:solidFill>
-                          <a:latin typeface="Calibri"/>
-                        </a:rPr>
-                        <a:t>A sale week isolated as its own cohort</a:t>
-                      </a:r>
-                    </a:p>
-                  </a:txBody>
-                  <a:tcPr marL="101600" marR="101600" marT="38100" marB="38100" anchor="ctr">
-                    <a:solidFill>
-                      <a:srgbClr val="FFFFFF"/>
-                    </a:solidFill>
-                  </a:tcPr>
-                </a:tc>
-                <a:tc>
-                  <a:txBody>
-                    <a:bodyPr/>
-                    <a:lstStyle/>
-                    <a:p>
-                      <a:r>
-                        <a:rPr sz="1400" b="0" i="0">
-                          <a:solidFill>
-                            <a:srgbClr val="1A1440"/>
-                          </a:solidFill>
-                          <a:latin typeface="Calibri"/>
-                        </a:rPr>
-                        <a:t>The sale-week cohort reads lowest, as the monthly view showed</a:t>
-                      </a:r>
-                    </a:p>
-                  </a:txBody>
-                  <a:tcPr marL="101600" marR="101600" marT="38100" marB="38100" anchor="ctr">
-                    <a:solidFill>
-                      <a:srgbClr val="FFFFFF"/>
-                    </a:solidFill>
-                  </a:tcPr>
-                </a:tc>
-              </a:tr>
-            </a:tbl>
-          </a:graphicData>
-        </a:graphic>
-      </p:graphicFrame>
+              <a:t>Weekly cohorts: the sale week orders once, then falls away</a:t>
+            </a:r>
+          </a:p>
+        </p:txBody>
+      </p:sp>
       <p:sp>
         <p:nvSpPr>
           <p:cNvPr id="11" name="TextBox 10"/>
@@ -12019,8 +13368,8 @@
         </p:nvSpPr>
         <p:spPr>
           <a:xfrm>
-            <a:off x="530352" y="4315968"/>
-            <a:ext cx="11130991" cy="495807"/>
+            <a:off x="530352" y="4966208"/>
+            <a:ext cx="11130991" cy="1233424"/>
           </a:xfrm>
           <a:prstGeom prst="rect">
             <a:avLst/>
@@ -12033,11 +13382,6 @@
           </a:bodyPr>
           <a:lstStyle/>
           <a:p>
-            <a:pPr>
-              <a:spcAft>
-                <a:spcPts val="800"/>
-              </a:spcAft>
-            </a:pPr>
             <a:r>
               <a:rPr sz="1600" b="0" i="0">
                 <a:solidFill>
@@ -12045,7 +13389,7 @@
                 </a:solidFill>
                 <a:latin typeface="Calibri"/>
               </a:rPr>
-              <a:t>The method survives the change of axis. The specific numbers do not.</a:t>
+              <a:t>Percent of each weekly cohort that ordered in each full week after joining. The sale week's 9,108 members ordered in their first week, while the discount lasted, and then fell off a cliff: 53 to 12 percent, the steepest fall of the six. The five other weeks, 1,112 to 1,247 members each, start between 27 and 38 percent.</a:t>
             </a:r>
           </a:p>
         </p:txBody>
@@ -12103,7 +13447,7 @@
         <p:spPr>
           <a:xfrm>
             <a:off x="640080" y="6437376"/>
-            <a:ext cx="1608486" cy="152146"/>
+            <a:ext cx="1516475" cy="152146"/>
           </a:xfrm>
           <a:prstGeom prst="rect">
             <a:avLst/>
@@ -12124,7 +13468,7 @@
                 </a:solidFill>
                 <a:latin typeface="Calibri"/>
               </a:rPr>
-              <a:t>Weaned users and the mix move</a:t>
+              <a:t>Can weaning lift retention?</a:t>
             </a:r>
           </a:p>
         </p:txBody>
@@ -12137,7 +13481,7 @@
         </p:nvSpPr>
         <p:spPr>
           <a:xfrm>
-            <a:off x="2340006" y="6492240"/>
+            <a:off x="2247995" y="6492240"/>
             <a:ext cx="64008" cy="64008"/>
           </a:xfrm>
           <a:prstGeom prst="ellipse">
@@ -12181,8 +13525,8 @@
         </p:nvSpPr>
         <p:spPr>
           <a:xfrm>
-            <a:off x="2449734" y="6437376"/>
-            <a:ext cx="2022538" cy="152146"/>
+            <a:off x="2357723" y="6437376"/>
+            <a:ext cx="1470469" cy="152146"/>
           </a:xfrm>
           <a:prstGeom prst="rect">
             <a:avLst/>
@@ -12203,7 +13547,7 @@
                 </a:solidFill>
                 <a:latin typeface="Calibri"/>
               </a:rPr>
-              <a:t>Monthly against weekly on today's data</a:t>
+              <a:t>Does a weekly table agree?</a:t>
             </a:r>
           </a:p>
         </p:txBody>
@@ -12216,7 +13560,7 @@
         </p:nvSpPr>
         <p:spPr>
           <a:xfrm>
-            <a:off x="4563713" y="6492240"/>
+            <a:off x="3919632" y="6492240"/>
             <a:ext cx="64008" cy="64008"/>
           </a:xfrm>
           <a:prstGeom prst="ellipse">
@@ -12260,8 +13604,8 @@
         </p:nvSpPr>
         <p:spPr>
           <a:xfrm>
-            <a:off x="4673441" y="6437376"/>
-            <a:ext cx="2194560" cy="152146"/>
+            <a:off x="4029360" y="6437376"/>
+            <a:ext cx="1470469" cy="152146"/>
           </a:xfrm>
           <a:prstGeom prst="rect">
             <a:avLst/>
@@ -12282,7 +13626,7 @@
                 </a:solidFill>
                 <a:latin typeface="Calibri"/>
               </a:rPr>
-              <a:t>Zomato's 60 percent rise, kept descriptive</a:t>
+              <a:t>Did Gold cause the orders?</a:t>
             </a:r>
           </a:p>
         </p:txBody>
@@ -12295,7 +13639,7 @@
         </p:nvSpPr>
         <p:spPr>
           <a:xfrm>
-            <a:off x="6959441" y="6492240"/>
+            <a:off x="5591270" y="6492240"/>
             <a:ext cx="64008" cy="64008"/>
           </a:xfrm>
           <a:prstGeom prst="ellipse">
@@ -12339,8 +13683,8 @@
         </p:nvSpPr>
         <p:spPr>
           <a:xfrm>
-            <a:off x="7069169" y="6437376"/>
-            <a:ext cx="504348" cy="152146"/>
+            <a:off x="5700998" y="6437376"/>
+            <a:ext cx="1608486" cy="152146"/>
           </a:xfrm>
           <a:prstGeom prst="rect">
             <a:avLst/>
@@ -12361,7 +13705,7 @@
                 </a:solidFill>
                 <a:latin typeface="Calibri"/>
               </a:rPr>
-              <a:t>Close</a:t>
+              <a:t>Is the app team's stage fine?</a:t>
             </a:r>
           </a:p>
         </p:txBody>
@@ -12396,7 +13740,7 @@
                 </a:solidFill>
                 <a:latin typeface="Calibri"/>
               </a:rPr>
-              <a:t>S4  ·  7 / 13</a:t>
+              <a:t>S5  ·  7 / 14</a:t>
             </a:r>
           </a:p>
         </p:txBody>
@@ -12567,7 +13911,7 @@
                 </a:solidFill>
                 <a:latin typeface="Calibri"/>
               </a:rPr>
-              <a:t>WEEK 4  ·  DAY 4  ·  KALPA GLOBAL CAPABILITY CENTRE</a:t>
+              <a:t>WEEK 4  ·  DAY 4  ·  THE FALLBACK, IF THE TENTATIVE FACULTY BLOCK SLIPS</a:t>
             </a:r>
           </a:p>
         </p:txBody>
@@ -12602,7 +13946,7 @@
                 </a:solidFill>
                 <a:latin typeface="Georgia"/>
               </a:rPr>
-              <a:t>Where the mix move sits in the formula</a:t>
+              <a:t>The method survives; the words change</a:t>
             </a:r>
           </a:p>
         </p:txBody>
@@ -12637,60 +13981,21 @@
                 </a:solidFill>
                 <a:latin typeface="Calibri"/>
               </a:rPr>
-              <a:t>Which term is doing the heavy lifting in a 55 to 61 lift?</a:t>
-            </a:r>
-          </a:p>
-        </p:txBody>
-      </p:sp>
-      <p:sp>
-        <p:nvSpPr>
-          <p:cNvPr id="9" name="TextBox 8"/>
-          <p:cNvSpPr txBox="1"/>
-          <p:nvPr/>
-        </p:nvSpPr>
-        <p:spPr>
-          <a:xfrm>
-            <a:off x="530352" y="1956816"/>
-            <a:ext cx="11130991" cy="495807"/>
-          </a:xfrm>
-          <a:prstGeom prst="rect">
-            <a:avLst/>
-          </a:prstGeom>
-          <a:noFill/>
-        </p:spPr>
-        <p:txBody>
-          <a:bodyPr wrap="square" anchor="t" lIns="0" rIns="0" tIns="0" bIns="0">
-            <a:spAutoFit/>
-          </a:bodyPr>
-          <a:lstStyle/>
-          <a:p>
-            <a:pPr>
-              <a:spcAft>
-                <a:spcPts val="800"/>
-              </a:spcAft>
-            </a:pPr>
-            <a:r>
-              <a:rPr sz="1600" b="0" i="0">
-                <a:solidFill>
-                  <a:srgbClr val="1A1440"/>
-                </a:solidFill>
-                <a:latin typeface="Calibri"/>
-              </a:rPr>
-              <a:t>For a blended retention $B = \frac{\sum_c N_c r_c}{\sum_c N_c}$, four moves can lift it:</a:t>
+              <a:t>Which sentence of the morning holds on a weekly table, and which has to be rewritten?</a:t>
             </a:r>
           </a:p>
         </p:txBody>
       </p:sp>
       <p:graphicFrame>
         <p:nvGraphicFramePr>
-          <p:cNvPr id="10" name="Table 9"/>
+          <p:cNvPr id="9" name="Table 8"/>
           <p:cNvGraphicFramePr>
             <a:graphicFrameLocks noGrp="1"/>
           </p:cNvGraphicFramePr>
           <p:nvPr/>
         </p:nvGraphicFramePr>
         <p:xfrm>
-          <a:off x="530352" y="2580640"/>
+          <a:off x="530352" y="1956816"/>
           <a:ext cx="11130990" cy="1849120"/>
         </p:xfrm>
         <a:graphic>
@@ -12700,8 +14005,8 @@
                 <a:tableStyleId>{2D5ABB26-0587-4C30-8999-92F81FD0307C}</a:tableStyleId>
               </a:tblPr>
               <a:tblGrid>
-                <a:gridCol w="5619128"/>
-                <a:gridCol w="5511862"/>
+                <a:gridCol w="3881449"/>
+                <a:gridCol w="7249541"/>
               </a:tblGrid>
               <a:tr h="369824">
                 <a:tc>
@@ -12716,7 +14021,7 @@
                           </a:solidFill>
                           <a:latin typeface="Calibri"/>
                         </a:rPr>
-                        <a:t>Move</a:t>
+                        <a:t>The morning said</a:t>
                       </a:r>
                     </a:p>
                   </a:txBody>
@@ -12738,7 +14043,7 @@
                           </a:solidFill>
                           <a:latin typeface="Calibri"/>
                         </a:rPr>
-                        <a:t>What the room would see</a:t>
+                        <a:t>On the weekly table</a:t>
                       </a:r>
                     </a:p>
                   </a:txBody>
@@ -12762,7 +14067,7 @@
                           </a:solidFill>
                           <a:latin typeface="Calibri"/>
                         </a:rPr>
-                        <a:t>Each $r_c$ rises (behaviour improves)</a:t>
+                        <a:t>Every cohort falls with age</a:t>
                       </a:r>
                     </a:p>
                   </a:txBody>
@@ -12784,7 +14089,7 @@
                           </a:solidFill>
                           <a:latin typeface="Calibri"/>
                         </a:rPr>
-                        <a:t>Every triangle cell goes up</a:t>
+                        <a:t>Holds, with noise: weekly cohorts of 1,112 to 1,247 members</a:t>
                       </a:r>
                     </a:p>
                   </a:txBody>
@@ -12808,7 +14113,7 @@
                           </a:solidFill>
                           <a:latin typeface="Calibri"/>
                         </a:rPr>
-                        <a:t>The weak-$r_c$ cohorts' $N_c$ shrink (weaning)</a:t>
+                        <a:t>The sale cohort is the weakest</a:t>
                       </a:r>
                     </a:p>
                   </a:txBody>
@@ -12830,7 +14135,7 @@
                           </a:solidFill>
                           <a:latin typeface="Calibri"/>
                         </a:rPr>
-                        <a:t>Those rows disappear; the remaining average rises</a:t>
+                        <a:t>Holds after its first week; in its first week it looks strongest</a:t>
                       </a:r>
                     </a:p>
                   </a:txBody>
@@ -12854,7 +14159,7 @@
                           </a:solidFill>
                           <a:latin typeface="Calibri"/>
                         </a:rPr>
-                        <a:t>New cohorts have higher $r_c$ (better acquisition)</a:t>
+                        <a:t>Rates near 38 percent</a:t>
                       </a:r>
                     </a:p>
                   </a:txBody>
@@ -12876,7 +14181,7 @@
                           </a:solidFill>
                           <a:latin typeface="Calibri"/>
                         </a:rPr>
-                        <a:t>Later rows start higher than earlier ones</a:t>
+                        <a:t>Weekly rates are lower: ordering in a given week is rarer than in a month</a:t>
                       </a:r>
                     </a:p>
                   </a:txBody>
@@ -12900,7 +14205,7 @@
                           </a:solidFill>
                           <a:latin typeface="Calibri"/>
                         </a:rPr>
-                        <a:t>The mix shifts toward higher-$r_c$ cohorts</a:t>
+                        <a:t>The last month counts</a:t>
                       </a:r>
                     </a:p>
                   </a:txBody>
@@ -12922,7 +14227,7 @@
                           </a:solidFill>
                           <a:latin typeface="Calibri"/>
                         </a:rPr>
-                        <a:t>Earlier rows unchanged; later rows pull the blend</a:t>
+                        <a:t>The last week is partial and leaves the table</a:t>
                       </a:r>
                     </a:p>
                   </a:txBody>
@@ -12939,46 +14244,7 @@
       </p:graphicFrame>
       <p:sp>
         <p:nvSpPr>
-          <p:cNvPr id="11" name="TextBox 10"/>
-          <p:cNvSpPr txBox="1"/>
-          <p:nvPr/>
-        </p:nvSpPr>
-        <p:spPr>
-          <a:xfrm>
-            <a:off x="530352" y="4685792"/>
-            <a:ext cx="11130991" cy="495807"/>
-          </a:xfrm>
-          <a:prstGeom prst="rect">
-            <a:avLst/>
-          </a:prstGeom>
-          <a:noFill/>
-        </p:spPr>
-        <p:txBody>
-          <a:bodyPr wrap="square" anchor="t" lIns="0" rIns="0" tIns="0" bIns="0">
-            <a:spAutoFit/>
-          </a:bodyPr>
-          <a:lstStyle/>
-          <a:p>
-            <a:pPr>
-              <a:spcAft>
-                <a:spcPts val="800"/>
-              </a:spcAft>
-            </a:pPr>
-            <a:r>
-              <a:rPr sz="1600" b="0" i="0">
-                <a:solidFill>
-                  <a:srgbClr val="1A1440"/>
-                </a:solidFill>
-                <a:latin typeface="Calibri"/>
-              </a:rPr>
-              <a:t>The dashboard shows $B$, never which lever moved. The triangle shows every row that moved.</a:t>
-            </a:r>
-          </a:p>
-        </p:txBody>
-      </p:sp>
-      <p:sp>
-        <p:nvSpPr>
-          <p:cNvPr id="12" name="Oval 11"/>
+          <p:cNvPr id="10" name="Oval 9"/>
           <p:cNvSpPr/>
           <p:nvPr/>
         </p:nvSpPr>
@@ -13022,14 +14288,14 @@
       </p:sp>
       <p:sp>
         <p:nvSpPr>
-          <p:cNvPr id="13" name="TextBox 12"/>
+          <p:cNvPr id="11" name="TextBox 10"/>
           <p:cNvSpPr txBox="1"/>
           <p:nvPr/>
         </p:nvSpPr>
         <p:spPr>
           <a:xfrm>
             <a:off x="640080" y="6437376"/>
-            <a:ext cx="1608486" cy="152146"/>
+            <a:ext cx="1516475" cy="152146"/>
           </a:xfrm>
           <a:prstGeom prst="rect">
             <a:avLst/>
@@ -13050,20 +14316,20 @@
                 </a:solidFill>
                 <a:latin typeface="Calibri"/>
               </a:rPr>
-              <a:t>Weaned users and the mix move</a:t>
-            </a:r>
-          </a:p>
-        </p:txBody>
-      </p:sp>
-      <p:sp>
-        <p:nvSpPr>
-          <p:cNvPr id="14" name="Oval 13"/>
+              <a:t>Can weaning lift retention?</a:t>
+            </a:r>
+          </a:p>
+        </p:txBody>
+      </p:sp>
+      <p:sp>
+        <p:nvSpPr>
+          <p:cNvPr id="12" name="Oval 11"/>
           <p:cNvSpPr/>
           <p:nvPr/>
         </p:nvSpPr>
         <p:spPr>
           <a:xfrm>
-            <a:off x="2340006" y="6492240"/>
+            <a:off x="2247995" y="6492240"/>
             <a:ext cx="64008" cy="64008"/>
           </a:xfrm>
           <a:prstGeom prst="ellipse">
@@ -13101,14 +14367,14 @@
       </p:sp>
       <p:sp>
         <p:nvSpPr>
-          <p:cNvPr id="15" name="TextBox 14"/>
+          <p:cNvPr id="13" name="TextBox 12"/>
           <p:cNvSpPr txBox="1"/>
           <p:nvPr/>
         </p:nvSpPr>
         <p:spPr>
           <a:xfrm>
-            <a:off x="2449734" y="6437376"/>
-            <a:ext cx="2022538" cy="152146"/>
+            <a:off x="2357723" y="6437376"/>
+            <a:ext cx="1470469" cy="152146"/>
           </a:xfrm>
           <a:prstGeom prst="rect">
             <a:avLst/>
@@ -13129,20 +14395,20 @@
                 </a:solidFill>
                 <a:latin typeface="Calibri"/>
               </a:rPr>
-              <a:t>Monthly against weekly on today's data</a:t>
-            </a:r>
-          </a:p>
-        </p:txBody>
-      </p:sp>
-      <p:sp>
-        <p:nvSpPr>
-          <p:cNvPr id="16" name="Oval 15"/>
+              <a:t>Does a weekly table agree?</a:t>
+            </a:r>
+          </a:p>
+        </p:txBody>
+      </p:sp>
+      <p:sp>
+        <p:nvSpPr>
+          <p:cNvPr id="14" name="Oval 13"/>
           <p:cNvSpPr/>
           <p:nvPr/>
         </p:nvSpPr>
         <p:spPr>
           <a:xfrm>
-            <a:off x="4563713" y="6492240"/>
+            <a:off x="3919632" y="6492240"/>
             <a:ext cx="64008" cy="64008"/>
           </a:xfrm>
           <a:prstGeom prst="ellipse">
@@ -13180,14 +14446,14 @@
       </p:sp>
       <p:sp>
         <p:nvSpPr>
-          <p:cNvPr id="17" name="TextBox 16"/>
+          <p:cNvPr id="15" name="TextBox 14"/>
           <p:cNvSpPr txBox="1"/>
           <p:nvPr/>
         </p:nvSpPr>
         <p:spPr>
           <a:xfrm>
-            <a:off x="4673441" y="6437376"/>
-            <a:ext cx="2194560" cy="152146"/>
+            <a:off x="4029360" y="6437376"/>
+            <a:ext cx="1470469" cy="152146"/>
           </a:xfrm>
           <a:prstGeom prst="rect">
             <a:avLst/>
@@ -13208,20 +14474,20 @@
                 </a:solidFill>
                 <a:latin typeface="Calibri"/>
               </a:rPr>
-              <a:t>Zomato's 60 percent rise, kept descriptive</a:t>
-            </a:r>
-          </a:p>
-        </p:txBody>
-      </p:sp>
-      <p:sp>
-        <p:nvSpPr>
-          <p:cNvPr id="18" name="Oval 17"/>
+              <a:t>Did Gold cause the orders?</a:t>
+            </a:r>
+          </a:p>
+        </p:txBody>
+      </p:sp>
+      <p:sp>
+        <p:nvSpPr>
+          <p:cNvPr id="16" name="Oval 15"/>
           <p:cNvSpPr/>
           <p:nvPr/>
         </p:nvSpPr>
         <p:spPr>
           <a:xfrm>
-            <a:off x="6959441" y="6492240"/>
+            <a:off x="5591270" y="6492240"/>
             <a:ext cx="64008" cy="64008"/>
           </a:xfrm>
           <a:prstGeom prst="ellipse">
@@ -13259,14 +14525,14 @@
       </p:sp>
       <p:sp>
         <p:nvSpPr>
-          <p:cNvPr id="19" name="TextBox 18"/>
+          <p:cNvPr id="17" name="TextBox 16"/>
           <p:cNvSpPr txBox="1"/>
           <p:nvPr/>
         </p:nvSpPr>
         <p:spPr>
           <a:xfrm>
-            <a:off x="7069169" y="6437376"/>
-            <a:ext cx="504348" cy="152146"/>
+            <a:off x="5700998" y="6437376"/>
+            <a:ext cx="1608486" cy="152146"/>
           </a:xfrm>
           <a:prstGeom prst="rect">
             <a:avLst/>
@@ -13287,14 +14553,14 @@
                 </a:solidFill>
                 <a:latin typeface="Calibri"/>
               </a:rPr>
-              <a:t>Close</a:t>
-            </a:r>
-          </a:p>
-        </p:txBody>
-      </p:sp>
-      <p:sp>
-        <p:nvSpPr>
-          <p:cNvPr id="20" name="TextBox 19"/>
+              <a:t>Is the app team's stage fine?</a:t>
+            </a:r>
+          </a:p>
+        </p:txBody>
+      </p:sp>
+      <p:sp>
+        <p:nvSpPr>
+          <p:cNvPr id="18" name="TextBox 17"/>
           <p:cNvSpPr txBox="1"/>
           <p:nvPr/>
         </p:nvSpPr>
@@ -13322,7 +14588,7 @@
                 </a:solidFill>
                 <a:latin typeface="Calibri"/>
               </a:rPr>
-              <a:t>S5  ·  8 / 13</a:t>
+              <a:t>S6  ·  8 / 14</a:t>
             </a:r>
           </a:p>
         </p:txBody>
@@ -13528,7 +14794,7 @@
                 </a:solidFill>
                 <a:latin typeface="Georgia"/>
               </a:rPr>
-              <a:t>03</a:t>
+              <a:t>09</a:t>
             </a:r>
           </a:p>
         </p:txBody>
@@ -13563,7 +14829,7 @@
                 </a:solidFill>
                 <a:latin typeface="Georgia"/>
               </a:rPr>
-              <a:t>Zomato's 60 percent rise, kept descriptive</a:t>
+              <a:t>Did Gold cause the orders?</a:t>
             </a:r>
           </a:p>
         </p:txBody>
@@ -13577,7 +14843,7 @@
         <p:spPr>
           <a:xfrm>
             <a:off x="731519" y="3520440"/>
-            <a:ext cx="9509760" cy="284226"/>
+            <a:ext cx="9509760" cy="531876"/>
           </a:xfrm>
           <a:prstGeom prst="rect">
             <a:avLst/>
@@ -13598,7 +14864,7 @@
                 </a:solidFill>
                 <a:latin typeface="Calibri"/>
               </a:rPr>
-              <a:t>A frequency rise after a decision is self-selection, not causation.</a:t>
+              <a:t>Zomato says Gold members order about 60 percent more after joining; what comparison would let anyone say Gold caused it?</a:t>
             </a:r>
           </a:p>
         </p:txBody>
@@ -13612,7 +14878,7 @@
         <p:spPr>
           <a:xfrm>
             <a:off x="731519" y="5074920"/>
-            <a:ext cx="2083023" cy="310896"/>
+            <a:ext cx="1964591" cy="310896"/>
           </a:xfrm>
           <a:prstGeom prst="roundRect">
             <a:avLst>
@@ -13653,7 +14919,7 @@
                 </a:solidFill>
                 <a:latin typeface="Calibri"/>
               </a:rPr>
-              <a:t>Weaned users and the mix move</a:t>
+              <a:t>Can weaning lift retention?</a:t>
             </a:r>
           </a:p>
         </p:txBody>
@@ -13666,8 +14932,8 @@
         </p:nvSpPr>
         <p:spPr>
           <a:xfrm>
-            <a:off x="2924271" y="5074920"/>
-            <a:ext cx="2148840" cy="310896"/>
+            <a:off x="2805839" y="5074920"/>
+            <a:ext cx="1905375" cy="310896"/>
           </a:xfrm>
           <a:prstGeom prst="roundRect">
             <a:avLst>
@@ -13708,7 +14974,7 @@
                 </a:solidFill>
                 <a:latin typeface="Calibri"/>
               </a:rPr>
-              <a:t>Monthly against weekly on today's data</a:t>
+              <a:t>Does a weekly table agree?</a:t>
             </a:r>
           </a:p>
         </p:txBody>
@@ -13721,8 +14987,8 @@
         </p:nvSpPr>
         <p:spPr>
           <a:xfrm>
-            <a:off x="5182839" y="5074920"/>
-            <a:ext cx="2148840" cy="310896"/>
+            <a:off x="4820942" y="5074920"/>
+            <a:ext cx="1905375" cy="310896"/>
           </a:xfrm>
           <a:prstGeom prst="roundRect">
             <a:avLst>
@@ -13763,7 +15029,7 @@
                 </a:solidFill>
                 <a:latin typeface="Calibri"/>
               </a:rPr>
-              <a:t>Zomato's 60 percent rise, kept descriptive</a:t>
+              <a:t>Did Gold cause the orders?</a:t>
             </a:r>
           </a:p>
         </p:txBody>
@@ -13776,8 +15042,8 @@
         </p:nvSpPr>
         <p:spPr>
           <a:xfrm>
-            <a:off x="7441407" y="5074920"/>
-            <a:ext cx="661839" cy="310896"/>
+            <a:off x="6836045" y="5074920"/>
+            <a:ext cx="2083023" cy="310896"/>
           </a:xfrm>
           <a:prstGeom prst="roundRect">
             <a:avLst>
@@ -13818,7 +15084,7 @@
                 </a:solidFill>
                 <a:latin typeface="Calibri"/>
               </a:rPr>
-              <a:t>Close</a:t>
+              <a:t>Is the app team's stage fine?</a:t>
             </a:r>
           </a:p>
         </p:txBody>
@@ -13853,7 +15119,7 @@
                 </a:solidFill>
                 <a:latin typeface="Calibri"/>
               </a:rPr>
-              <a:t>Week 4 Day 4 fallback: the weaned-users hour</a:t>
+              <a:t>Week 4 Day 4: the fallback block</a:t>
             </a:r>
           </a:p>
         </p:txBody>
@@ -13888,7 +15154,7 @@
                 </a:solidFill>
                 <a:latin typeface="Calibri"/>
               </a:rPr>
-              <a:t>9 / 13</a:t>
+              <a:t>9 / 14</a:t>
             </a:r>
           </a:p>
         </p:txBody>

--- a/content/W04/D4/slides/C2_W04_D04_fallback_STUDENT.pptx
+++ b/content/W04/D4/slides/C2_W04_D04_fallback_STUDENT.pptx
@@ -13389,7 +13389,7 @@
                 </a:solidFill>
                 <a:latin typeface="Calibri"/>
               </a:rPr>
-              <a:t>Percent of each weekly cohort that ordered in each full week after joining. The sale week's 9,108 members ordered in their first week, while the discount lasted, and then fell off a cliff: 53 to 12 percent, the steepest fall of the six. The five other weeks, 1,112 to 1,247 members each, start between 27 and 38 percent.</a:t>
+              <a:t>Percent of each weekly cohort that ordered in each full week after joining. The week of 17 August, the sale week, brought 9,108 members, the 8,027 who joined on the sale's discount among them. They ordered at 53 percent in their first full week, the most of any cohort, and then fell off a cliff to 12, the steepest fall of the six. The five other weeks, 1,112 to 1,247 members each, start between 27 and 38 percent.</a:t>
             </a:r>
           </a:p>
         </p:txBody>
@@ -13996,7 +13996,7 @@
         </p:nvGraphicFramePr>
         <p:xfrm>
           <a:off x="530352" y="1956816"/>
-          <a:ext cx="11130990" cy="1849120"/>
+          <a:ext cx="11130990" cy="2332736"/>
         </p:xfrm>
         <a:graphic>
           <a:graphicData uri="http://schemas.openxmlformats.org/drawingml/2006/table">
@@ -14005,8 +14005,8 @@
                 <a:tableStyleId>{2D5ABB26-0587-4C30-8999-92F81FD0307C}</a:tableStyleId>
               </a:tblPr>
               <a:tblGrid>
-                <a:gridCol w="3881449"/>
-                <a:gridCol w="7249541"/>
+                <a:gridCol w="4389567"/>
+                <a:gridCol w="6741423"/>
               </a:tblGrid>
               <a:tr h="369824">
                 <a:tc>
@@ -14100,7 +14100,7 @@
                   </a:tcPr>
                 </a:tc>
               </a:tr>
-              <a:tr h="369824">
+              <a:tr h="611632">
                 <a:tc>
                   <a:txBody>
                     <a:bodyPr/>
@@ -14113,7 +14113,7 @@
                           </a:solidFill>
                           <a:latin typeface="Calibri"/>
                         </a:rPr>
-                        <a:t>The sale cohort is the weakest</a:t>
+                        <a:t>The sale-week members are the weakest</a:t>
                       </a:r>
                     </a:p>
                   </a:txBody>
@@ -14135,7 +14135,7 @@
                           </a:solidFill>
                           <a:latin typeface="Calibri"/>
                         </a:rPr>
-                        <a:t>Holds after its first week; in its first week it looks strongest</a:t>
+                        <a:t>Holds for the sale week's cohort after its first week; in that first week it looks strongest</a:t>
                       </a:r>
                     </a:p>
                   </a:txBody>
@@ -14146,7 +14146,7 @@
                   </a:tcPr>
                 </a:tc>
               </a:tr>
-              <a:tr h="369824">
+              <a:tr h="611632">
                 <a:tc>
                   <a:txBody>
                     <a:bodyPr/>

--- a/content/W04/D4/slides/C2_W04_D04_fallback_STUDENT.pptx
+++ b/content/W04/D4/slides/C2_W04_D04_fallback_STUDENT.pptx
@@ -5458,7 +5458,7 @@
                 </a:solidFill>
                 <a:latin typeface="Calibri"/>
               </a:rPr>
-              <a:t>Zomato's shareholder letter of 19 May 2023 (checked 12 October 2026) says Gold reached 1.8 million members in Q4 FY23, its members' orders were about 30 percent of food delivery GOV in March 2023, and their order frequency rose about 60 percent after joining. The number describes members; it does not show what Gold caused.</a:t>
+              <a:t>Zomato's shareholder letter of 19 May 2023 (checked 12 October 2026) says Gold reached 1.8 million members in Q4 FY23 (January to March 2023), its members' orders were about 30 percent of food delivery GOV, gross order value, the value of all orders placed, in March 2023, and their order frequency rose about 60 percent after joining. The number describes members; it does not show what Gold caused.</a:t>
             </a:r>
           </a:p>
         </p:txBody>
@@ -6074,9 +6074,9 @@
                 <a:tableStyleId>{2D5ABB26-0587-4C30-8999-92F81FD0307C}</a:tableStyleId>
               </a:tblPr>
               <a:tblGrid>
-                <a:gridCol w="4494839"/>
-                <a:gridCol w="3520966"/>
-                <a:gridCol w="3115185"/>
+                <a:gridCol w="4542873"/>
+                <a:gridCol w="3495480"/>
+                <a:gridCol w="3092637"/>
               </a:tblGrid>
               <a:tr h="369824">
                 <a:tc>
@@ -6295,7 +6295,7 @@
                           </a:solidFill>
                           <a:latin typeface="Calibri"/>
                         </a:rPr>
-                        <a:t>A holdout: Gold offered to some, withheld from others</a:t>
+                        <a:t>A hold-out: Gold offered to some, withheld from others</a:t>
                       </a:r>
                     </a:p>
                   </a:txBody>
@@ -7522,7 +7522,7 @@
         </p:nvGraphicFramePr>
         <p:xfrm>
           <a:off x="530352" y="1956816"/>
-          <a:ext cx="11130989" cy="2574544"/>
+          <a:ext cx="11130989" cy="3299968"/>
         </p:xfrm>
         <a:graphic>
           <a:graphicData uri="http://schemas.openxmlformats.org/drawingml/2006/table">
@@ -7592,7 +7592,7 @@
                           </a:solidFill>
                           <a:latin typeface="Calibri"/>
                         </a:rPr>
-                        <a:t>A hire-grade answer</a:t>
+                        <a:t>A hire-grade answer, one that gets the job</a:t>
                       </a:r>
                     </a:p>
                   </a:txBody>
@@ -7728,7 +7728,7 @@
                           </a:solidFill>
                           <a:latin typeface="Calibri"/>
                         </a:rPr>
-                        <a:t>Checkout start to order, 72.5 to 55, members on Android only, from the release week</a:t>
+                        <a:t>Checkout start to order, per session, 72.5 to 55, members on Android only, from the release week</a:t>
                       </a:r>
                     </a:p>
                   </a:txBody>
@@ -7739,7 +7739,7 @@
                   </a:tcPr>
                 </a:tc>
               </a:tr>
-              <a:tr h="369824">
+              <a:tr h="853440">
                 <a:tc>
                   <a:txBody>
                     <a:bodyPr/>
@@ -7796,7 +7796,7 @@
                           </a:solidFill>
                           <a:latin typeface="Calibri"/>
                         </a:rPr>
-                        <a:t>iOS members 57 to 56; non-members on Android 52 to 51</a:t>
+                        <a:t>On the same step, iOS members 71 to 70 and non-members on Android 65 to 64; members who joined before August, iOS 68.6 to 69.3</a:t>
                       </a:r>
                     </a:p>
                   </a:txBody>
@@ -7807,7 +7807,7 @@
                   </a:tcPr>
                 </a:tc>
               </a:tr>
-              <a:tr h="611632">
+              <a:tr h="853440">
                 <a:tc>
                   <a:txBody>
                     <a:bodyPr/>
@@ -7864,7 +7864,7 @@
                           </a:solidFill>
                           <a:latin typeface="Calibri"/>
                         </a:rPr>
-                        <a:t>"If the event the release renamed is mapped wrong, I'd rerun it on your mapping."</a:t>
+                        <a:t>"If the order records showed orders holding while the event log fell, or if members who failed came back and ordered later, I'd withdraw it."</a:t>
                       </a:r>
                     </a:p>
                   </a:txBody>
@@ -9202,7 +9202,7 @@
                 </a:solidFill>
                 <a:latin typeface="Calibri"/>
               </a:rPr>
-              <a:t>unprofitable Instamart users, over three quarters to Q1 FY27</a:t>
+              <a:t>Instamart users who cost Swiggy money, let go over the three quarters to Q1 FY27</a:t>
             </a:r>
           </a:p>
         </p:txBody>
@@ -9351,7 +9351,7 @@
                 </a:solidFill>
                 <a:latin typeface="Calibri"/>
               </a:rPr>
-              <a:t>one-month retention of the transacting base, Q1 FY26 to Q1 FY27</a:t>
+              <a:t>Instamart's one-month retention of the users who ordered, Q1 FY26 to Q1 FY27</a:t>
             </a:r>
           </a:p>
         </p:txBody>
@@ -9465,7 +9465,7 @@
                 </a:solidFill>
                 <a:latin typeface="Calibri"/>
               </a:rPr>
-              <a:t>SPEND AT Q6</a:t>
+              <a:t>SPEND IN THE SIXTH QUARTER</a:t>
             </a:r>
           </a:p>
         </p:txBody>
@@ -9500,7 +9500,7 @@
                 </a:solidFill>
                 <a:latin typeface="Calibri"/>
               </a:rPr>
-              <a:t>the Q4 FY24 cohort's spend in its sixth quarter against its first</a:t>
+              <a:t>the cohort that joined in Q4 FY24, against what it spent in the quarter it joined</a:t>
             </a:r>
           </a:p>
         </p:txBody>
@@ -9558,7 +9558,7 @@
         <p:spPr>
           <a:xfrm>
             <a:off x="530352" y="3419856"/>
-            <a:ext cx="11130991" cy="1048512"/>
+            <a:ext cx="11130991" cy="1601216"/>
           </a:xfrm>
           <a:prstGeom prst="rect">
             <a:avLst/>
@@ -9583,7 +9583,7 @@
                 </a:solidFill>
                 <a:latin typeface="Calibri"/>
               </a:rPr>
-              <a:t>Swiggy says it used cohort-level levers (minimum order thresholds, free deliveries, new-user coupons) and weaned away users with low expected lifetime value. Sources: Swiggy's Q1 FY27 and Q2 FY26 shareholder letters, each checked 12 October 2026.</a:t>
+              <a:t>Swiggy says it used offers aimed at chosen groups of users (minimum order values, free deliveries, new-user coupons) and "weaned away certain users ... with low potential Lifetime values", the value a user is expected to bring over all the time she stays, by withdrawing the offers that kept them. India's financial year runs April to March, so Q1 FY27 is April to June 2026 and Q4 FY24 is January to March 2024. Sources: Swiggy's Q1 FY27 and Q2 FY26 shareholder letters, each checked 12 October 2026.</a:t>
             </a:r>
           </a:p>
         </p:txBody>
@@ -11211,7 +11211,7 @@
         <p:spPr>
           <a:xfrm>
             <a:off x="530352" y="4374832"/>
-            <a:ext cx="11130991" cy="1048512"/>
+            <a:ext cx="11130991" cy="1324864"/>
           </a:xfrm>
           <a:prstGeom prst="rect">
             <a:avLst/>
@@ -11236,7 +11236,7 @@
                 </a:solidFill>
                 <a:latin typeface="Calibri"/>
               </a:rPr>
-              <a:t>A cohort chart without its denominator is a shape. Swiggy's table is indexed to its Q4 FY24 cohort's first quarter, and calls the groups "retained user cohorts": the first thing to ask is who stays in the count.</a:t>
+              <a:t>A cohort chart without its denominator is a shape. Swiggy's table compares each cohort's spend with the quarter it joined and calls the groups "retained user cohorts", and it states no denominator: the first thing to ask is who stays in the count. Removing users in one quarter lifts that quarter's cells and every later one, with nobody's behaviour changing.</a:t>
             </a:r>
           </a:p>
         </p:txBody>
@@ -12408,7 +12408,7 @@
         <p:spPr>
           <a:xfrm>
             <a:off x="530352" y="1956816"/>
-            <a:ext cx="11130991" cy="1467104"/>
+            <a:ext cx="11130991" cy="2224531"/>
           </a:xfrm>
           <a:prstGeom prst="roundRect">
             <a:avLst>
@@ -12592,7 +12592,7 @@
         <p:spPr>
           <a:xfrm>
             <a:off x="804671" y="2286000"/>
-            <a:ext cx="10673791" cy="1064768"/>
+            <a:ext cx="10673791" cy="1822195"/>
           </a:xfrm>
           <a:prstGeom prst="rect">
             <a:avLst/>
@@ -12633,7 +12633,7 @@
                 </a:solidFill>
                 <a:latin typeface="Consolas"/>
               </a:rPr>
-              <a:t>week = lambda t: t.dt.to_period("W-SUN").dt.start_time      # weeks start on Monday</a:t>
+              <a:t>monday = placed["event_ts"].dt.to_period("W-SUN").dt.start_time   # W-SUN: weeks end on Sunday, so each starts on a Monday</a:t>
             </a:r>
           </a:p>
           <a:p>
@@ -12649,7 +12649,7 @@
                 </a:solidFill>
                 <a:latin typeface="Consolas"/>
               </a:rPr>
-              <a:t>orders_week = set(zip(placed["user_id"], week(placed["event_ts"])))</a:t>
+              <a:t>orders_week = set(zip(placed["user_id"], monday))                # user_id in events is the member_id in members</a:t>
             </a:r>
           </a:p>
           <a:p>
@@ -12665,7 +12665,23 @@
                 </a:solidFill>
                 <a:latin typeface="Consolas"/>
               </a:rPr>
-              <a:t># members who joined 3 August to 13 September; week k is the k-th full week after the signup week</a:t>
+              <a:t># a member's signup week starts on the Monday on or before her signup date;</a:t>
+            </a:r>
+          </a:p>
+          <a:p>
+            <a:pPr>
+              <a:spcAft>
+                <a:spcPts val="200"/>
+              </a:spcAft>
+            </a:pPr>
+            <a:r>
+              <a:rPr sz="1400" b="0" i="0">
+                <a:solidFill>
+                  <a:srgbClr val="A9A3D2"/>
+                </a:solidFill>
+                <a:latin typeface="Consolas"/>
+              </a:rPr>
+              <a:t># week k is the week whose Monday is k x 7 days after that one</a:t>
             </a:r>
           </a:p>
         </p:txBody>
@@ -12678,7 +12694,7 @@
         </p:nvSpPr>
         <p:spPr>
           <a:xfrm>
-            <a:off x="530352" y="3588512"/>
+            <a:off x="530352" y="4345939"/>
             <a:ext cx="11130991" cy="1048512"/>
           </a:xfrm>
           <a:prstGeom prst="rect">
@@ -13996,7 +14012,7 @@
         </p:nvGraphicFramePr>
         <p:xfrm>
           <a:off x="530352" y="1956816"/>
-          <a:ext cx="11130990" cy="2332736"/>
+          <a:ext cx="11130991" cy="2332736"/>
         </p:xfrm>
         <a:graphic>
           <a:graphicData uri="http://schemas.openxmlformats.org/drawingml/2006/table">
@@ -14005,8 +14021,8 @@
                 <a:tableStyleId>{2D5ABB26-0587-4C30-8999-92F81FD0307C}</a:tableStyleId>
               </a:tblPr>
               <a:tblGrid>
-                <a:gridCol w="4389567"/>
-                <a:gridCol w="6741423"/>
+                <a:gridCol w="5003138"/>
+                <a:gridCol w="6127853"/>
               </a:tblGrid>
               <a:tr h="369824">
                 <a:tc>
@@ -14205,7 +14221,7 @@
                           </a:solidFill>
                           <a:latin typeface="Calibri"/>
                         </a:rPr>
-                        <a:t>The last month counts</a:t>
+                        <a:t>September, the last month, is whole and counted</a:t>
                       </a:r>
                     </a:p>
                   </a:txBody>
@@ -14227,7 +14243,7 @@
                           </a:solidFill>
                           <a:latin typeface="Calibri"/>
                         </a:rPr>
-                        <a:t>The last week is partial and leaves the table</a:t>
+                        <a:t>The week of 28 September has three days and is left out</a:t>
                       </a:r>
                     </a:p>
                   </a:txBody>

--- a/content/W04/D4/slides/C2_W04_D04_fallback_STUDENT.pptx
+++ b/content/W04/D4/slides/C2_W04_D04_fallback_STUDENT.pptx
@@ -12629,11 +12629,11 @@
             <a:r>
               <a:rPr sz="1400" b="0" i="0">
                 <a:solidFill>
-                  <a:srgbClr val="E4E1F1"/>
+                  <a:srgbClr val="A9A3D2"/>
                 </a:solidFill>
                 <a:latin typeface="Consolas"/>
               </a:rPr>
-              <a:t>monday = placed["event_ts"].dt.to_period("W-SUN").dt.start_time   # W-SUN: weeks end on Sunday, so each starts on a Monday</a:t>
+              <a:t># W-SUN: weeks end on Sunday, so each week starts on a Monday</a:t>
             </a:r>
           </a:p>
           <a:p>
@@ -12649,7 +12649,7 @@
                 </a:solidFill>
                 <a:latin typeface="Consolas"/>
               </a:rPr>
-              <a:t>orders_week = set(zip(placed["user_id"], monday))                # user_id in events is the member_id in members</a:t>
+              <a:t>monday = placed["event_ts"].dt.to_period("W-SUN").dt.start_time</a:t>
             </a:r>
           </a:p>
           <a:p>
@@ -12665,7 +12665,39 @@
                 </a:solidFill>
                 <a:latin typeface="Consolas"/>
               </a:rPr>
-              <a:t># a member's signup week starts on the Monday on or before her signup date;</a:t>
+              <a:t># user_id in events is the member's member_id in members</a:t>
+            </a:r>
+          </a:p>
+          <a:p>
+            <a:pPr>
+              <a:spcAft>
+                <a:spcPts val="200"/>
+              </a:spcAft>
+            </a:pPr>
+            <a:r>
+              <a:rPr sz="1400" b="0" i="0">
+                <a:solidFill>
+                  <a:srgbClr val="E4E1F1"/>
+                </a:solidFill>
+                <a:latin typeface="Consolas"/>
+              </a:rPr>
+              <a:t>orders_week = set(zip(placed["user_id"], monday))</a:t>
+            </a:r>
+          </a:p>
+          <a:p>
+            <a:pPr>
+              <a:spcAft>
+                <a:spcPts val="200"/>
+              </a:spcAft>
+            </a:pPr>
+            <a:r>
+              <a:rPr sz="1400" b="0" i="0">
+                <a:solidFill>
+                  <a:srgbClr val="A9A3D2"/>
+                </a:solidFill>
+                <a:latin typeface="Consolas"/>
+              </a:rPr>
+              <a:t># her signup week starts on the Monday on or before her signup date;</a:t>
             </a:r>
           </a:p>
           <a:p>

--- a/content/W04/D4/slides/C2_W04_D04_fallback_STUDENT.pptx
+++ b/content/W04/D4/slides/C2_W04_D04_fallback_STUDENT.pptx
@@ -11236,7 +11236,7 @@
                 </a:solidFill>
                 <a:latin typeface="Calibri"/>
               </a:rPr>
-              <a:t>A cohort chart without its denominator is a shape. Swiggy's table compares each cohort's spend with the quarter it joined and calls the groups "retained user cohorts", and it states no denominator: the first thing to ask is who stays in the count. Removing users in one quarter lifts that quarter's cells and every later one, with nobody's behaviour changing.</a:t>
+              <a:t>A cohort chart without its denominator is a shape. Swiggy's table indexes every cohort's spend to what the Q4 FY24 cohort spent in the quarter it joined and calls the groups "retained user cohorts", and it states no denominator: the first thing to ask is who stays in the count. Removing users in one quarter lifts that quarter's cells and every later one, with nobody's behaviour changing.</a:t>
             </a:r>
           </a:p>
         </p:txBody>

--- a/content/W04/D4/slides/C2_W04_D04_fallback_STUDENT.pptx
+++ b/content/W04/D4/slides/C2_W04_D04_fallback_STUDENT.pptx
@@ -860,7 +860,7 @@
           <a:lstStyle/>
           <a:p>
             <a:r>
-              <a:t>LIVE, 15 minutes. Pairs score the hire-grade side on the scorecard. The move is Tuesday's: restate,</a:t>
+              <a:t>LIVE, 18 minutes. Pairs read the dispute, then score the hire-grade side on the scorecard. The move is Tuesday's: restate,</a:t>
             </a:r>
           </a:p>
           <a:p>
@@ -945,7 +945,7 @@
           </a:p>
           <a:p>
             <a:r>
-              <a:t>faculty block (tentative) takes them whenever it runs. Then return to the Kahoot if it has not run.</a:t>
+              <a:t>faculty block (tentative) takes them whenever it runs.</a:t>
             </a:r>
           </a:p>
           <a:p>
@@ -4794,7 +4794,7 @@
                 </a:solidFill>
                 <a:latin typeface="Georgia"/>
               </a:rPr>
-              <a:t>07</a:t>
+              <a:t>12</a:t>
             </a:r>
           </a:p>
         </p:txBody>
@@ -5119,7 +5119,7 @@
                 </a:solidFill>
                 <a:latin typeface="Calibri"/>
               </a:rPr>
-              <a:t>Week 4 Day 4: the fallback block</a:t>
+              <a:t>Week 4, Day 4. When can a retention number rise or hold with nobody's behaviour changing?</a:t>
             </a:r>
           </a:p>
         </p:txBody>
@@ -5402,7 +5402,7 @@
       </p:sp>
       <p:pic>
         <p:nvPicPr>
-          <p:cNvPr id="9" name="mermaid diagram" descr="29d30e77a001c4e4.png"/>
+          <p:cNvPr id="9" name="mermaid diagram" descr="344eb795deba6d10.png"/>
           <p:cNvPicPr>
             <a:picLocks noChangeAspect="1"/>
           </p:cNvPicPr>
@@ -5416,8 +5416,8 @@
         </p:blipFill>
         <p:spPr>
           <a:xfrm>
-            <a:off x="2924022" y="1956816"/>
-            <a:ext cx="6343650" cy="2300287"/>
+            <a:off x="530352" y="1940113"/>
+            <a:ext cx="4786326" cy="4001900"/>
           </a:xfrm>
           <a:prstGeom prst="rect">
             <a:avLst/>
@@ -5432,8 +5432,8 @@
         </p:nvSpPr>
         <p:spPr>
           <a:xfrm>
-            <a:off x="530352" y="4403407"/>
-            <a:ext cx="11130991" cy="1324864"/>
+            <a:off x="5761917" y="1956816"/>
+            <a:ext cx="5899425" cy="2430272"/>
           </a:xfrm>
           <a:prstGeom prst="rect">
             <a:avLst/>
@@ -6906,7 +6906,7 @@
                 </a:solidFill>
                 <a:latin typeface="Georgia"/>
               </a:rPr>
-              <a:t>10</a:t>
+              <a:t>15</a:t>
             </a:r>
           </a:p>
         </p:txBody>
@@ -7231,7 +7231,7 @@
                 </a:solidFill>
                 <a:latin typeface="Calibri"/>
               </a:rPr>
-              <a:t>Week 4 Day 4: the fallback block</a:t>
+              <a:t>Week 4, Day 4. When can a retention number rise or hold with nobody's behaviour changing?</a:t>
             </a:r>
           </a:p>
         </p:txBody>
@@ -11180,7 +11180,7 @@
       </p:sp>
       <p:pic>
         <p:nvPicPr>
-          <p:cNvPr id="9" name="mermaid diagram" descr="c88584e5f6a98df8.png"/>
+          <p:cNvPr id="9" name="mermaid diagram" descr="0f77e012ee3316a6.png"/>
           <p:cNvPicPr>
             <a:picLocks noChangeAspect="1"/>
           </p:cNvPicPr>
@@ -11194,8 +11194,8 @@
         </p:blipFill>
         <p:spPr>
           <a:xfrm>
-            <a:off x="1773878" y="1956816"/>
-            <a:ext cx="8643937" cy="2271712"/>
+            <a:off x="2920111" y="1664208"/>
+            <a:ext cx="6351471" cy="3256279"/>
           </a:xfrm>
           <a:prstGeom prst="rect">
             <a:avLst/>
@@ -11210,8 +11210,8 @@
         </p:nvSpPr>
         <p:spPr>
           <a:xfrm>
-            <a:off x="530352" y="4374832"/>
-            <a:ext cx="11130991" cy="1324864"/>
+            <a:off x="530352" y="4966208"/>
+            <a:ext cx="11130991" cy="1233424"/>
           </a:xfrm>
           <a:prstGeom prst="rect">
             <a:avLst/>
@@ -11224,11 +11224,6 @@
           </a:bodyPr>
           <a:lstStyle/>
           <a:p>
-            <a:pPr>
-              <a:spcAft>
-                <a:spcPts val="800"/>
-              </a:spcAft>
-            </a:pPr>
             <a:r>
               <a:rPr sz="1600" b="0" i="0">
                 <a:solidFill>
@@ -11793,7 +11788,7 @@
                 </a:solidFill>
                 <a:latin typeface="Georgia"/>
               </a:rPr>
-              <a:t>08</a:t>
+              <a:t>13</a:t>
             </a:r>
           </a:p>
         </p:txBody>
@@ -12118,7 +12113,7 @@
                 </a:solidFill>
                 <a:latin typeface="Calibri"/>
               </a:rPr>
-              <a:t>Week 4 Day 4: the fallback block</a:t>
+              <a:t>Week 4, Day 4. When can a retention number rise or hold with nobody's behaviour changing?</a:t>
             </a:r>
           </a:p>
         </p:txBody>
@@ -14842,7 +14837,7 @@
                 </a:solidFill>
                 <a:latin typeface="Georgia"/>
               </a:rPr>
-              <a:t>09</a:t>
+              <a:t>14</a:t>
             </a:r>
           </a:p>
         </p:txBody>
@@ -15167,7 +15162,7 @@
                 </a:solidFill>
                 <a:latin typeface="Calibri"/>
               </a:rPr>
-              <a:t>Week 4 Day 4: the fallback block</a:t>
+              <a:t>Week 4, Day 4. When can a retention number rise or hold with nobody's behaviour changing?</a:t>
             </a:r>
           </a:p>
         </p:txBody>
